--- a/deliverables/Priora_Deck.pptx
+++ b/deliverables/Priora_Deck.pptx
@@ -32,9 +32,31 @@
     <p:sldId id="280" r:id="rId26"/>
     <p:sldId id="281" r:id="rId27"/>
     <p:sldId id="282" r:id="rId28"/>
+    <p:sldId id="283" r:id="rId29"/>
+    <p:sldId id="284" r:id="rId30"/>
+    <p:sldId id="285" r:id="rId31"/>
+    <p:sldId id="286" r:id="rId32"/>
+    <p:sldId id="287" r:id="rId33"/>
+    <p:sldId id="288" r:id="rId34"/>
+    <p:sldId id="289" r:id="rId35"/>
+    <p:sldId id="290" r:id="rId36"/>
+    <p:sldId id="291" r:id="rId37"/>
+    <p:sldId id="292" r:id="rId38"/>
+    <p:sldId id="293" r:id="rId39"/>
+    <p:sldId id="294" r:id="rId40"/>
+    <p:sldId id="295" r:id="rId41"/>
+    <p:sldId id="296" r:id="rId42"/>
+    <p:sldId id="297" r:id="rId43"/>
+    <p:sldId id="298" r:id="rId44"/>
+    <p:sldId id="299" r:id="rId45"/>
+    <p:sldId id="300" r:id="rId46"/>
+    <p:sldId id="301" r:id="rId47"/>
+    <p:sldId id="302" r:id="rId48"/>
+    <p:sldId id="303" r:id="rId49"/>
+    <p:sldId id="304" r:id="rId50"/>
   </p:sldIdLst>
   <p:notesMasterIdLst>
-    <p:notesMasterId r:id="rId29"/>
+    <p:notesMasterId r:id="rId51"/>
   </p:notesMasterIdLst>
   <p:sldSz cx="9144000" cy="5143500"/>
   <p:notesSz cx="5143500" cy="9144000"/>
@@ -529,7 +551,6 @@
             <a:r>
               <a:rPr lang="en-US" dirty="0"/>
               <a:t>title
-0:00–0:15
 "Hi, I'm Asjad, and I built this solo. Priora sees outbreaks a week before the lab reports do. That radar is live: the three red dots are clusters it flagged today across Islamabad and Rawalpindi."</a:t>
             </a:r>
             <a:endParaRPr lang="en-US" dirty="0"/>
@@ -618,8 +639,548 @@
           <a:p>
             <a:r>
               <a:rPr lang="en-US" dirty="0"/>
-              <a:t>pipeline (click 2 of 14)
-0:55–1:40 · one click per step, keep moving
+              <a:t>solution (click 1 of 2)
+~15s · two clicks
+"Our solution: Priora turns every front-desk conversation into an anonymous disease signal, through an AI triage nurse that speaks Urdu. The hospital gets safer queues today, which is why it gets installed. The district gets outbreak warnings a week earlier, which is why it matters."</a:t>
+            </a:r>
+            <a:endParaRPr lang="en-US" dirty="0"/>
+          </a:p>
+        </p:txBody>
+      </p:sp>
+      <p:sp>
+        <p:nvSpPr>
+          <p:cNvPr id="4" name="Slide Number Placeholder 3"/>
+          <p:cNvSpPr>
+            <a:spLocks noGrp="1"/>
+          </p:cNvSpPr>
+          <p:nvPr>
+            <p:ph type="sldNum" sz="quarter" idx="10"/>
+          </p:nvPr>
+        </p:nvSpPr>
+        <p:spPr/>
+        <p:txBody>
+          <a:bodyPr/>
+          <a:lstStyle/>
+          <a:p>
+            <a:fld id="{F7021451-1387-4CA6-816F-3879F97B5CBC}" type="slidenum">
+              <a:rPr lang="en-US"/>
+              <a:t>10</a:t>
+            </a:fld>
+            <a:endParaRPr lang="en-US"/>
+          </a:p>
+        </p:txBody>
+      </p:sp>
+    </p:spTree>
+    <p:extLst>
+      <p:ext uri="{BB962C8B-B14F-4D97-AF65-F5344CB8AC3E}">
+        <p14:creationId xmlns:p14="http://schemas.microsoft.com/office/powerpoint/2010/main" val="1024086991"/>
+      </p:ext>
+    </p:extLst>
+  </p:cSld>
+  <p:clrMapOvr>
+    <a:masterClrMapping/>
+  </p:clrMapOvr>
+</p:notes>
+</file>
+
+<file path=ppt/notesSlides/notesSlide11.xml><?xml version="1.0" encoding="utf-8"?>
+<p:notes xmlns:a="http://schemas.openxmlformats.org/drawingml/2006/main" xmlns:r="http://schemas.openxmlformats.org/officeDocument/2006/relationships" xmlns:p="http://schemas.openxmlformats.org/presentationml/2006/main">
+  <p:cSld>
+    <p:spTree>
+      <p:nvGrpSpPr>
+        <p:cNvPr id="1" name=""/>
+        <p:cNvGrpSpPr/>
+        <p:nvPr/>
+      </p:nvGrpSpPr>
+      <p:grpSpPr>
+        <a:xfrm>
+          <a:off x="0" y="0"/>
+          <a:ext cx="0" cy="0"/>
+          <a:chOff x="0" y="0"/>
+          <a:chExt cx="0" cy="0"/>
+        </a:xfrm>
+      </p:grpSpPr>
+      <p:sp>
+        <p:nvSpPr>
+          <p:cNvPr id="2" name="Slide Image Placeholder 1"/>
+          <p:cNvSpPr>
+            <a:spLocks noGrp="1" noRot="1" noChangeAspect="1"/>
+          </p:cNvSpPr>
+          <p:nvPr>
+            <p:ph type="sldImg"/>
+          </p:nvPr>
+        </p:nvSpPr>
+        <p:spPr/>
+      </p:sp>
+      <p:sp>
+        <p:nvSpPr>
+          <p:cNvPr id="3" name="Notes Placeholder 2"/>
+          <p:cNvSpPr>
+            <a:spLocks noGrp="1"/>
+          </p:cNvSpPr>
+          <p:nvPr>
+            <p:ph type="body" idx="1"/>
+          </p:nvPr>
+        </p:nvSpPr>
+        <p:spPr/>
+        <p:txBody>
+          <a:bodyPr/>
+          <a:lstStyle/>
+          <a:p>
+            <a:r>
+              <a:rPr lang="en-US" dirty="0"/>
+              <a:t>solution (click 2 of 2)
+~15s · two clicks
+"Our solution: Priora turns every front-desk conversation into an anonymous disease signal, through an AI triage nurse that speaks Urdu. The hospital gets safer queues today, which is why it gets installed. The district gets outbreak warnings a week earlier, which is why it matters."</a:t>
+            </a:r>
+            <a:endParaRPr lang="en-US" dirty="0"/>
+          </a:p>
+        </p:txBody>
+      </p:sp>
+      <p:sp>
+        <p:nvSpPr>
+          <p:cNvPr id="4" name="Slide Number Placeholder 3"/>
+          <p:cNvSpPr>
+            <a:spLocks noGrp="1"/>
+          </p:cNvSpPr>
+          <p:nvPr>
+            <p:ph type="sldNum" sz="quarter" idx="10"/>
+          </p:nvPr>
+        </p:nvSpPr>
+        <p:spPr/>
+        <p:txBody>
+          <a:bodyPr/>
+          <a:lstStyle/>
+          <a:p>
+            <a:fld id="{F7021451-1387-4CA6-816F-3879F97B5CBC}" type="slidenum">
+              <a:rPr lang="en-US"/>
+              <a:t>11</a:t>
+            </a:fld>
+            <a:endParaRPr lang="en-US"/>
+          </a:p>
+        </p:txBody>
+      </p:sp>
+    </p:spTree>
+    <p:extLst>
+      <p:ext uri="{BB962C8B-B14F-4D97-AF65-F5344CB8AC3E}">
+        <p14:creationId xmlns:p14="http://schemas.microsoft.com/office/powerpoint/2010/main" val="1024086991"/>
+      </p:ext>
+    </p:extLst>
+  </p:cSld>
+  <p:clrMapOvr>
+    <a:masterClrMapping/>
+  </p:clrMapOvr>
+</p:notes>
+</file>
+
+<file path=ppt/notesSlides/notesSlide12.xml><?xml version="1.0" encoding="utf-8"?>
+<p:notes xmlns:a="http://schemas.openxmlformats.org/drawingml/2006/main" xmlns:r="http://schemas.openxmlformats.org/officeDocument/2006/relationships" xmlns:p="http://schemas.openxmlformats.org/presentationml/2006/main">
+  <p:cSld>
+    <p:spTree>
+      <p:nvGrpSpPr>
+        <p:cNvPr id="1" name=""/>
+        <p:cNvGrpSpPr/>
+        <p:nvPr/>
+      </p:nvGrpSpPr>
+      <p:grpSpPr>
+        <a:xfrm>
+          <a:off x="0" y="0"/>
+          <a:ext cx="0" cy="0"/>
+          <a:chOff x="0" y="0"/>
+          <a:chExt cx="0" cy="0"/>
+        </a:xfrm>
+      </p:grpSpPr>
+      <p:sp>
+        <p:nvSpPr>
+          <p:cNvPr id="2" name="Slide Image Placeholder 1"/>
+          <p:cNvSpPr>
+            <a:spLocks noGrp="1" noRot="1" noChangeAspect="1"/>
+          </p:cNvSpPr>
+          <p:nvPr>
+            <p:ph type="sldImg"/>
+          </p:nvPr>
+        </p:nvSpPr>
+        <p:spPr/>
+      </p:sp>
+      <p:sp>
+        <p:nvSpPr>
+          <p:cNvPr id="3" name="Notes Placeholder 2"/>
+          <p:cNvSpPr>
+            <a:spLocks noGrp="1"/>
+          </p:cNvSpPr>
+          <p:nvPr>
+            <p:ph type="body" idx="1"/>
+          </p:nvPr>
+        </p:nvSpPr>
+        <p:spPr/>
+        <p:txBody>
+          <a:bodyPr/>
+          <a:lstStyle/>
+          <a:p>
+            <a:r>
+              <a:rPr lang="en-US" dirty="0"/>
+              <a:t>mvp (click 1 of 4)
+~20s · four clicks
+"What we built, live today: three portals on one network. The patient talks to a kiosk in Urdu and gets a token. The nurse and doctor get SATS triage, a severity-sorted queue and a cited history brief. And the district health officer gets a live map across eight hospitals and twenty areas, with AI alerts and surge plans. It even keeps working offline."</a:t>
+            </a:r>
+            <a:endParaRPr lang="en-US" dirty="0"/>
+          </a:p>
+        </p:txBody>
+      </p:sp>
+      <p:sp>
+        <p:nvSpPr>
+          <p:cNvPr id="4" name="Slide Number Placeholder 3"/>
+          <p:cNvSpPr>
+            <a:spLocks noGrp="1"/>
+          </p:cNvSpPr>
+          <p:nvPr>
+            <p:ph type="sldNum" sz="quarter" idx="10"/>
+          </p:nvPr>
+        </p:nvSpPr>
+        <p:spPr/>
+        <p:txBody>
+          <a:bodyPr/>
+          <a:lstStyle/>
+          <a:p>
+            <a:fld id="{F7021451-1387-4CA6-816F-3879F97B5CBC}" type="slidenum">
+              <a:rPr lang="en-US"/>
+              <a:t>12</a:t>
+            </a:fld>
+            <a:endParaRPr lang="en-US"/>
+          </a:p>
+        </p:txBody>
+      </p:sp>
+    </p:spTree>
+    <p:extLst>
+      <p:ext uri="{BB962C8B-B14F-4D97-AF65-F5344CB8AC3E}">
+        <p14:creationId xmlns:p14="http://schemas.microsoft.com/office/powerpoint/2010/main" val="1024086991"/>
+      </p:ext>
+    </p:extLst>
+  </p:cSld>
+  <p:clrMapOvr>
+    <a:masterClrMapping/>
+  </p:clrMapOvr>
+</p:notes>
+</file>
+
+<file path=ppt/notesSlides/notesSlide13.xml><?xml version="1.0" encoding="utf-8"?>
+<p:notes xmlns:a="http://schemas.openxmlformats.org/drawingml/2006/main" xmlns:r="http://schemas.openxmlformats.org/officeDocument/2006/relationships" xmlns:p="http://schemas.openxmlformats.org/presentationml/2006/main">
+  <p:cSld>
+    <p:spTree>
+      <p:nvGrpSpPr>
+        <p:cNvPr id="1" name=""/>
+        <p:cNvGrpSpPr/>
+        <p:nvPr/>
+      </p:nvGrpSpPr>
+      <p:grpSpPr>
+        <a:xfrm>
+          <a:off x="0" y="0"/>
+          <a:ext cx="0" cy="0"/>
+          <a:chOff x="0" y="0"/>
+          <a:chExt cx="0" cy="0"/>
+        </a:xfrm>
+      </p:grpSpPr>
+      <p:sp>
+        <p:nvSpPr>
+          <p:cNvPr id="2" name="Slide Image Placeholder 1"/>
+          <p:cNvSpPr>
+            <a:spLocks noGrp="1" noRot="1" noChangeAspect="1"/>
+          </p:cNvSpPr>
+          <p:nvPr>
+            <p:ph type="sldImg"/>
+          </p:nvPr>
+        </p:nvSpPr>
+        <p:spPr/>
+      </p:sp>
+      <p:sp>
+        <p:nvSpPr>
+          <p:cNvPr id="3" name="Notes Placeholder 2"/>
+          <p:cNvSpPr>
+            <a:spLocks noGrp="1"/>
+          </p:cNvSpPr>
+          <p:nvPr>
+            <p:ph type="body" idx="1"/>
+          </p:nvPr>
+        </p:nvSpPr>
+        <p:spPr/>
+        <p:txBody>
+          <a:bodyPr/>
+          <a:lstStyle/>
+          <a:p>
+            <a:r>
+              <a:rPr lang="en-US" dirty="0"/>
+              <a:t>mvp (click 2 of 4)
+~20s · four clicks
+"What we built, live today: three portals on one network. The patient talks to a kiosk in Urdu and gets a token. The nurse and doctor get SATS triage, a severity-sorted queue and a cited history brief. And the district health officer gets a live map across eight hospitals and twenty areas, with AI alerts and surge plans. It even keeps working offline."</a:t>
+            </a:r>
+            <a:endParaRPr lang="en-US" dirty="0"/>
+          </a:p>
+        </p:txBody>
+      </p:sp>
+      <p:sp>
+        <p:nvSpPr>
+          <p:cNvPr id="4" name="Slide Number Placeholder 3"/>
+          <p:cNvSpPr>
+            <a:spLocks noGrp="1"/>
+          </p:cNvSpPr>
+          <p:nvPr>
+            <p:ph type="sldNum" sz="quarter" idx="10"/>
+          </p:nvPr>
+        </p:nvSpPr>
+        <p:spPr/>
+        <p:txBody>
+          <a:bodyPr/>
+          <a:lstStyle/>
+          <a:p>
+            <a:fld id="{F7021451-1387-4CA6-816F-3879F97B5CBC}" type="slidenum">
+              <a:rPr lang="en-US"/>
+              <a:t>13</a:t>
+            </a:fld>
+            <a:endParaRPr lang="en-US"/>
+          </a:p>
+        </p:txBody>
+      </p:sp>
+    </p:spTree>
+    <p:extLst>
+      <p:ext uri="{BB962C8B-B14F-4D97-AF65-F5344CB8AC3E}">
+        <p14:creationId xmlns:p14="http://schemas.microsoft.com/office/powerpoint/2010/main" val="1024086991"/>
+      </p:ext>
+    </p:extLst>
+  </p:cSld>
+  <p:clrMapOvr>
+    <a:masterClrMapping/>
+  </p:clrMapOvr>
+</p:notes>
+</file>
+
+<file path=ppt/notesSlides/notesSlide14.xml><?xml version="1.0" encoding="utf-8"?>
+<p:notes xmlns:a="http://schemas.openxmlformats.org/drawingml/2006/main" xmlns:r="http://schemas.openxmlformats.org/officeDocument/2006/relationships" xmlns:p="http://schemas.openxmlformats.org/presentationml/2006/main">
+  <p:cSld>
+    <p:spTree>
+      <p:nvGrpSpPr>
+        <p:cNvPr id="1" name=""/>
+        <p:cNvGrpSpPr/>
+        <p:nvPr/>
+      </p:nvGrpSpPr>
+      <p:grpSpPr>
+        <a:xfrm>
+          <a:off x="0" y="0"/>
+          <a:ext cx="0" cy="0"/>
+          <a:chOff x="0" y="0"/>
+          <a:chExt cx="0" cy="0"/>
+        </a:xfrm>
+      </p:grpSpPr>
+      <p:sp>
+        <p:nvSpPr>
+          <p:cNvPr id="2" name="Slide Image Placeholder 1"/>
+          <p:cNvSpPr>
+            <a:spLocks noGrp="1" noRot="1" noChangeAspect="1"/>
+          </p:cNvSpPr>
+          <p:nvPr>
+            <p:ph type="sldImg"/>
+          </p:nvPr>
+        </p:nvSpPr>
+        <p:spPr/>
+      </p:sp>
+      <p:sp>
+        <p:nvSpPr>
+          <p:cNvPr id="3" name="Notes Placeholder 2"/>
+          <p:cNvSpPr>
+            <a:spLocks noGrp="1"/>
+          </p:cNvSpPr>
+          <p:nvPr>
+            <p:ph type="body" idx="1"/>
+          </p:nvPr>
+        </p:nvSpPr>
+        <p:spPr/>
+        <p:txBody>
+          <a:bodyPr/>
+          <a:lstStyle/>
+          <a:p>
+            <a:r>
+              <a:rPr lang="en-US" dirty="0"/>
+              <a:t>mvp (click 3 of 4)
+~20s · four clicks
+"What we built, live today: three portals on one network. The patient talks to a kiosk in Urdu and gets a token. The nurse and doctor get SATS triage, a severity-sorted queue and a cited history brief. And the district health officer gets a live map across eight hospitals and twenty areas, with AI alerts and surge plans. It even keeps working offline."</a:t>
+            </a:r>
+            <a:endParaRPr lang="en-US" dirty="0"/>
+          </a:p>
+        </p:txBody>
+      </p:sp>
+      <p:sp>
+        <p:nvSpPr>
+          <p:cNvPr id="4" name="Slide Number Placeholder 3"/>
+          <p:cNvSpPr>
+            <a:spLocks noGrp="1"/>
+          </p:cNvSpPr>
+          <p:nvPr>
+            <p:ph type="sldNum" sz="quarter" idx="10"/>
+          </p:nvPr>
+        </p:nvSpPr>
+        <p:spPr/>
+        <p:txBody>
+          <a:bodyPr/>
+          <a:lstStyle/>
+          <a:p>
+            <a:fld id="{F7021451-1387-4CA6-816F-3879F97B5CBC}" type="slidenum">
+              <a:rPr lang="en-US"/>
+              <a:t>14</a:t>
+            </a:fld>
+            <a:endParaRPr lang="en-US"/>
+          </a:p>
+        </p:txBody>
+      </p:sp>
+    </p:spTree>
+    <p:extLst>
+      <p:ext uri="{BB962C8B-B14F-4D97-AF65-F5344CB8AC3E}">
+        <p14:creationId xmlns:p14="http://schemas.microsoft.com/office/powerpoint/2010/main" val="1024086991"/>
+      </p:ext>
+    </p:extLst>
+  </p:cSld>
+  <p:clrMapOvr>
+    <a:masterClrMapping/>
+  </p:clrMapOvr>
+</p:notes>
+</file>
+
+<file path=ppt/notesSlides/notesSlide15.xml><?xml version="1.0" encoding="utf-8"?>
+<p:notes xmlns:a="http://schemas.openxmlformats.org/drawingml/2006/main" xmlns:r="http://schemas.openxmlformats.org/officeDocument/2006/relationships" xmlns:p="http://schemas.openxmlformats.org/presentationml/2006/main">
+  <p:cSld>
+    <p:spTree>
+      <p:nvGrpSpPr>
+        <p:cNvPr id="1" name=""/>
+        <p:cNvGrpSpPr/>
+        <p:nvPr/>
+      </p:nvGrpSpPr>
+      <p:grpSpPr>
+        <a:xfrm>
+          <a:off x="0" y="0"/>
+          <a:ext cx="0" cy="0"/>
+          <a:chOff x="0" y="0"/>
+          <a:chExt cx="0" cy="0"/>
+        </a:xfrm>
+      </p:grpSpPr>
+      <p:sp>
+        <p:nvSpPr>
+          <p:cNvPr id="2" name="Slide Image Placeholder 1"/>
+          <p:cNvSpPr>
+            <a:spLocks noGrp="1" noRot="1" noChangeAspect="1"/>
+          </p:cNvSpPr>
+          <p:nvPr>
+            <p:ph type="sldImg"/>
+          </p:nvPr>
+        </p:nvSpPr>
+        <p:spPr/>
+      </p:sp>
+      <p:sp>
+        <p:nvSpPr>
+          <p:cNvPr id="3" name="Notes Placeholder 2"/>
+          <p:cNvSpPr>
+            <a:spLocks noGrp="1"/>
+          </p:cNvSpPr>
+          <p:nvPr>
+            <p:ph type="body" idx="1"/>
+          </p:nvPr>
+        </p:nvSpPr>
+        <p:spPr/>
+        <p:txBody>
+          <a:bodyPr/>
+          <a:lstStyle/>
+          <a:p>
+            <a:r>
+              <a:rPr lang="en-US" dirty="0"/>
+              <a:t>mvp (click 4 of 4)
+~20s · four clicks
+"What we built, live today: three portals on one network. The patient talks to a kiosk in Urdu and gets a token. The nurse and doctor get SATS triage, a severity-sorted queue and a cited history brief. And the district health officer gets a live map across eight hospitals and twenty areas, with AI alerts and surge plans. It even keeps working offline."</a:t>
+            </a:r>
+            <a:endParaRPr lang="en-US" dirty="0"/>
+          </a:p>
+        </p:txBody>
+      </p:sp>
+      <p:sp>
+        <p:nvSpPr>
+          <p:cNvPr id="4" name="Slide Number Placeholder 3"/>
+          <p:cNvSpPr>
+            <a:spLocks noGrp="1"/>
+          </p:cNvSpPr>
+          <p:nvPr>
+            <p:ph type="sldNum" sz="quarter" idx="10"/>
+          </p:nvPr>
+        </p:nvSpPr>
+        <p:spPr/>
+        <p:txBody>
+          <a:bodyPr/>
+          <a:lstStyle/>
+          <a:p>
+            <a:fld id="{F7021451-1387-4CA6-816F-3879F97B5CBC}" type="slidenum">
+              <a:rPr lang="en-US"/>
+              <a:t>15</a:t>
+            </a:fld>
+            <a:endParaRPr lang="en-US"/>
+          </a:p>
+        </p:txBody>
+      </p:sp>
+    </p:spTree>
+    <p:extLst>
+      <p:ext uri="{BB962C8B-B14F-4D97-AF65-F5344CB8AC3E}">
+        <p14:creationId xmlns:p14="http://schemas.microsoft.com/office/powerpoint/2010/main" val="1024086991"/>
+      </p:ext>
+    </p:extLst>
+  </p:cSld>
+  <p:clrMapOvr>
+    <a:masterClrMapping/>
+  </p:clrMapOvr>
+</p:notes>
+</file>
+
+<file path=ppt/notesSlides/notesSlide16.xml><?xml version="1.0" encoding="utf-8"?>
+<p:notes xmlns:a="http://schemas.openxmlformats.org/drawingml/2006/main" xmlns:r="http://schemas.openxmlformats.org/officeDocument/2006/relationships" xmlns:p="http://schemas.openxmlformats.org/presentationml/2006/main">
+  <p:cSld>
+    <p:spTree>
+      <p:nvGrpSpPr>
+        <p:cNvPr id="1" name=""/>
+        <p:cNvGrpSpPr/>
+        <p:nvPr/>
+      </p:nvGrpSpPr>
+      <p:grpSpPr>
+        <a:xfrm>
+          <a:off x="0" y="0"/>
+          <a:ext cx="0" cy="0"/>
+          <a:chOff x="0" y="0"/>
+          <a:chExt cx="0" cy="0"/>
+        </a:xfrm>
+      </p:grpSpPr>
+      <p:sp>
+        <p:nvSpPr>
+          <p:cNvPr id="2" name="Slide Image Placeholder 1"/>
+          <p:cNvSpPr>
+            <a:spLocks noGrp="1" noRot="1" noChangeAspect="1"/>
+          </p:cNvSpPr>
+          <p:nvPr>
+            <p:ph type="sldImg"/>
+          </p:nvPr>
+        </p:nvSpPr>
+        <p:spPr/>
+      </p:sp>
+      <p:sp>
+        <p:nvSpPr>
+          <p:cNvPr id="3" name="Notes Placeholder 2"/>
+          <p:cNvSpPr>
+            <a:spLocks noGrp="1"/>
+          </p:cNvSpPr>
+          <p:nvPr>
+            <p:ph type="body" idx="1"/>
+          </p:nvPr>
+        </p:nvSpPr>
+        <p:spPr/>
+        <p:txBody>
+          <a:bodyPr/>
+          <a:lstStyle/>
+          <a:p>
+            <a:r>
+              <a:rPr lang="en-US" dirty="0"/>
+              <a:t>pipeline (click 1 of 14)
+one click per step, keep moving
 Speak: "The patient speaks in Urdu at the kiosk."
 Understand: "Gemini understands, reading twice for safety."
 Ask: "It asks one follow-up question, aloud."
@@ -658,7 +1219,7 @@
           <a:p>
             <a:fld id="{F7021451-1387-4CA6-816F-3879F97B5CBC}" type="slidenum">
               <a:rPr lang="en-US"/>
-              <a:t>10</a:t>
+              <a:t>16</a:t>
             </a:fld>
             <a:endParaRPr lang="en-US"/>
           </a:p>
@@ -677,7 +1238,7 @@
 </p:notes>
 </file>
 
-<file path=ppt/notesSlides/notesSlide11.xml><?xml version="1.0" encoding="utf-8"?>
+<file path=ppt/notesSlides/notesSlide17.xml><?xml version="1.0" encoding="utf-8"?>
 <p:notes xmlns:a="http://schemas.openxmlformats.org/drawingml/2006/main" xmlns:r="http://schemas.openxmlformats.org/officeDocument/2006/relationships" xmlns:p="http://schemas.openxmlformats.org/presentationml/2006/main">
   <p:cSld>
     <p:spTree>
@@ -723,8 +1284,8 @@
           <a:p>
             <a:r>
               <a:rPr lang="en-US" dirty="0"/>
-              <a:t>pipeline (click 3 of 14)
-0:55–1:40 · one click per step, keep moving
+              <a:t>pipeline (click 2 of 14)
+one click per step, keep moving
 Speak: "The patient speaks in Urdu at the kiosk."
 Understand: "Gemini understands, reading twice for safety."
 Ask: "It asks one follow-up question, aloud."
@@ -763,7 +1324,7 @@
           <a:p>
             <a:fld id="{F7021451-1387-4CA6-816F-3879F97B5CBC}" type="slidenum">
               <a:rPr lang="en-US"/>
-              <a:t>11</a:t>
+              <a:t>17</a:t>
             </a:fld>
             <a:endParaRPr lang="en-US"/>
           </a:p>
@@ -782,7 +1343,7 @@
 </p:notes>
 </file>
 
-<file path=ppt/notesSlides/notesSlide12.xml><?xml version="1.0" encoding="utf-8"?>
+<file path=ppt/notesSlides/notesSlide18.xml><?xml version="1.0" encoding="utf-8"?>
 <p:notes xmlns:a="http://schemas.openxmlformats.org/drawingml/2006/main" xmlns:r="http://schemas.openxmlformats.org/officeDocument/2006/relationships" xmlns:p="http://schemas.openxmlformats.org/presentationml/2006/main">
   <p:cSld>
     <p:spTree>
@@ -828,8 +1389,8 @@
           <a:p>
             <a:r>
               <a:rPr lang="en-US" dirty="0"/>
-              <a:t>pipeline (click 4 of 14)
-0:55–1:40 · one click per step, keep moving
+              <a:t>pipeline (click 3 of 14)
+one click per step, keep moving
 Speak: "The patient speaks in Urdu at the kiosk."
 Understand: "Gemini understands, reading twice for safety."
 Ask: "It asks one follow-up question, aloud."
@@ -868,7 +1429,7 @@
           <a:p>
             <a:fld id="{F7021451-1387-4CA6-816F-3879F97B5CBC}" type="slidenum">
               <a:rPr lang="en-US"/>
-              <a:t>12</a:t>
+              <a:t>18</a:t>
             </a:fld>
             <a:endParaRPr lang="en-US"/>
           </a:p>
@@ -887,7 +1448,7 @@
 </p:notes>
 </file>
 
-<file path=ppt/notesSlides/notesSlide13.xml><?xml version="1.0" encoding="utf-8"?>
+<file path=ppt/notesSlides/notesSlide19.xml><?xml version="1.0" encoding="utf-8"?>
 <p:notes xmlns:a="http://schemas.openxmlformats.org/drawingml/2006/main" xmlns:r="http://schemas.openxmlformats.org/officeDocument/2006/relationships" xmlns:p="http://schemas.openxmlformats.org/presentationml/2006/main">
   <p:cSld>
     <p:spTree>
@@ -933,8 +1494,8 @@
           <a:p>
             <a:r>
               <a:rPr lang="en-US" dirty="0"/>
-              <a:t>pipeline (click 5 of 14)
-0:55–1:40 · one click per step, keep moving
+              <a:t>pipeline (click 4 of 14)
+one click per step, keep moving
 Speak: "The patient speaks in Urdu at the kiosk."
 Understand: "Gemini understands, reading twice for safety."
 Ask: "It asks one follow-up question, aloud."
@@ -973,7 +1534,7 @@
           <a:p>
             <a:fld id="{F7021451-1387-4CA6-816F-3879F97B5CBC}" type="slidenum">
               <a:rPr lang="en-US"/>
-              <a:t>13</a:t>
+              <a:t>19</a:t>
             </a:fld>
             <a:endParaRPr lang="en-US"/>
           </a:p>
@@ -992,7 +1553,7 @@
 </p:notes>
 </file>
 
-<file path=ppt/notesSlides/notesSlide14.xml><?xml version="1.0" encoding="utf-8"?>
+<file path=ppt/notesSlides/notesSlide2.xml><?xml version="1.0" encoding="utf-8"?>
 <p:notes xmlns:a="http://schemas.openxmlformats.org/drawingml/2006/main" xmlns:r="http://schemas.openxmlformats.org/officeDocument/2006/relationships" xmlns:p="http://schemas.openxmlformats.org/presentationml/2006/main">
   <p:cSld>
     <p:spTree>
@@ -1038,8 +1599,99 @@
           <a:p>
             <a:r>
               <a:rPr lang="en-US" dirty="0"/>
-              <a:t>pipeline (click 6 of 14)
-0:55–1:40 · one click per step, keep moving
+              <a:t>problem-statement (click 1 of 3)
+~20s · three clicks
+"Here's the problem we chose. Pakistan finds outbreaks weeks late, because the very first signal, what patients say at the hospital front desk, is never captured and never shared between hospitals. In Sindh last year, 819 dengue cases were reported officially while hospitals saw over twelve thousand. Rawalpindi and Islamabad hospitals have no information systems at any level, and PIMS alone sees eight thousand patients a day on paper. So this isn't a queue problem or a records problem. It's a blind spot for the whole district."
+Why this matters vs other teams: triage and hospital-management systems optimise one hospital. Nobody is solving the district's view across hospitals.</a:t>
+            </a:r>
+            <a:endParaRPr lang="en-US" dirty="0"/>
+          </a:p>
+        </p:txBody>
+      </p:sp>
+      <p:sp>
+        <p:nvSpPr>
+          <p:cNvPr id="4" name="Slide Number Placeholder 3"/>
+          <p:cNvSpPr>
+            <a:spLocks noGrp="1"/>
+          </p:cNvSpPr>
+          <p:nvPr>
+            <p:ph type="sldNum" sz="quarter" idx="10"/>
+          </p:nvPr>
+        </p:nvSpPr>
+        <p:spPr/>
+        <p:txBody>
+          <a:bodyPr/>
+          <a:lstStyle/>
+          <a:p>
+            <a:fld id="{F7021451-1387-4CA6-816F-3879F97B5CBC}" type="slidenum">
+              <a:rPr lang="en-US"/>
+              <a:t>2</a:t>
+            </a:fld>
+            <a:endParaRPr lang="en-US"/>
+          </a:p>
+        </p:txBody>
+      </p:sp>
+    </p:spTree>
+    <p:extLst>
+      <p:ext uri="{BB962C8B-B14F-4D97-AF65-F5344CB8AC3E}">
+        <p14:creationId xmlns:p14="http://schemas.microsoft.com/office/powerpoint/2010/main" val="1024086991"/>
+      </p:ext>
+    </p:extLst>
+  </p:cSld>
+  <p:clrMapOvr>
+    <a:masterClrMapping/>
+  </p:clrMapOvr>
+</p:notes>
+</file>
+
+<file path=ppt/notesSlides/notesSlide20.xml><?xml version="1.0" encoding="utf-8"?>
+<p:notes xmlns:a="http://schemas.openxmlformats.org/drawingml/2006/main" xmlns:r="http://schemas.openxmlformats.org/officeDocument/2006/relationships" xmlns:p="http://schemas.openxmlformats.org/presentationml/2006/main">
+  <p:cSld>
+    <p:spTree>
+      <p:nvGrpSpPr>
+        <p:cNvPr id="1" name=""/>
+        <p:cNvGrpSpPr/>
+        <p:nvPr/>
+      </p:nvGrpSpPr>
+      <p:grpSpPr>
+        <a:xfrm>
+          <a:off x="0" y="0"/>
+          <a:ext cx="0" cy="0"/>
+          <a:chOff x="0" y="0"/>
+          <a:chExt cx="0" cy="0"/>
+        </a:xfrm>
+      </p:grpSpPr>
+      <p:sp>
+        <p:nvSpPr>
+          <p:cNvPr id="2" name="Slide Image Placeholder 1"/>
+          <p:cNvSpPr>
+            <a:spLocks noGrp="1" noRot="1" noChangeAspect="1"/>
+          </p:cNvSpPr>
+          <p:nvPr>
+            <p:ph type="sldImg"/>
+          </p:nvPr>
+        </p:nvSpPr>
+        <p:spPr/>
+      </p:sp>
+      <p:sp>
+        <p:nvSpPr>
+          <p:cNvPr id="3" name="Notes Placeholder 2"/>
+          <p:cNvSpPr>
+            <a:spLocks noGrp="1"/>
+          </p:cNvSpPr>
+          <p:nvPr>
+            <p:ph type="body" idx="1"/>
+          </p:nvPr>
+        </p:nvSpPr>
+        <p:spPr/>
+        <p:txBody>
+          <a:bodyPr/>
+          <a:lstStyle/>
+          <a:p>
+            <a:r>
+              <a:rPr lang="en-US" dirty="0"/>
+              <a:t>pipeline (click 5 of 14)
+one click per step, keep moving
 Speak: "The patient speaks in Urdu at the kiosk."
 Understand: "Gemini understands, reading twice for safety."
 Ask: "It asks one follow-up question, aloud."
@@ -1078,7 +1730,7 @@
           <a:p>
             <a:fld id="{F7021451-1387-4CA6-816F-3879F97B5CBC}" type="slidenum">
               <a:rPr lang="en-US"/>
-              <a:t>14</a:t>
+              <a:t>20</a:t>
             </a:fld>
             <a:endParaRPr lang="en-US"/>
           </a:p>
@@ -1097,7 +1749,7 @@
 </p:notes>
 </file>
 
-<file path=ppt/notesSlides/notesSlide15.xml><?xml version="1.0" encoding="utf-8"?>
+<file path=ppt/notesSlides/notesSlide21.xml><?xml version="1.0" encoding="utf-8"?>
 <p:notes xmlns:a="http://schemas.openxmlformats.org/drawingml/2006/main" xmlns:r="http://schemas.openxmlformats.org/officeDocument/2006/relationships" xmlns:p="http://schemas.openxmlformats.org/presentationml/2006/main">
   <p:cSld>
     <p:spTree>
@@ -1143,8 +1795,8 @@
           <a:p>
             <a:r>
               <a:rPr lang="en-US" dirty="0"/>
-              <a:t>pipeline (click 7 of 14)
-0:55–1:40 · one click per step, keep moving
+              <a:t>pipeline (click 6 of 14)
+one click per step, keep moving
 Speak: "The patient speaks in Urdu at the kiosk."
 Understand: "Gemini understands, reading twice for safety."
 Ask: "It asks one follow-up question, aloud."
@@ -1183,7 +1835,7 @@
           <a:p>
             <a:fld id="{F7021451-1387-4CA6-816F-3879F97B5CBC}" type="slidenum">
               <a:rPr lang="en-US"/>
-              <a:t>15</a:t>
+              <a:t>21</a:t>
             </a:fld>
             <a:endParaRPr lang="en-US"/>
           </a:p>
@@ -1202,7 +1854,7 @@
 </p:notes>
 </file>
 
-<file path=ppt/notesSlides/notesSlide16.xml><?xml version="1.0" encoding="utf-8"?>
+<file path=ppt/notesSlides/notesSlide22.xml><?xml version="1.0" encoding="utf-8"?>
 <p:notes xmlns:a="http://schemas.openxmlformats.org/drawingml/2006/main" xmlns:r="http://schemas.openxmlformats.org/officeDocument/2006/relationships" xmlns:p="http://schemas.openxmlformats.org/presentationml/2006/main">
   <p:cSld>
     <p:spTree>
@@ -1248,8 +1900,8 @@
           <a:p>
             <a:r>
               <a:rPr lang="en-US" dirty="0"/>
-              <a:t>pipeline (click 8 of 14)
-0:55–1:40 · one click per step, keep moving
+              <a:t>pipeline (click 7 of 14)
+one click per step, keep moving
 Speak: "The patient speaks in Urdu at the kiosk."
 Understand: "Gemini understands, reading twice for safety."
 Ask: "It asks one follow-up question, aloud."
@@ -1288,7 +1940,7 @@
           <a:p>
             <a:fld id="{F7021451-1387-4CA6-816F-3879F97B5CBC}" type="slidenum">
               <a:rPr lang="en-US"/>
-              <a:t>16</a:t>
+              <a:t>22</a:t>
             </a:fld>
             <a:endParaRPr lang="en-US"/>
           </a:p>
@@ -1307,7 +1959,7 @@
 </p:notes>
 </file>
 
-<file path=ppt/notesSlides/notesSlide17.xml><?xml version="1.0" encoding="utf-8"?>
+<file path=ppt/notesSlides/notesSlide23.xml><?xml version="1.0" encoding="utf-8"?>
 <p:notes xmlns:a="http://schemas.openxmlformats.org/drawingml/2006/main" xmlns:r="http://schemas.openxmlformats.org/officeDocument/2006/relationships" xmlns:p="http://schemas.openxmlformats.org/presentationml/2006/main">
   <p:cSld>
     <p:spTree>
@@ -1353,8 +2005,8 @@
           <a:p>
             <a:r>
               <a:rPr lang="en-US" dirty="0"/>
-              <a:t>pipeline (click 9 of 14)
-0:55–1:40 · one click per step, keep moving
+              <a:t>pipeline (click 8 of 14)
+one click per step, keep moving
 Speak: "The patient speaks in Urdu at the kiosk."
 Understand: "Gemini understands, reading twice for safety."
 Ask: "It asks one follow-up question, aloud."
@@ -1393,7 +2045,7 @@
           <a:p>
             <a:fld id="{F7021451-1387-4CA6-816F-3879F97B5CBC}" type="slidenum">
               <a:rPr lang="en-US"/>
-              <a:t>17</a:t>
+              <a:t>23</a:t>
             </a:fld>
             <a:endParaRPr lang="en-US"/>
           </a:p>
@@ -1412,7 +2064,7 @@
 </p:notes>
 </file>
 
-<file path=ppt/notesSlides/notesSlide18.xml><?xml version="1.0" encoding="utf-8"?>
+<file path=ppt/notesSlides/notesSlide24.xml><?xml version="1.0" encoding="utf-8"?>
 <p:notes xmlns:a="http://schemas.openxmlformats.org/drawingml/2006/main" xmlns:r="http://schemas.openxmlformats.org/officeDocument/2006/relationships" xmlns:p="http://schemas.openxmlformats.org/presentationml/2006/main">
   <p:cSld>
     <p:spTree>
@@ -1458,8 +2110,8 @@
           <a:p>
             <a:r>
               <a:rPr lang="en-US" dirty="0"/>
-              <a:t>pipeline (click 10 of 14)
-0:55–1:40 · one click per step, keep moving
+              <a:t>pipeline (click 9 of 14)
+one click per step, keep moving
 Speak: "The patient speaks in Urdu at the kiosk."
 Understand: "Gemini understands, reading twice for safety."
 Ask: "It asks one follow-up question, aloud."
@@ -1498,7 +2150,7 @@
           <a:p>
             <a:fld id="{F7021451-1387-4CA6-816F-3879F97B5CBC}" type="slidenum">
               <a:rPr lang="en-US"/>
-              <a:t>18</a:t>
+              <a:t>24</a:t>
             </a:fld>
             <a:endParaRPr lang="en-US"/>
           </a:p>
@@ -1517,7 +2169,7 @@
 </p:notes>
 </file>
 
-<file path=ppt/notesSlides/notesSlide19.xml><?xml version="1.0" encoding="utf-8"?>
+<file path=ppt/notesSlides/notesSlide25.xml><?xml version="1.0" encoding="utf-8"?>
 <p:notes xmlns:a="http://schemas.openxmlformats.org/drawingml/2006/main" xmlns:r="http://schemas.openxmlformats.org/officeDocument/2006/relationships" xmlns:p="http://schemas.openxmlformats.org/presentationml/2006/main">
   <p:cSld>
     <p:spTree>
@@ -1563,8 +2215,8 @@
           <a:p>
             <a:r>
               <a:rPr lang="en-US" dirty="0"/>
-              <a:t>pipeline (click 11 of 14)
-0:55–1:40 · one click per step, keep moving
+              <a:t>pipeline (click 10 of 14)
+one click per step, keep moving
 Speak: "The patient speaks in Urdu at the kiosk."
 Understand: "Gemini understands, reading twice for safety."
 Ask: "It asks one follow-up question, aloud."
@@ -1603,7 +2255,7 @@
           <a:p>
             <a:fld id="{F7021451-1387-4CA6-816F-3879F97B5CBC}" type="slidenum">
               <a:rPr lang="en-US"/>
-              <a:t>19</a:t>
+              <a:t>25</a:t>
             </a:fld>
             <a:endParaRPr lang="en-US"/>
           </a:p>
@@ -1622,7 +2274,7 @@
 </p:notes>
 </file>
 
-<file path=ppt/notesSlides/notesSlide2.xml><?xml version="1.0" encoding="utf-8"?>
+<file path=ppt/notesSlides/notesSlide26.xml><?xml version="1.0" encoding="utf-8"?>
 <p:notes xmlns:a="http://schemas.openxmlformats.org/drawingml/2006/main" xmlns:r="http://schemas.openxmlformats.org/officeDocument/2006/relationships" xmlns:p="http://schemas.openxmlformats.org/presentationml/2006/main">
   <p:cSld>
     <p:spTree>
@@ -1668,104 +2320,8 @@
           <a:p>
             <a:r>
               <a:rPr lang="en-US" dirty="0"/>
-              <a:t>problem (click 1 of 5)
-0:15–0:40 · five quick clicks
-1 "Day zero: the first patients with fever reach the OPDs."
-2 "Only about a third get a lab test, days later."
-3 "The week closes and the report is compiled about three days after that."
-4 "And only 75% of those weekly reports even arrive (NIH Pakistan, 2025)."
-5 "So the district notices around day 17 (median, in our simulation). In Sindh last year, 819 dengue cases were reported officially while hospitals and labs saw over 12,000 (Dawn)."
-If a doctor asks: you see the first fever patients on day zero; the system sees them weeks later.
-If a business judge asks: beds, kits and fogging are bought on the wrong number, too late.</a:t>
-            </a:r>
-            <a:endParaRPr lang="en-US" dirty="0"/>
-          </a:p>
-        </p:txBody>
-      </p:sp>
-      <p:sp>
-        <p:nvSpPr>
-          <p:cNvPr id="4" name="Slide Number Placeholder 3"/>
-          <p:cNvSpPr>
-            <a:spLocks noGrp="1"/>
-          </p:cNvSpPr>
-          <p:nvPr>
-            <p:ph type="sldNum" sz="quarter" idx="10"/>
-          </p:nvPr>
-        </p:nvSpPr>
-        <p:spPr/>
-        <p:txBody>
-          <a:bodyPr/>
-          <a:lstStyle/>
-          <a:p>
-            <a:fld id="{F7021451-1387-4CA6-816F-3879F97B5CBC}" type="slidenum">
-              <a:rPr lang="en-US"/>
-              <a:t>2</a:t>
-            </a:fld>
-            <a:endParaRPr lang="en-US"/>
-          </a:p>
-        </p:txBody>
-      </p:sp>
-    </p:spTree>
-    <p:extLst>
-      <p:ext uri="{BB962C8B-B14F-4D97-AF65-F5344CB8AC3E}">
-        <p14:creationId xmlns:p14="http://schemas.microsoft.com/office/powerpoint/2010/main" val="1024086991"/>
-      </p:ext>
-    </p:extLst>
-  </p:cSld>
-  <p:clrMapOvr>
-    <a:masterClrMapping/>
-  </p:clrMapOvr>
-</p:notes>
-</file>
-
-<file path=ppt/notesSlides/notesSlide20.xml><?xml version="1.0" encoding="utf-8"?>
-<p:notes xmlns:a="http://schemas.openxmlformats.org/drawingml/2006/main" xmlns:r="http://schemas.openxmlformats.org/officeDocument/2006/relationships" xmlns:p="http://schemas.openxmlformats.org/presentationml/2006/main">
-  <p:cSld>
-    <p:spTree>
-      <p:nvGrpSpPr>
-        <p:cNvPr id="1" name=""/>
-        <p:cNvGrpSpPr/>
-        <p:nvPr/>
-      </p:nvGrpSpPr>
-      <p:grpSpPr>
-        <a:xfrm>
-          <a:off x="0" y="0"/>
-          <a:ext cx="0" cy="0"/>
-          <a:chOff x="0" y="0"/>
-          <a:chExt cx="0" cy="0"/>
-        </a:xfrm>
-      </p:grpSpPr>
-      <p:sp>
-        <p:nvSpPr>
-          <p:cNvPr id="2" name="Slide Image Placeholder 1"/>
-          <p:cNvSpPr>
-            <a:spLocks noGrp="1" noRot="1" noChangeAspect="1"/>
-          </p:cNvSpPr>
-          <p:nvPr>
-            <p:ph type="sldImg"/>
-          </p:nvPr>
-        </p:nvSpPr>
-        <p:spPr/>
-      </p:sp>
-      <p:sp>
-        <p:nvSpPr>
-          <p:cNvPr id="3" name="Notes Placeholder 2"/>
-          <p:cNvSpPr>
-            <a:spLocks noGrp="1"/>
-          </p:cNvSpPr>
-          <p:nvPr>
-            <p:ph type="body" idx="1"/>
-          </p:nvPr>
-        </p:nvSpPr>
-        <p:spPr/>
-        <p:txBody>
-          <a:bodyPr/>
-          <a:lstStyle/>
-          <a:p>
-            <a:r>
-              <a:rPr lang="en-US" dirty="0"/>
-              <a:t>pipeline (click 12 of 14)
-0:55–1:40 · one click per step, keep moving
+              <a:t>pipeline (click 11 of 14)
+one click per step, keep moving
 Speak: "The patient speaks in Urdu at the kiosk."
 Understand: "Gemini understands, reading twice for safety."
 Ask: "It asks one follow-up question, aloud."
@@ -1804,7 +2360,7 @@
           <a:p>
             <a:fld id="{F7021451-1387-4CA6-816F-3879F97B5CBC}" type="slidenum">
               <a:rPr lang="en-US"/>
-              <a:t>20</a:t>
+              <a:t>26</a:t>
             </a:fld>
             <a:endParaRPr lang="en-US"/>
           </a:p>
@@ -1823,7 +2379,7 @@
 </p:notes>
 </file>
 
-<file path=ppt/notesSlides/notesSlide21.xml><?xml version="1.0" encoding="utf-8"?>
+<file path=ppt/notesSlides/notesSlide27.xml><?xml version="1.0" encoding="utf-8"?>
 <p:notes xmlns:a="http://schemas.openxmlformats.org/drawingml/2006/main" xmlns:r="http://schemas.openxmlformats.org/officeDocument/2006/relationships" xmlns:p="http://schemas.openxmlformats.org/presentationml/2006/main">
   <p:cSld>
     <p:spTree>
@@ -1869,8 +2425,8 @@
           <a:p>
             <a:r>
               <a:rPr lang="en-US" dirty="0"/>
-              <a:t>pipeline (click 13 of 14)
-0:55–1:40 · one click per step, keep moving
+              <a:t>pipeline (click 12 of 14)
+one click per step, keep moving
 Speak: "The patient speaks in Urdu at the kiosk."
 Understand: "Gemini understands, reading twice for safety."
 Ask: "It asks one follow-up question, aloud."
@@ -1909,7 +2465,7 @@
           <a:p>
             <a:fld id="{F7021451-1387-4CA6-816F-3879F97B5CBC}" type="slidenum">
               <a:rPr lang="en-US"/>
-              <a:t>21</a:t>
+              <a:t>27</a:t>
             </a:fld>
             <a:endParaRPr lang="en-US"/>
           </a:p>
@@ -1928,7 +2484,7 @@
 </p:notes>
 </file>
 
-<file path=ppt/notesSlides/notesSlide22.xml><?xml version="1.0" encoding="utf-8"?>
+<file path=ppt/notesSlides/notesSlide28.xml><?xml version="1.0" encoding="utf-8"?>
 <p:notes xmlns:a="http://schemas.openxmlformats.org/drawingml/2006/main" xmlns:r="http://schemas.openxmlformats.org/officeDocument/2006/relationships" xmlns:p="http://schemas.openxmlformats.org/presentationml/2006/main">
   <p:cSld>
     <p:spTree>
@@ -1974,8 +2530,8 @@
           <a:p>
             <a:r>
               <a:rPr lang="en-US" dirty="0"/>
-              <a:t>pipeline (click 14 of 14)
-0:55–1:40 · one click per step, keep moving
+              <a:t>pipeline (click 13 of 14)
+one click per step, keep moving
 Speak: "The patient speaks in Urdu at the kiosk."
 Understand: "Gemini understands, reading twice for safety."
 Ask: "It asks one follow-up question, aloud."
@@ -2014,7 +2570,7 @@
           <a:p>
             <a:fld id="{F7021451-1387-4CA6-816F-3879F97B5CBC}" type="slidenum">
               <a:rPr lang="en-US"/>
-              <a:t>22</a:t>
+              <a:t>28</a:t>
             </a:fld>
             <a:endParaRPr lang="en-US"/>
           </a:p>
@@ -2033,7 +2589,7 @@
 </p:notes>
 </file>
 
-<file path=ppt/notesSlides/notesSlide23.xml><?xml version="1.0" encoding="utf-8"?>
+<file path=ppt/notesSlides/notesSlide29.xml><?xml version="1.0" encoding="utf-8"?>
 <p:notes xmlns:a="http://schemas.openxmlformats.org/drawingml/2006/main" xmlns:r="http://schemas.openxmlformats.org/officeDocument/2006/relationships" xmlns:p="http://schemas.openxmlformats.org/presentationml/2006/main">
   <p:cSld>
     <p:spTree>
@@ -2079,1032 +2635,8 @@
           <a:p>
             <a:r>
               <a:rPr lang="en-US" dirty="0"/>
-              <a:t>demo
-1:40–3:00 · switch to the browser tabs
-1. Kiosk: code AHMED54K7Q → Find me → mic: "Seenay mein dard hai, baayen baazu tak ja raha hai, paseena aa raha hai." Answer the follow-up → Correct.
-2. Nurse: open his token → HR 130 · RR 30 · BP 95 · Temp 37 → pick ORANGE yourself → system says RED → Confirm.
-3. Doctor (/doctor/emergency): Ahmed on top → open the brief → click one citation.
-4. District: click the G-9 dengue alert → chart, hospitals, AI brief, surge plan.
-If anything fails, go straight to the next slide.</a:t>
-            </a:r>
-            <a:endParaRPr lang="en-US" dirty="0"/>
-          </a:p>
-        </p:txBody>
-      </p:sp>
-      <p:sp>
-        <p:nvSpPr>
-          <p:cNvPr id="4" name="Slide Number Placeholder 3"/>
-          <p:cNvSpPr>
-            <a:spLocks noGrp="1"/>
-          </p:cNvSpPr>
-          <p:nvPr>
-            <p:ph type="sldNum" sz="quarter" idx="10"/>
-          </p:nvPr>
-        </p:nvSpPr>
-        <p:spPr/>
-        <p:txBody>
-          <a:bodyPr/>
-          <a:lstStyle/>
-          <a:p>
-            <a:fld id="{F7021451-1387-4CA6-816F-3879F97B5CBC}" type="slidenum">
-              <a:rPr lang="en-US"/>
-              <a:t>23</a:t>
-            </a:fld>
-            <a:endParaRPr lang="en-US"/>
-          </a:p>
-        </p:txBody>
-      </p:sp>
-    </p:spTree>
-    <p:extLst>
-      <p:ext uri="{BB962C8B-B14F-4D97-AF65-F5344CB8AC3E}">
-        <p14:creationId xmlns:p14="http://schemas.microsoft.com/office/powerpoint/2010/main" val="1024086991"/>
-      </p:ext>
-    </p:extLst>
-  </p:cSld>
-  <p:clrMapOvr>
-    <a:masterClrMapping/>
-  </p:clrMapOvr>
-</p:notes>
-</file>
-
-<file path=ppt/notesSlides/notesSlide24.xml><?xml version="1.0" encoding="utf-8"?>
-<p:notes xmlns:a="http://schemas.openxmlformats.org/drawingml/2006/main" xmlns:r="http://schemas.openxmlformats.org/officeDocument/2006/relationships" xmlns:p="http://schemas.openxmlformats.org/presentationml/2006/main">
-  <p:cSld>
-    <p:spTree>
-      <p:nvGrpSpPr>
-        <p:cNvPr id="1" name=""/>
-        <p:cNvGrpSpPr/>
-        <p:nvPr/>
-      </p:nvGrpSpPr>
-      <p:grpSpPr>
-        <a:xfrm>
-          <a:off x="0" y="0"/>
-          <a:ext cx="0" cy="0"/>
-          <a:chOff x="0" y="0"/>
-          <a:chExt cx="0" cy="0"/>
-        </a:xfrm>
-      </p:grpSpPr>
-      <p:sp>
-        <p:nvSpPr>
-          <p:cNvPr id="2" name="Slide Image Placeholder 1"/>
-          <p:cNvSpPr>
-            <a:spLocks noGrp="1" noRot="1" noChangeAspect="1"/>
-          </p:cNvSpPr>
-          <p:nvPr>
-            <p:ph type="sldImg"/>
-          </p:nvPr>
-        </p:nvSpPr>
-        <p:spPr/>
-      </p:sp>
-      <p:sp>
-        <p:nvSpPr>
-          <p:cNvPr id="3" name="Notes Placeholder 2"/>
-          <p:cNvSpPr>
-            <a:spLocks noGrp="1"/>
-          </p:cNvSpPr>
-          <p:nvPr>
-            <p:ph type="body" idx="1"/>
-          </p:nvPr>
-        </p:nvSpPr>
-        <p:spPr/>
-        <p:txBody>
-          <a:bodyPr/>
-          <a:lstStyle/>
-          <a:p>
-            <a:r>
-              <a:rPr lang="en-US" dirty="0"/>
-              <a:t>proof (click 1 of 3)
-3:00–3:30
-"Across a thousand simulated outbreaks, Priora warns a median seven days earlier, and catches 87% within two weeks versus 39% today. On 110 cases written to trick it, it missed zero emergencies, and it triaged 30 out of 30 real Urdu and English voice clips correctly."
-Be honest if asked: the lead time is a simulation; it needs about 40% of patients passing a kiosk. Only the 75% report figure is sourced; the rest are stated assumptions you can change at /impact.
-If an AI expert asks: single reading 93.6% accuracy with 0.9% under-triage; two readings 0% under-triage for 1.8 points more over-triage; syndrome tagging 93% precision, 87% recall; our offline model 68% on the hard set, so it's the fallback, not the primary.</a:t>
-            </a:r>
-            <a:endParaRPr lang="en-US" dirty="0"/>
-          </a:p>
-        </p:txBody>
-      </p:sp>
-      <p:sp>
-        <p:nvSpPr>
-          <p:cNvPr id="4" name="Slide Number Placeholder 3"/>
-          <p:cNvSpPr>
-            <a:spLocks noGrp="1"/>
-          </p:cNvSpPr>
-          <p:nvPr>
-            <p:ph type="sldNum" sz="quarter" idx="10"/>
-          </p:nvPr>
-        </p:nvSpPr>
-        <p:spPr/>
-        <p:txBody>
-          <a:bodyPr/>
-          <a:lstStyle/>
-          <a:p>
-            <a:fld id="{F7021451-1387-4CA6-816F-3879F97B5CBC}" type="slidenum">
-              <a:rPr lang="en-US"/>
-              <a:t>24</a:t>
-            </a:fld>
-            <a:endParaRPr lang="en-US"/>
-          </a:p>
-        </p:txBody>
-      </p:sp>
-    </p:spTree>
-    <p:extLst>
-      <p:ext uri="{BB962C8B-B14F-4D97-AF65-F5344CB8AC3E}">
-        <p14:creationId xmlns:p14="http://schemas.microsoft.com/office/powerpoint/2010/main" val="1024086991"/>
-      </p:ext>
-    </p:extLst>
-  </p:cSld>
-  <p:clrMapOvr>
-    <a:masterClrMapping/>
-  </p:clrMapOvr>
-</p:notes>
-</file>
-
-<file path=ppt/notesSlides/notesSlide25.xml><?xml version="1.0" encoding="utf-8"?>
-<p:notes xmlns:a="http://schemas.openxmlformats.org/drawingml/2006/main" xmlns:r="http://schemas.openxmlformats.org/officeDocument/2006/relationships" xmlns:p="http://schemas.openxmlformats.org/presentationml/2006/main">
-  <p:cSld>
-    <p:spTree>
-      <p:nvGrpSpPr>
-        <p:cNvPr id="1" name=""/>
-        <p:cNvGrpSpPr/>
-        <p:nvPr/>
-      </p:nvGrpSpPr>
-      <p:grpSpPr>
-        <a:xfrm>
-          <a:off x="0" y="0"/>
-          <a:ext cx="0" cy="0"/>
-          <a:chOff x="0" y="0"/>
-          <a:chExt cx="0" cy="0"/>
-        </a:xfrm>
-      </p:grpSpPr>
-      <p:sp>
-        <p:nvSpPr>
-          <p:cNvPr id="2" name="Slide Image Placeholder 1"/>
-          <p:cNvSpPr>
-            <a:spLocks noGrp="1" noRot="1" noChangeAspect="1"/>
-          </p:cNvSpPr>
-          <p:nvPr>
-            <p:ph type="sldImg"/>
-          </p:nvPr>
-        </p:nvSpPr>
-        <p:spPr/>
-      </p:sp>
-      <p:sp>
-        <p:nvSpPr>
-          <p:cNvPr id="3" name="Notes Placeholder 2"/>
-          <p:cNvSpPr>
-            <a:spLocks noGrp="1"/>
-          </p:cNvSpPr>
-          <p:nvPr>
-            <p:ph type="body" idx="1"/>
-          </p:nvPr>
-        </p:nvSpPr>
-        <p:spPr/>
-        <p:txBody>
-          <a:bodyPr/>
-          <a:lstStyle/>
-          <a:p>
-            <a:r>
-              <a:rPr lang="en-US" dirty="0"/>
-              <a:t>proof (click 2 of 3)
-3:00–3:30
-"Across a thousand simulated outbreaks, Priora warns a median seven days earlier, and catches 87% within two weeks versus 39% today. On 110 cases written to trick it, it missed zero emergencies, and it triaged 30 out of 30 real Urdu and English voice clips correctly."
-Be honest if asked: the lead time is a simulation; it needs about 40% of patients passing a kiosk. Only the 75% report figure is sourced; the rest are stated assumptions you can change at /impact.
-If an AI expert asks: single reading 93.6% accuracy with 0.9% under-triage; two readings 0% under-triage for 1.8 points more over-triage; syndrome tagging 93% precision, 87% recall; our offline model 68% on the hard set, so it's the fallback, not the primary.</a:t>
-            </a:r>
-            <a:endParaRPr lang="en-US" dirty="0"/>
-          </a:p>
-        </p:txBody>
-      </p:sp>
-      <p:sp>
-        <p:nvSpPr>
-          <p:cNvPr id="4" name="Slide Number Placeholder 3"/>
-          <p:cNvSpPr>
-            <a:spLocks noGrp="1"/>
-          </p:cNvSpPr>
-          <p:nvPr>
-            <p:ph type="sldNum" sz="quarter" idx="10"/>
-          </p:nvPr>
-        </p:nvSpPr>
-        <p:spPr/>
-        <p:txBody>
-          <a:bodyPr/>
-          <a:lstStyle/>
-          <a:p>
-            <a:fld id="{F7021451-1387-4CA6-816F-3879F97B5CBC}" type="slidenum">
-              <a:rPr lang="en-US"/>
-              <a:t>25</a:t>
-            </a:fld>
-            <a:endParaRPr lang="en-US"/>
-          </a:p>
-        </p:txBody>
-      </p:sp>
-    </p:spTree>
-    <p:extLst>
-      <p:ext uri="{BB962C8B-B14F-4D97-AF65-F5344CB8AC3E}">
-        <p14:creationId xmlns:p14="http://schemas.microsoft.com/office/powerpoint/2010/main" val="1024086991"/>
-      </p:ext>
-    </p:extLst>
-  </p:cSld>
-  <p:clrMapOvr>
-    <a:masterClrMapping/>
-  </p:clrMapOvr>
-</p:notes>
-</file>
-
-<file path=ppt/notesSlides/notesSlide26.xml><?xml version="1.0" encoding="utf-8"?>
-<p:notes xmlns:a="http://schemas.openxmlformats.org/drawingml/2006/main" xmlns:r="http://schemas.openxmlformats.org/officeDocument/2006/relationships" xmlns:p="http://schemas.openxmlformats.org/presentationml/2006/main">
-  <p:cSld>
-    <p:spTree>
-      <p:nvGrpSpPr>
-        <p:cNvPr id="1" name=""/>
-        <p:cNvGrpSpPr/>
-        <p:nvPr/>
-      </p:nvGrpSpPr>
-      <p:grpSpPr>
-        <a:xfrm>
-          <a:off x="0" y="0"/>
-          <a:ext cx="0" cy="0"/>
-          <a:chOff x="0" y="0"/>
-          <a:chExt cx="0" cy="0"/>
-        </a:xfrm>
-      </p:grpSpPr>
-      <p:sp>
-        <p:nvSpPr>
-          <p:cNvPr id="2" name="Slide Image Placeholder 1"/>
-          <p:cNvSpPr>
-            <a:spLocks noGrp="1" noRot="1" noChangeAspect="1"/>
-          </p:cNvSpPr>
-          <p:nvPr>
-            <p:ph type="sldImg"/>
-          </p:nvPr>
-        </p:nvSpPr>
-        <p:spPr/>
-      </p:sp>
-      <p:sp>
-        <p:nvSpPr>
-          <p:cNvPr id="3" name="Notes Placeholder 2"/>
-          <p:cNvSpPr>
-            <a:spLocks noGrp="1"/>
-          </p:cNvSpPr>
-          <p:nvPr>
-            <p:ph type="body" idx="1"/>
-          </p:nvPr>
-        </p:nvSpPr>
-        <p:spPr/>
-        <p:txBody>
-          <a:bodyPr/>
-          <a:lstStyle/>
-          <a:p>
-            <a:r>
-              <a:rPr lang="en-US" dirty="0"/>
-              <a:t>proof (click 3 of 3)
-3:00–3:30
-"Across a thousand simulated outbreaks, Priora warns a median seven days earlier, and catches 87% within two weeks versus 39% today. On 110 cases written to trick it, it missed zero emergencies, and it triaged 30 out of 30 real Urdu and English voice clips correctly."
-Be honest if asked: the lead time is a simulation; it needs about 40% of patients passing a kiosk. Only the 75% report figure is sourced; the rest are stated assumptions you can change at /impact.
-If an AI expert asks: single reading 93.6% accuracy with 0.9% under-triage; two readings 0% under-triage for 1.8 points more over-triage; syndrome tagging 93% precision, 87% recall; our offline model 68% on the hard set, so it's the fallback, not the primary.</a:t>
-            </a:r>
-            <a:endParaRPr lang="en-US" dirty="0"/>
-          </a:p>
-        </p:txBody>
-      </p:sp>
-      <p:sp>
-        <p:nvSpPr>
-          <p:cNvPr id="4" name="Slide Number Placeholder 3"/>
-          <p:cNvSpPr>
-            <a:spLocks noGrp="1"/>
-          </p:cNvSpPr>
-          <p:nvPr>
-            <p:ph type="sldNum" sz="quarter" idx="10"/>
-          </p:nvPr>
-        </p:nvSpPr>
-        <p:spPr/>
-        <p:txBody>
-          <a:bodyPr/>
-          <a:lstStyle/>
-          <a:p>
-            <a:fld id="{F7021451-1387-4CA6-816F-3879F97B5CBC}" type="slidenum">
-              <a:rPr lang="en-US"/>
-              <a:t>26</a:t>
-            </a:fld>
-            <a:endParaRPr lang="en-US"/>
-          </a:p>
-        </p:txBody>
-      </p:sp>
-    </p:spTree>
-    <p:extLst>
-      <p:ext uri="{BB962C8B-B14F-4D97-AF65-F5344CB8AC3E}">
-        <p14:creationId xmlns:p14="http://schemas.microsoft.com/office/powerpoint/2010/main" val="1024086991"/>
-      </p:ext>
-    </p:extLst>
-  </p:cSld>
-  <p:clrMapOvr>
-    <a:masterClrMapping/>
-  </p:clrMapOvr>
-</p:notes>
-</file>
-
-<file path=ppt/notesSlides/notesSlide27.xml><?xml version="1.0" encoding="utf-8"?>
-<p:notes xmlns:a="http://schemas.openxmlformats.org/drawingml/2006/main" xmlns:r="http://schemas.openxmlformats.org/officeDocument/2006/relationships" xmlns:p="http://schemas.openxmlformats.org/presentationml/2006/main">
-  <p:cSld>
-    <p:spTree>
-      <p:nvGrpSpPr>
-        <p:cNvPr id="1" name=""/>
-        <p:cNvGrpSpPr/>
-        <p:nvPr/>
-      </p:nvGrpSpPr>
-      <p:grpSpPr>
-        <a:xfrm>
-          <a:off x="0" y="0"/>
-          <a:ext cx="0" cy="0"/>
-          <a:chOff x="0" y="0"/>
-          <a:chExt cx="0" cy="0"/>
-        </a:xfrm>
-      </p:grpSpPr>
-      <p:sp>
-        <p:nvSpPr>
-          <p:cNvPr id="2" name="Slide Image Placeholder 1"/>
-          <p:cNvSpPr>
-            <a:spLocks noGrp="1" noRot="1" noChangeAspect="1"/>
-          </p:cNvSpPr>
-          <p:nvPr>
-            <p:ph type="sldImg"/>
-          </p:nvPr>
-        </p:nvSpPr>
-        <p:spPr/>
-      </p:sp>
-      <p:sp>
-        <p:nvSpPr>
-          <p:cNvPr id="3" name="Notes Placeholder 2"/>
-          <p:cNvSpPr>
-            <a:spLocks noGrp="1"/>
-          </p:cNvSpPr>
-          <p:nvPr>
-            <p:ph type="body" idx="1"/>
-          </p:nvPr>
-        </p:nvSpPr>
-        <p:spPr/>
-        <p:txBody>
-          <a:bodyPr/>
-          <a:lstStyle/>
-          <a:p>
-            <a:r>
-              <a:rPr lang="en-US" dirty="0"/>
-              <a:t>questions
-3:30–3:50
-"It's live today. The next step is an eight-week pilot in the three biggest OPDs: PIMS, Holy Family and Benazir Bhutto. Three teams triage a patient. Priora triages a district. Thank you. Happy to take questions."</a:t>
-            </a:r>
-            <a:endParaRPr lang="en-US" dirty="0"/>
-          </a:p>
-        </p:txBody>
-      </p:sp>
-      <p:sp>
-        <p:nvSpPr>
-          <p:cNvPr id="4" name="Slide Number Placeholder 3"/>
-          <p:cNvSpPr>
-            <a:spLocks noGrp="1"/>
-          </p:cNvSpPr>
-          <p:nvPr>
-            <p:ph type="sldNum" sz="quarter" idx="10"/>
-          </p:nvPr>
-        </p:nvSpPr>
-        <p:spPr/>
-        <p:txBody>
-          <a:bodyPr/>
-          <a:lstStyle/>
-          <a:p>
-            <a:fld id="{F7021451-1387-4CA6-816F-3879F97B5CBC}" type="slidenum">
-              <a:rPr lang="en-US"/>
-              <a:t>27</a:t>
-            </a:fld>
-            <a:endParaRPr lang="en-US"/>
-          </a:p>
-        </p:txBody>
-      </p:sp>
-    </p:spTree>
-    <p:extLst>
-      <p:ext uri="{BB962C8B-B14F-4D97-AF65-F5344CB8AC3E}">
-        <p14:creationId xmlns:p14="http://schemas.microsoft.com/office/powerpoint/2010/main" val="1024086991"/>
-      </p:ext>
-    </p:extLst>
-  </p:cSld>
-  <p:clrMapOvr>
-    <a:masterClrMapping/>
-  </p:clrMapOvr>
-</p:notes>
-</file>
-
-<file path=ppt/notesSlides/notesSlide3.xml><?xml version="1.0" encoding="utf-8"?>
-<p:notes xmlns:a="http://schemas.openxmlformats.org/drawingml/2006/main" xmlns:r="http://schemas.openxmlformats.org/officeDocument/2006/relationships" xmlns:p="http://schemas.openxmlformats.org/presentationml/2006/main">
-  <p:cSld>
-    <p:spTree>
-      <p:nvGrpSpPr>
-        <p:cNvPr id="1" name=""/>
-        <p:cNvGrpSpPr/>
-        <p:nvPr/>
-      </p:nvGrpSpPr>
-      <p:grpSpPr>
-        <a:xfrm>
-          <a:off x="0" y="0"/>
-          <a:ext cx="0" cy="0"/>
-          <a:chOff x="0" y="0"/>
-          <a:chExt cx="0" cy="0"/>
-        </a:xfrm>
-      </p:grpSpPr>
-      <p:sp>
-        <p:nvSpPr>
-          <p:cNvPr id="2" name="Slide Image Placeholder 1"/>
-          <p:cNvSpPr>
-            <a:spLocks noGrp="1" noRot="1" noChangeAspect="1"/>
-          </p:cNvSpPr>
-          <p:nvPr>
-            <p:ph type="sldImg"/>
-          </p:nvPr>
-        </p:nvSpPr>
-        <p:spPr/>
-      </p:sp>
-      <p:sp>
-        <p:nvSpPr>
-          <p:cNvPr id="3" name="Notes Placeholder 2"/>
-          <p:cNvSpPr>
-            <a:spLocks noGrp="1"/>
-          </p:cNvSpPr>
-          <p:nvPr>
-            <p:ph type="body" idx="1"/>
-          </p:nvPr>
-        </p:nvSpPr>
-        <p:spPr/>
-        <p:txBody>
-          <a:bodyPr/>
-          <a:lstStyle/>
-          <a:p>
-            <a:r>
-              <a:rPr lang="en-US" dirty="0"/>
-              <a:t>problem (click 2 of 5)
-0:15–0:40 · five quick clicks
-1 "Day zero: the first patients with fever reach the OPDs."
-2 "Only about a third get a lab test, days later."
-3 "The week closes and the report is compiled about three days after that."
-4 "And only 75% of those weekly reports even arrive (NIH Pakistan, 2025)."
-5 "So the district notices around day 17 (median, in our simulation). In Sindh last year, 819 dengue cases were reported officially while hospitals and labs saw over 12,000 (Dawn)."
-If a doctor asks: you see the first fever patients on day zero; the system sees them weeks later.
-If a business judge asks: beds, kits and fogging are bought on the wrong number, too late.</a:t>
-            </a:r>
-            <a:endParaRPr lang="en-US" dirty="0"/>
-          </a:p>
-        </p:txBody>
-      </p:sp>
-      <p:sp>
-        <p:nvSpPr>
-          <p:cNvPr id="4" name="Slide Number Placeholder 3"/>
-          <p:cNvSpPr>
-            <a:spLocks noGrp="1"/>
-          </p:cNvSpPr>
-          <p:nvPr>
-            <p:ph type="sldNum" sz="quarter" idx="10"/>
-          </p:nvPr>
-        </p:nvSpPr>
-        <p:spPr/>
-        <p:txBody>
-          <a:bodyPr/>
-          <a:lstStyle/>
-          <a:p>
-            <a:fld id="{F7021451-1387-4CA6-816F-3879F97B5CBC}" type="slidenum">
-              <a:rPr lang="en-US"/>
-              <a:t>3</a:t>
-            </a:fld>
-            <a:endParaRPr lang="en-US"/>
-          </a:p>
-        </p:txBody>
-      </p:sp>
-    </p:spTree>
-    <p:extLst>
-      <p:ext uri="{BB962C8B-B14F-4D97-AF65-F5344CB8AC3E}">
-        <p14:creationId xmlns:p14="http://schemas.microsoft.com/office/powerpoint/2010/main" val="1024086991"/>
-      </p:ext>
-    </p:extLst>
-  </p:cSld>
-  <p:clrMapOvr>
-    <a:masterClrMapping/>
-  </p:clrMapOvr>
-</p:notes>
-</file>
-
-<file path=ppt/notesSlides/notesSlide4.xml><?xml version="1.0" encoding="utf-8"?>
-<p:notes xmlns:a="http://schemas.openxmlformats.org/drawingml/2006/main" xmlns:r="http://schemas.openxmlformats.org/officeDocument/2006/relationships" xmlns:p="http://schemas.openxmlformats.org/presentationml/2006/main">
-  <p:cSld>
-    <p:spTree>
-      <p:nvGrpSpPr>
-        <p:cNvPr id="1" name=""/>
-        <p:cNvGrpSpPr/>
-        <p:nvPr/>
-      </p:nvGrpSpPr>
-      <p:grpSpPr>
-        <a:xfrm>
-          <a:off x="0" y="0"/>
-          <a:ext cx="0" cy="0"/>
-          <a:chOff x="0" y="0"/>
-          <a:chExt cx="0" cy="0"/>
-        </a:xfrm>
-      </p:grpSpPr>
-      <p:sp>
-        <p:nvSpPr>
-          <p:cNvPr id="2" name="Slide Image Placeholder 1"/>
-          <p:cNvSpPr>
-            <a:spLocks noGrp="1" noRot="1" noChangeAspect="1"/>
-          </p:cNvSpPr>
-          <p:nvPr>
-            <p:ph type="sldImg"/>
-          </p:nvPr>
-        </p:nvSpPr>
-        <p:spPr/>
-      </p:sp>
-      <p:sp>
-        <p:nvSpPr>
-          <p:cNvPr id="3" name="Notes Placeholder 2"/>
-          <p:cNvSpPr>
-            <a:spLocks noGrp="1"/>
-          </p:cNvSpPr>
-          <p:nvPr>
-            <p:ph type="body" idx="1"/>
-          </p:nvPr>
-        </p:nvSpPr>
-        <p:spPr/>
-        <p:txBody>
-          <a:bodyPr/>
-          <a:lstStyle/>
-          <a:p>
-            <a:r>
-              <a:rPr lang="en-US" dirty="0"/>
-              <a:t>problem (click 3 of 5)
-0:15–0:40 · five quick clicks
-1 "Day zero: the first patients with fever reach the OPDs."
-2 "Only about a third get a lab test, days later."
-3 "The week closes and the report is compiled about three days after that."
-4 "And only 75% of those weekly reports even arrive (NIH Pakistan, 2025)."
-5 "So the district notices around day 17 (median, in our simulation). In Sindh last year, 819 dengue cases were reported officially while hospitals and labs saw over 12,000 (Dawn)."
-If a doctor asks: you see the first fever patients on day zero; the system sees them weeks later.
-If a business judge asks: beds, kits and fogging are bought on the wrong number, too late.</a:t>
-            </a:r>
-            <a:endParaRPr lang="en-US" dirty="0"/>
-          </a:p>
-        </p:txBody>
-      </p:sp>
-      <p:sp>
-        <p:nvSpPr>
-          <p:cNvPr id="4" name="Slide Number Placeholder 3"/>
-          <p:cNvSpPr>
-            <a:spLocks noGrp="1"/>
-          </p:cNvSpPr>
-          <p:nvPr>
-            <p:ph type="sldNum" sz="quarter" idx="10"/>
-          </p:nvPr>
-        </p:nvSpPr>
-        <p:spPr/>
-        <p:txBody>
-          <a:bodyPr/>
-          <a:lstStyle/>
-          <a:p>
-            <a:fld id="{F7021451-1387-4CA6-816F-3879F97B5CBC}" type="slidenum">
-              <a:rPr lang="en-US"/>
-              <a:t>4</a:t>
-            </a:fld>
-            <a:endParaRPr lang="en-US"/>
-          </a:p>
-        </p:txBody>
-      </p:sp>
-    </p:spTree>
-    <p:extLst>
-      <p:ext uri="{BB962C8B-B14F-4D97-AF65-F5344CB8AC3E}">
-        <p14:creationId xmlns:p14="http://schemas.microsoft.com/office/powerpoint/2010/main" val="1024086991"/>
-      </p:ext>
-    </p:extLst>
-  </p:cSld>
-  <p:clrMapOvr>
-    <a:masterClrMapping/>
-  </p:clrMapOvr>
-</p:notes>
-</file>
-
-<file path=ppt/notesSlides/notesSlide5.xml><?xml version="1.0" encoding="utf-8"?>
-<p:notes xmlns:a="http://schemas.openxmlformats.org/drawingml/2006/main" xmlns:r="http://schemas.openxmlformats.org/officeDocument/2006/relationships" xmlns:p="http://schemas.openxmlformats.org/presentationml/2006/main">
-  <p:cSld>
-    <p:spTree>
-      <p:nvGrpSpPr>
-        <p:cNvPr id="1" name=""/>
-        <p:cNvGrpSpPr/>
-        <p:nvPr/>
-      </p:nvGrpSpPr>
-      <p:grpSpPr>
-        <a:xfrm>
-          <a:off x="0" y="0"/>
-          <a:ext cx="0" cy="0"/>
-          <a:chOff x="0" y="0"/>
-          <a:chExt cx="0" cy="0"/>
-        </a:xfrm>
-      </p:grpSpPr>
-      <p:sp>
-        <p:nvSpPr>
-          <p:cNvPr id="2" name="Slide Image Placeholder 1"/>
-          <p:cNvSpPr>
-            <a:spLocks noGrp="1" noRot="1" noChangeAspect="1"/>
-          </p:cNvSpPr>
-          <p:nvPr>
-            <p:ph type="sldImg"/>
-          </p:nvPr>
-        </p:nvSpPr>
-        <p:spPr/>
-      </p:sp>
-      <p:sp>
-        <p:nvSpPr>
-          <p:cNvPr id="3" name="Notes Placeholder 2"/>
-          <p:cNvSpPr>
-            <a:spLocks noGrp="1"/>
-          </p:cNvSpPr>
-          <p:nvPr>
-            <p:ph type="body" idx="1"/>
-          </p:nvPr>
-        </p:nvSpPr>
-        <p:spPr/>
-        <p:txBody>
-          <a:bodyPr/>
-          <a:lstStyle/>
-          <a:p>
-            <a:r>
-              <a:rPr lang="en-US" dirty="0"/>
-              <a:t>problem (click 4 of 5)
-0:15–0:40 · five quick clicks
-1 "Day zero: the first patients with fever reach the OPDs."
-2 "Only about a third get a lab test, days later."
-3 "The week closes and the report is compiled about three days after that."
-4 "And only 75% of those weekly reports even arrive (NIH Pakistan, 2025)."
-5 "So the district notices around day 17 (median, in our simulation). In Sindh last year, 819 dengue cases were reported officially while hospitals and labs saw over 12,000 (Dawn)."
-If a doctor asks: you see the first fever patients on day zero; the system sees them weeks later.
-If a business judge asks: beds, kits and fogging are bought on the wrong number, too late.</a:t>
-            </a:r>
-            <a:endParaRPr lang="en-US" dirty="0"/>
-          </a:p>
-        </p:txBody>
-      </p:sp>
-      <p:sp>
-        <p:nvSpPr>
-          <p:cNvPr id="4" name="Slide Number Placeholder 3"/>
-          <p:cNvSpPr>
-            <a:spLocks noGrp="1"/>
-          </p:cNvSpPr>
-          <p:nvPr>
-            <p:ph type="sldNum" sz="quarter" idx="10"/>
-          </p:nvPr>
-        </p:nvSpPr>
-        <p:spPr/>
-        <p:txBody>
-          <a:bodyPr/>
-          <a:lstStyle/>
-          <a:p>
-            <a:fld id="{F7021451-1387-4CA6-816F-3879F97B5CBC}" type="slidenum">
-              <a:rPr lang="en-US"/>
-              <a:t>5</a:t>
-            </a:fld>
-            <a:endParaRPr lang="en-US"/>
-          </a:p>
-        </p:txBody>
-      </p:sp>
-    </p:spTree>
-    <p:extLst>
-      <p:ext uri="{BB962C8B-B14F-4D97-AF65-F5344CB8AC3E}">
-        <p14:creationId xmlns:p14="http://schemas.microsoft.com/office/powerpoint/2010/main" val="1024086991"/>
-      </p:ext>
-    </p:extLst>
-  </p:cSld>
-  <p:clrMapOvr>
-    <a:masterClrMapping/>
-  </p:clrMapOvr>
-</p:notes>
-</file>
-
-<file path=ppt/notesSlides/notesSlide6.xml><?xml version="1.0" encoding="utf-8"?>
-<p:notes xmlns:a="http://schemas.openxmlformats.org/drawingml/2006/main" xmlns:r="http://schemas.openxmlformats.org/officeDocument/2006/relationships" xmlns:p="http://schemas.openxmlformats.org/presentationml/2006/main">
-  <p:cSld>
-    <p:spTree>
-      <p:nvGrpSpPr>
-        <p:cNvPr id="1" name=""/>
-        <p:cNvGrpSpPr/>
-        <p:nvPr/>
-      </p:nvGrpSpPr>
-      <p:grpSpPr>
-        <a:xfrm>
-          <a:off x="0" y="0"/>
-          <a:ext cx="0" cy="0"/>
-          <a:chOff x="0" y="0"/>
-          <a:chExt cx="0" cy="0"/>
-        </a:xfrm>
-      </p:grpSpPr>
-      <p:sp>
-        <p:nvSpPr>
-          <p:cNvPr id="2" name="Slide Image Placeholder 1"/>
-          <p:cNvSpPr>
-            <a:spLocks noGrp="1" noRot="1" noChangeAspect="1"/>
-          </p:cNvSpPr>
-          <p:nvPr>
-            <p:ph type="sldImg"/>
-          </p:nvPr>
-        </p:nvSpPr>
-        <p:spPr/>
-      </p:sp>
-      <p:sp>
-        <p:nvSpPr>
-          <p:cNvPr id="3" name="Notes Placeholder 2"/>
-          <p:cNvSpPr>
-            <a:spLocks noGrp="1"/>
-          </p:cNvSpPr>
-          <p:nvPr>
-            <p:ph type="body" idx="1"/>
-          </p:nvPr>
-        </p:nvSpPr>
-        <p:spPr/>
-        <p:txBody>
-          <a:bodyPr/>
-          <a:lstStyle/>
-          <a:p>
-            <a:r>
-              <a:rPr lang="en-US" dirty="0"/>
-              <a:t>problem (click 5 of 5)
-0:15–0:40 · five quick clicks
-1 "Day zero: the first patients with fever reach the OPDs."
-2 "Only about a third get a lab test, days later."
-3 "The week closes and the report is compiled about three days after that."
-4 "And only 75% of those weekly reports even arrive (NIH Pakistan, 2025)."
-5 "So the district notices around day 17 (median, in our simulation). In Sindh last year, 819 dengue cases were reported officially while hospitals and labs saw over 12,000 (Dawn)."
-If a doctor asks: you see the first fever patients on day zero; the system sees them weeks later.
-If a business judge asks: beds, kits and fogging are bought on the wrong number, too late.</a:t>
-            </a:r>
-            <a:endParaRPr lang="en-US" dirty="0"/>
-          </a:p>
-        </p:txBody>
-      </p:sp>
-      <p:sp>
-        <p:nvSpPr>
-          <p:cNvPr id="4" name="Slide Number Placeholder 3"/>
-          <p:cNvSpPr>
-            <a:spLocks noGrp="1"/>
-          </p:cNvSpPr>
-          <p:nvPr>
-            <p:ph type="sldNum" sz="quarter" idx="10"/>
-          </p:nvPr>
-        </p:nvSpPr>
-        <p:spPr/>
-        <p:txBody>
-          <a:bodyPr/>
-          <a:lstStyle/>
-          <a:p>
-            <a:fld id="{F7021451-1387-4CA6-816F-3879F97B5CBC}" type="slidenum">
-              <a:rPr lang="en-US"/>
-              <a:t>6</a:t>
-            </a:fld>
-            <a:endParaRPr lang="en-US"/>
-          </a:p>
-        </p:txBody>
-      </p:sp>
-    </p:spTree>
-    <p:extLst>
-      <p:ext uri="{BB962C8B-B14F-4D97-AF65-F5344CB8AC3E}">
-        <p14:creationId xmlns:p14="http://schemas.microsoft.com/office/powerpoint/2010/main" val="1024086991"/>
-      </p:ext>
-    </p:extLst>
-  </p:cSld>
-  <p:clrMapOvr>
-    <a:masterClrMapping/>
-  </p:clrMapOvr>
-</p:notes>
-</file>
-
-<file path=ppt/notesSlides/notesSlide7.xml><?xml version="1.0" encoding="utf-8"?>
-<p:notes xmlns:a="http://schemas.openxmlformats.org/drawingml/2006/main" xmlns:r="http://schemas.openxmlformats.org/officeDocument/2006/relationships" xmlns:p="http://schemas.openxmlformats.org/presentationml/2006/main">
-  <p:cSld>
-    <p:spTree>
-      <p:nvGrpSpPr>
-        <p:cNvPr id="1" name=""/>
-        <p:cNvGrpSpPr/>
-        <p:nvPr/>
-      </p:nvGrpSpPr>
-      <p:grpSpPr>
-        <a:xfrm>
-          <a:off x="0" y="0"/>
-          <a:ext cx="0" cy="0"/>
-          <a:chOff x="0" y="0"/>
-          <a:chExt cx="0" cy="0"/>
-        </a:xfrm>
-      </p:grpSpPr>
-      <p:sp>
-        <p:nvSpPr>
-          <p:cNvPr id="2" name="Slide Image Placeholder 1"/>
-          <p:cNvSpPr>
-            <a:spLocks noGrp="1" noRot="1" noChangeAspect="1"/>
-          </p:cNvSpPr>
-          <p:nvPr>
-            <p:ph type="sldImg"/>
-          </p:nvPr>
-        </p:nvSpPr>
-        <p:spPr/>
-      </p:sp>
-      <p:sp>
-        <p:nvSpPr>
-          <p:cNvPr id="3" name="Notes Placeholder 2"/>
-          <p:cNvSpPr>
-            <a:spLocks noGrp="1"/>
-          </p:cNvSpPr>
-          <p:nvPr>
-            <p:ph type="body" idx="1"/>
-          </p:nvPr>
-        </p:nvSpPr>
-        <p:spPr/>
-        <p:txBody>
-          <a:bodyPr/>
-          <a:lstStyle/>
-          <a:p>
-            <a:r>
-              <a:rPr lang="en-US" dirty="0"/>
-              <a:t>insight (click 1 of 2)
-0:40–0:55
-"But the first signal is spoken on day one, at the front desk. PIMS sees over 8,000 patients a day, consultations last under two minutes, and it's all on paper. Priora captures what patients already say."</a:t>
-            </a:r>
-            <a:endParaRPr lang="en-US" dirty="0"/>
-          </a:p>
-        </p:txBody>
-      </p:sp>
-      <p:sp>
-        <p:nvSpPr>
-          <p:cNvPr id="4" name="Slide Number Placeholder 3"/>
-          <p:cNvSpPr>
-            <a:spLocks noGrp="1"/>
-          </p:cNvSpPr>
-          <p:nvPr>
-            <p:ph type="sldNum" sz="quarter" idx="10"/>
-          </p:nvPr>
-        </p:nvSpPr>
-        <p:spPr/>
-        <p:txBody>
-          <a:bodyPr/>
-          <a:lstStyle/>
-          <a:p>
-            <a:fld id="{F7021451-1387-4CA6-816F-3879F97B5CBC}" type="slidenum">
-              <a:rPr lang="en-US"/>
-              <a:t>7</a:t>
-            </a:fld>
-            <a:endParaRPr lang="en-US"/>
-          </a:p>
-        </p:txBody>
-      </p:sp>
-    </p:spTree>
-    <p:extLst>
-      <p:ext uri="{BB962C8B-B14F-4D97-AF65-F5344CB8AC3E}">
-        <p14:creationId xmlns:p14="http://schemas.microsoft.com/office/powerpoint/2010/main" val="1024086991"/>
-      </p:ext>
-    </p:extLst>
-  </p:cSld>
-  <p:clrMapOvr>
-    <a:masterClrMapping/>
-  </p:clrMapOvr>
-</p:notes>
-</file>
-
-<file path=ppt/notesSlides/notesSlide8.xml><?xml version="1.0" encoding="utf-8"?>
-<p:notes xmlns:a="http://schemas.openxmlformats.org/drawingml/2006/main" xmlns:r="http://schemas.openxmlformats.org/officeDocument/2006/relationships" xmlns:p="http://schemas.openxmlformats.org/presentationml/2006/main">
-  <p:cSld>
-    <p:spTree>
-      <p:nvGrpSpPr>
-        <p:cNvPr id="1" name=""/>
-        <p:cNvGrpSpPr/>
-        <p:nvPr/>
-      </p:nvGrpSpPr>
-      <p:grpSpPr>
-        <a:xfrm>
-          <a:off x="0" y="0"/>
-          <a:ext cx="0" cy="0"/>
-          <a:chOff x="0" y="0"/>
-          <a:chExt cx="0" cy="0"/>
-        </a:xfrm>
-      </p:grpSpPr>
-      <p:sp>
-        <p:nvSpPr>
-          <p:cNvPr id="2" name="Slide Image Placeholder 1"/>
-          <p:cNvSpPr>
-            <a:spLocks noGrp="1" noRot="1" noChangeAspect="1"/>
-          </p:cNvSpPr>
-          <p:nvPr>
-            <p:ph type="sldImg"/>
-          </p:nvPr>
-        </p:nvSpPr>
-        <p:spPr/>
-      </p:sp>
-      <p:sp>
-        <p:nvSpPr>
-          <p:cNvPr id="3" name="Notes Placeholder 2"/>
-          <p:cNvSpPr>
-            <a:spLocks noGrp="1"/>
-          </p:cNvSpPr>
-          <p:nvPr>
-            <p:ph type="body" idx="1"/>
-          </p:nvPr>
-        </p:nvSpPr>
-        <p:spPr/>
-        <p:txBody>
-          <a:bodyPr/>
-          <a:lstStyle/>
-          <a:p>
-            <a:r>
-              <a:rPr lang="en-US" dirty="0"/>
-              <a:t>insight (click 2 of 2)
-0:40–0:55
-"But the first signal is spoken on day one, at the front desk. PIMS sees over 8,000 patients a day, consultations last under two minutes, and it's all on paper. Priora captures what patients already say."</a:t>
-            </a:r>
-            <a:endParaRPr lang="en-US" dirty="0"/>
-          </a:p>
-        </p:txBody>
-      </p:sp>
-      <p:sp>
-        <p:nvSpPr>
-          <p:cNvPr id="4" name="Slide Number Placeholder 3"/>
-          <p:cNvSpPr>
-            <a:spLocks noGrp="1"/>
-          </p:cNvSpPr>
-          <p:nvPr>
-            <p:ph type="sldNum" sz="quarter" idx="10"/>
-          </p:nvPr>
-        </p:nvSpPr>
-        <p:spPr/>
-        <p:txBody>
-          <a:bodyPr/>
-          <a:lstStyle/>
-          <a:p>
-            <a:fld id="{F7021451-1387-4CA6-816F-3879F97B5CBC}" type="slidenum">
-              <a:rPr lang="en-US"/>
-              <a:t>8</a:t>
-            </a:fld>
-            <a:endParaRPr lang="en-US"/>
-          </a:p>
-        </p:txBody>
-      </p:sp>
-    </p:spTree>
-    <p:extLst>
-      <p:ext uri="{BB962C8B-B14F-4D97-AF65-F5344CB8AC3E}">
-        <p14:creationId xmlns:p14="http://schemas.microsoft.com/office/powerpoint/2010/main" val="1024086991"/>
-      </p:ext>
-    </p:extLst>
-  </p:cSld>
-  <p:clrMapOvr>
-    <a:masterClrMapping/>
-  </p:clrMapOvr>
-</p:notes>
-</file>
-
-<file path=ppt/notesSlides/notesSlide9.xml><?xml version="1.0" encoding="utf-8"?>
-<p:notes xmlns:a="http://schemas.openxmlformats.org/drawingml/2006/main" xmlns:r="http://schemas.openxmlformats.org/officeDocument/2006/relationships" xmlns:p="http://schemas.openxmlformats.org/presentationml/2006/main">
-  <p:cSld>
-    <p:spTree>
-      <p:nvGrpSpPr>
-        <p:cNvPr id="1" name=""/>
-        <p:cNvGrpSpPr/>
-        <p:nvPr/>
-      </p:nvGrpSpPr>
-      <p:grpSpPr>
-        <a:xfrm>
-          <a:off x="0" y="0"/>
-          <a:ext cx="0" cy="0"/>
-          <a:chOff x="0" y="0"/>
-          <a:chExt cx="0" cy="0"/>
-        </a:xfrm>
-      </p:grpSpPr>
-      <p:sp>
-        <p:nvSpPr>
-          <p:cNvPr id="2" name="Slide Image Placeholder 1"/>
-          <p:cNvSpPr>
-            <a:spLocks noGrp="1" noRot="1" noChangeAspect="1"/>
-          </p:cNvSpPr>
-          <p:nvPr>
-            <p:ph type="sldImg"/>
-          </p:nvPr>
-        </p:nvSpPr>
-        <p:spPr/>
-      </p:sp>
-      <p:sp>
-        <p:nvSpPr>
-          <p:cNvPr id="3" name="Notes Placeholder 2"/>
-          <p:cNvSpPr>
-            <a:spLocks noGrp="1"/>
-          </p:cNvSpPr>
-          <p:nvPr>
-            <p:ph type="body" idx="1"/>
-          </p:nvPr>
-        </p:nvSpPr>
-        <p:spPr/>
-        <p:txBody>
-          <a:bodyPr/>
-          <a:lstStyle/>
-          <a:p>
-            <a:r>
-              <a:rPr lang="en-US" dirty="0"/>
-              <a:t>pipeline (click 1 of 14)
-0:55–1:40 · one click per step, keep moving
+              <a:t>pipeline (click 14 of 14)
+one click per step, keep moving
 Speak: "The patient speaks in Urdu at the kiosk."
 Understand: "Gemini understands, reading twice for safety."
 Ask: "It asks one follow-up question, aloud."
@@ -3121,6 +2653,2539 @@
 If a doctor asks: severity is always SATS; the nurse records her own colour blind first; only an anonymous syndrome tag and area leave the hospital.
 If an AI expert asks: Gemini 2.5 Flash and Flash-Lite on Vertex; schema-validated structured output; two readings at different temperatures; brief lines without a real citation are dropped; our own offline model (n-gram classifier, 8 ms) when the internet drops; outbreak detection is CDC EARS C2, deterministic.
 If a business judge asks: one install, two products. Hospitals adopt it for safer queues; districts pay for the early warning. Each new hospital makes every alert faster.</a:t>
+            </a:r>
+            <a:endParaRPr lang="en-US" dirty="0"/>
+          </a:p>
+        </p:txBody>
+      </p:sp>
+      <p:sp>
+        <p:nvSpPr>
+          <p:cNvPr id="4" name="Slide Number Placeholder 3"/>
+          <p:cNvSpPr>
+            <a:spLocks noGrp="1"/>
+          </p:cNvSpPr>
+          <p:nvPr>
+            <p:ph type="sldNum" sz="quarter" idx="10"/>
+          </p:nvPr>
+        </p:nvSpPr>
+        <p:spPr/>
+        <p:txBody>
+          <a:bodyPr/>
+          <a:lstStyle/>
+          <a:p>
+            <a:fld id="{F7021451-1387-4CA6-816F-3879F97B5CBC}" type="slidenum">
+              <a:rPr lang="en-US"/>
+              <a:t>29</a:t>
+            </a:fld>
+            <a:endParaRPr lang="en-US"/>
+          </a:p>
+        </p:txBody>
+      </p:sp>
+    </p:spTree>
+    <p:extLst>
+      <p:ext uri="{BB962C8B-B14F-4D97-AF65-F5344CB8AC3E}">
+        <p14:creationId xmlns:p14="http://schemas.microsoft.com/office/powerpoint/2010/main" val="1024086991"/>
+      </p:ext>
+    </p:extLst>
+  </p:cSld>
+  <p:clrMapOvr>
+    <a:masterClrMapping/>
+  </p:clrMapOvr>
+</p:notes>
+</file>
+
+<file path=ppt/notesSlides/notesSlide3.xml><?xml version="1.0" encoding="utf-8"?>
+<p:notes xmlns:a="http://schemas.openxmlformats.org/drawingml/2006/main" xmlns:r="http://schemas.openxmlformats.org/officeDocument/2006/relationships" xmlns:p="http://schemas.openxmlformats.org/presentationml/2006/main">
+  <p:cSld>
+    <p:spTree>
+      <p:nvGrpSpPr>
+        <p:cNvPr id="1" name=""/>
+        <p:cNvGrpSpPr/>
+        <p:nvPr/>
+      </p:nvGrpSpPr>
+      <p:grpSpPr>
+        <a:xfrm>
+          <a:off x="0" y="0"/>
+          <a:ext cx="0" cy="0"/>
+          <a:chOff x="0" y="0"/>
+          <a:chExt cx="0" cy="0"/>
+        </a:xfrm>
+      </p:grpSpPr>
+      <p:sp>
+        <p:nvSpPr>
+          <p:cNvPr id="2" name="Slide Image Placeholder 1"/>
+          <p:cNvSpPr>
+            <a:spLocks noGrp="1" noRot="1" noChangeAspect="1"/>
+          </p:cNvSpPr>
+          <p:nvPr>
+            <p:ph type="sldImg"/>
+          </p:nvPr>
+        </p:nvSpPr>
+        <p:spPr/>
+      </p:sp>
+      <p:sp>
+        <p:nvSpPr>
+          <p:cNvPr id="3" name="Notes Placeholder 2"/>
+          <p:cNvSpPr>
+            <a:spLocks noGrp="1"/>
+          </p:cNvSpPr>
+          <p:nvPr>
+            <p:ph type="body" idx="1"/>
+          </p:nvPr>
+        </p:nvSpPr>
+        <p:spPr/>
+        <p:txBody>
+          <a:bodyPr/>
+          <a:lstStyle/>
+          <a:p>
+            <a:r>
+              <a:rPr lang="en-US" dirty="0"/>
+              <a:t>problem-statement (click 2 of 3)
+~20s · three clicks
+"Here's the problem we chose. Pakistan finds outbreaks weeks late, because the very first signal, what patients say at the hospital front desk, is never captured and never shared between hospitals. In Sindh last year, 819 dengue cases were reported officially while hospitals saw over twelve thousand. Rawalpindi and Islamabad hospitals have no information systems at any level, and PIMS alone sees eight thousand patients a day on paper. So this isn't a queue problem or a records problem. It's a blind spot for the whole district."
+Why this matters vs other teams: triage and hospital-management systems optimise one hospital. Nobody is solving the district's view across hospitals.</a:t>
+            </a:r>
+            <a:endParaRPr lang="en-US" dirty="0"/>
+          </a:p>
+        </p:txBody>
+      </p:sp>
+      <p:sp>
+        <p:nvSpPr>
+          <p:cNvPr id="4" name="Slide Number Placeholder 3"/>
+          <p:cNvSpPr>
+            <a:spLocks noGrp="1"/>
+          </p:cNvSpPr>
+          <p:nvPr>
+            <p:ph type="sldNum" sz="quarter" idx="10"/>
+          </p:nvPr>
+        </p:nvSpPr>
+        <p:spPr/>
+        <p:txBody>
+          <a:bodyPr/>
+          <a:lstStyle/>
+          <a:p>
+            <a:fld id="{F7021451-1387-4CA6-816F-3879F97B5CBC}" type="slidenum">
+              <a:rPr lang="en-US"/>
+              <a:t>3</a:t>
+            </a:fld>
+            <a:endParaRPr lang="en-US"/>
+          </a:p>
+        </p:txBody>
+      </p:sp>
+    </p:spTree>
+    <p:extLst>
+      <p:ext uri="{BB962C8B-B14F-4D97-AF65-F5344CB8AC3E}">
+        <p14:creationId xmlns:p14="http://schemas.microsoft.com/office/powerpoint/2010/main" val="1024086991"/>
+      </p:ext>
+    </p:extLst>
+  </p:cSld>
+  <p:clrMapOvr>
+    <a:masterClrMapping/>
+  </p:clrMapOvr>
+</p:notes>
+</file>
+
+<file path=ppt/notesSlides/notesSlide30.xml><?xml version="1.0" encoding="utf-8"?>
+<p:notes xmlns:a="http://schemas.openxmlformats.org/drawingml/2006/main" xmlns:r="http://schemas.openxmlformats.org/officeDocument/2006/relationships" xmlns:p="http://schemas.openxmlformats.org/presentationml/2006/main">
+  <p:cSld>
+    <p:spTree>
+      <p:nvGrpSpPr>
+        <p:cNvPr id="1" name=""/>
+        <p:cNvGrpSpPr/>
+        <p:nvPr/>
+      </p:nvGrpSpPr>
+      <p:grpSpPr>
+        <a:xfrm>
+          <a:off x="0" y="0"/>
+          <a:ext cx="0" cy="0"/>
+          <a:chOff x="0" y="0"/>
+          <a:chExt cx="0" cy="0"/>
+        </a:xfrm>
+      </p:grpSpPr>
+      <p:sp>
+        <p:nvSpPr>
+          <p:cNvPr id="2" name="Slide Image Placeholder 1"/>
+          <p:cNvSpPr>
+            <a:spLocks noGrp="1" noRot="1" noChangeAspect="1"/>
+          </p:cNvSpPr>
+          <p:nvPr>
+            <p:ph type="sldImg"/>
+          </p:nvPr>
+        </p:nvSpPr>
+        <p:spPr/>
+      </p:sp>
+      <p:sp>
+        <p:nvSpPr>
+          <p:cNvPr id="3" name="Notes Placeholder 2"/>
+          <p:cNvSpPr>
+            <a:spLocks noGrp="1"/>
+          </p:cNvSpPr>
+          <p:nvPr>
+            <p:ph type="body" idx="1"/>
+          </p:nvPr>
+        </p:nvSpPr>
+        <p:spPr/>
+        <p:txBody>
+          <a:bodyPr/>
+          <a:lstStyle/>
+          <a:p>
+            <a:r>
+              <a:rPr lang="en-US" dirty="0"/>
+              <a:t>architecture (click 1 of 4)
+~20s · four clicks
+1 "Three audiences, three front doors: the patient at the kiosk, hospital staff on the hospital portal, the district health officer on the district portal."
+2 "Behind them, one app. The decisions are deterministic: SATS rules for severity, the CDC EARS check for outbreaks."
+3 "AI runs here: Gemini Flash for speech, symptoms, documents, briefs and alerts; Flash-Lite for routing and the follow-up question; and our own model, Priora Lite, offline in the browser."
+4 "Data stays in Postgres and private storage. Only anonymous syndrome tags flow to the district."</a:t>
+            </a:r>
+            <a:endParaRPr lang="en-US" dirty="0"/>
+          </a:p>
+        </p:txBody>
+      </p:sp>
+      <p:sp>
+        <p:nvSpPr>
+          <p:cNvPr id="4" name="Slide Number Placeholder 3"/>
+          <p:cNvSpPr>
+            <a:spLocks noGrp="1"/>
+          </p:cNvSpPr>
+          <p:nvPr>
+            <p:ph type="sldNum" sz="quarter" idx="10"/>
+          </p:nvPr>
+        </p:nvSpPr>
+        <p:spPr/>
+        <p:txBody>
+          <a:bodyPr/>
+          <a:lstStyle/>
+          <a:p>
+            <a:fld id="{F7021451-1387-4CA6-816F-3879F97B5CBC}" type="slidenum">
+              <a:rPr lang="en-US"/>
+              <a:t>30</a:t>
+            </a:fld>
+            <a:endParaRPr lang="en-US"/>
+          </a:p>
+        </p:txBody>
+      </p:sp>
+    </p:spTree>
+    <p:extLst>
+      <p:ext uri="{BB962C8B-B14F-4D97-AF65-F5344CB8AC3E}">
+        <p14:creationId xmlns:p14="http://schemas.microsoft.com/office/powerpoint/2010/main" val="1024086991"/>
+      </p:ext>
+    </p:extLst>
+  </p:cSld>
+  <p:clrMapOvr>
+    <a:masterClrMapping/>
+  </p:clrMapOvr>
+</p:notes>
+</file>
+
+<file path=ppt/notesSlides/notesSlide31.xml><?xml version="1.0" encoding="utf-8"?>
+<p:notes xmlns:a="http://schemas.openxmlformats.org/drawingml/2006/main" xmlns:r="http://schemas.openxmlformats.org/officeDocument/2006/relationships" xmlns:p="http://schemas.openxmlformats.org/presentationml/2006/main">
+  <p:cSld>
+    <p:spTree>
+      <p:nvGrpSpPr>
+        <p:cNvPr id="1" name=""/>
+        <p:cNvGrpSpPr/>
+        <p:nvPr/>
+      </p:nvGrpSpPr>
+      <p:grpSpPr>
+        <a:xfrm>
+          <a:off x="0" y="0"/>
+          <a:ext cx="0" cy="0"/>
+          <a:chOff x="0" y="0"/>
+          <a:chExt cx="0" cy="0"/>
+        </a:xfrm>
+      </p:grpSpPr>
+      <p:sp>
+        <p:nvSpPr>
+          <p:cNvPr id="2" name="Slide Image Placeholder 1"/>
+          <p:cNvSpPr>
+            <a:spLocks noGrp="1" noRot="1" noChangeAspect="1"/>
+          </p:cNvSpPr>
+          <p:nvPr>
+            <p:ph type="sldImg"/>
+          </p:nvPr>
+        </p:nvSpPr>
+        <p:spPr/>
+      </p:sp>
+      <p:sp>
+        <p:nvSpPr>
+          <p:cNvPr id="3" name="Notes Placeholder 2"/>
+          <p:cNvSpPr>
+            <a:spLocks noGrp="1"/>
+          </p:cNvSpPr>
+          <p:nvPr>
+            <p:ph type="body" idx="1"/>
+          </p:nvPr>
+        </p:nvSpPr>
+        <p:spPr/>
+        <p:txBody>
+          <a:bodyPr/>
+          <a:lstStyle/>
+          <a:p>
+            <a:r>
+              <a:rPr lang="en-US" dirty="0"/>
+              <a:t>architecture (click 2 of 4)
+~20s · four clicks
+1 "Three audiences, three front doors: the patient at the kiosk, hospital staff on the hospital portal, the district health officer on the district portal."
+2 "Behind them, one app. The decisions are deterministic: SATS rules for severity, the CDC EARS check for outbreaks."
+3 "AI runs here: Gemini Flash for speech, symptoms, documents, briefs and alerts; Flash-Lite for routing and the follow-up question; and our own model, Priora Lite, offline in the browser."
+4 "Data stays in Postgres and private storage. Only anonymous syndrome tags flow to the district."</a:t>
+            </a:r>
+            <a:endParaRPr lang="en-US" dirty="0"/>
+          </a:p>
+        </p:txBody>
+      </p:sp>
+      <p:sp>
+        <p:nvSpPr>
+          <p:cNvPr id="4" name="Slide Number Placeholder 3"/>
+          <p:cNvSpPr>
+            <a:spLocks noGrp="1"/>
+          </p:cNvSpPr>
+          <p:nvPr>
+            <p:ph type="sldNum" sz="quarter" idx="10"/>
+          </p:nvPr>
+        </p:nvSpPr>
+        <p:spPr/>
+        <p:txBody>
+          <a:bodyPr/>
+          <a:lstStyle/>
+          <a:p>
+            <a:fld id="{F7021451-1387-4CA6-816F-3879F97B5CBC}" type="slidenum">
+              <a:rPr lang="en-US"/>
+              <a:t>31</a:t>
+            </a:fld>
+            <a:endParaRPr lang="en-US"/>
+          </a:p>
+        </p:txBody>
+      </p:sp>
+    </p:spTree>
+    <p:extLst>
+      <p:ext uri="{BB962C8B-B14F-4D97-AF65-F5344CB8AC3E}">
+        <p14:creationId xmlns:p14="http://schemas.microsoft.com/office/powerpoint/2010/main" val="1024086991"/>
+      </p:ext>
+    </p:extLst>
+  </p:cSld>
+  <p:clrMapOvr>
+    <a:masterClrMapping/>
+  </p:clrMapOvr>
+</p:notes>
+</file>
+
+<file path=ppt/notesSlides/notesSlide32.xml><?xml version="1.0" encoding="utf-8"?>
+<p:notes xmlns:a="http://schemas.openxmlformats.org/drawingml/2006/main" xmlns:r="http://schemas.openxmlformats.org/officeDocument/2006/relationships" xmlns:p="http://schemas.openxmlformats.org/presentationml/2006/main">
+  <p:cSld>
+    <p:spTree>
+      <p:nvGrpSpPr>
+        <p:cNvPr id="1" name=""/>
+        <p:cNvGrpSpPr/>
+        <p:nvPr/>
+      </p:nvGrpSpPr>
+      <p:grpSpPr>
+        <a:xfrm>
+          <a:off x="0" y="0"/>
+          <a:ext cx="0" cy="0"/>
+          <a:chOff x="0" y="0"/>
+          <a:chExt cx="0" cy="0"/>
+        </a:xfrm>
+      </p:grpSpPr>
+      <p:sp>
+        <p:nvSpPr>
+          <p:cNvPr id="2" name="Slide Image Placeholder 1"/>
+          <p:cNvSpPr>
+            <a:spLocks noGrp="1" noRot="1" noChangeAspect="1"/>
+          </p:cNvSpPr>
+          <p:nvPr>
+            <p:ph type="sldImg"/>
+          </p:nvPr>
+        </p:nvSpPr>
+        <p:spPr/>
+      </p:sp>
+      <p:sp>
+        <p:nvSpPr>
+          <p:cNvPr id="3" name="Notes Placeholder 2"/>
+          <p:cNvSpPr>
+            <a:spLocks noGrp="1"/>
+          </p:cNvSpPr>
+          <p:nvPr>
+            <p:ph type="body" idx="1"/>
+          </p:nvPr>
+        </p:nvSpPr>
+        <p:spPr/>
+        <p:txBody>
+          <a:bodyPr/>
+          <a:lstStyle/>
+          <a:p>
+            <a:r>
+              <a:rPr lang="en-US" dirty="0"/>
+              <a:t>architecture (click 3 of 4)
+~20s · four clicks
+1 "Three audiences, three front doors: the patient at the kiosk, hospital staff on the hospital portal, the district health officer on the district portal."
+2 "Behind them, one app. The decisions are deterministic: SATS rules for severity, the CDC EARS check for outbreaks."
+3 "AI runs here: Gemini Flash for speech, symptoms, documents, briefs and alerts; Flash-Lite for routing and the follow-up question; and our own model, Priora Lite, offline in the browser."
+4 "Data stays in Postgres and private storage. Only anonymous syndrome tags flow to the district."</a:t>
+            </a:r>
+            <a:endParaRPr lang="en-US" dirty="0"/>
+          </a:p>
+        </p:txBody>
+      </p:sp>
+      <p:sp>
+        <p:nvSpPr>
+          <p:cNvPr id="4" name="Slide Number Placeholder 3"/>
+          <p:cNvSpPr>
+            <a:spLocks noGrp="1"/>
+          </p:cNvSpPr>
+          <p:nvPr>
+            <p:ph type="sldNum" sz="quarter" idx="10"/>
+          </p:nvPr>
+        </p:nvSpPr>
+        <p:spPr/>
+        <p:txBody>
+          <a:bodyPr/>
+          <a:lstStyle/>
+          <a:p>
+            <a:fld id="{F7021451-1387-4CA6-816F-3879F97B5CBC}" type="slidenum">
+              <a:rPr lang="en-US"/>
+              <a:t>32</a:t>
+            </a:fld>
+            <a:endParaRPr lang="en-US"/>
+          </a:p>
+        </p:txBody>
+      </p:sp>
+    </p:spTree>
+    <p:extLst>
+      <p:ext uri="{BB962C8B-B14F-4D97-AF65-F5344CB8AC3E}">
+        <p14:creationId xmlns:p14="http://schemas.microsoft.com/office/powerpoint/2010/main" val="1024086991"/>
+      </p:ext>
+    </p:extLst>
+  </p:cSld>
+  <p:clrMapOvr>
+    <a:masterClrMapping/>
+  </p:clrMapOvr>
+</p:notes>
+</file>
+
+<file path=ppt/notesSlides/notesSlide33.xml><?xml version="1.0" encoding="utf-8"?>
+<p:notes xmlns:a="http://schemas.openxmlformats.org/drawingml/2006/main" xmlns:r="http://schemas.openxmlformats.org/officeDocument/2006/relationships" xmlns:p="http://schemas.openxmlformats.org/presentationml/2006/main">
+  <p:cSld>
+    <p:spTree>
+      <p:nvGrpSpPr>
+        <p:cNvPr id="1" name=""/>
+        <p:cNvGrpSpPr/>
+        <p:nvPr/>
+      </p:nvGrpSpPr>
+      <p:grpSpPr>
+        <a:xfrm>
+          <a:off x="0" y="0"/>
+          <a:ext cx="0" cy="0"/>
+          <a:chOff x="0" y="0"/>
+          <a:chExt cx="0" cy="0"/>
+        </a:xfrm>
+      </p:grpSpPr>
+      <p:sp>
+        <p:nvSpPr>
+          <p:cNvPr id="2" name="Slide Image Placeholder 1"/>
+          <p:cNvSpPr>
+            <a:spLocks noGrp="1" noRot="1" noChangeAspect="1"/>
+          </p:cNvSpPr>
+          <p:nvPr>
+            <p:ph type="sldImg"/>
+          </p:nvPr>
+        </p:nvSpPr>
+        <p:spPr/>
+      </p:sp>
+      <p:sp>
+        <p:nvSpPr>
+          <p:cNvPr id="3" name="Notes Placeholder 2"/>
+          <p:cNvSpPr>
+            <a:spLocks noGrp="1"/>
+          </p:cNvSpPr>
+          <p:nvPr>
+            <p:ph type="body" idx="1"/>
+          </p:nvPr>
+        </p:nvSpPr>
+        <p:spPr/>
+        <p:txBody>
+          <a:bodyPr/>
+          <a:lstStyle/>
+          <a:p>
+            <a:r>
+              <a:rPr lang="en-US" dirty="0"/>
+              <a:t>architecture (click 4 of 4)
+~20s · four clicks
+1 "Three audiences, three front doors: the patient at the kiosk, hospital staff on the hospital portal, the district health officer on the district portal."
+2 "Behind them, one app. The decisions are deterministic: SATS rules for severity, the CDC EARS check for outbreaks."
+3 "AI runs here: Gemini Flash for speech, symptoms, documents, briefs and alerts; Flash-Lite for routing and the follow-up question; and our own model, Priora Lite, offline in the browser."
+4 "Data stays in Postgres and private storage. Only anonymous syndrome tags flow to the district."</a:t>
+            </a:r>
+            <a:endParaRPr lang="en-US" dirty="0"/>
+          </a:p>
+        </p:txBody>
+      </p:sp>
+      <p:sp>
+        <p:nvSpPr>
+          <p:cNvPr id="4" name="Slide Number Placeholder 3"/>
+          <p:cNvSpPr>
+            <a:spLocks noGrp="1"/>
+          </p:cNvSpPr>
+          <p:nvPr>
+            <p:ph type="sldNum" sz="quarter" idx="10"/>
+          </p:nvPr>
+        </p:nvSpPr>
+        <p:spPr/>
+        <p:txBody>
+          <a:bodyPr/>
+          <a:lstStyle/>
+          <a:p>
+            <a:fld id="{F7021451-1387-4CA6-816F-3879F97B5CBC}" type="slidenum">
+              <a:rPr lang="en-US"/>
+              <a:t>33</a:t>
+            </a:fld>
+            <a:endParaRPr lang="en-US"/>
+          </a:p>
+        </p:txBody>
+      </p:sp>
+    </p:spTree>
+    <p:extLst>
+      <p:ext uri="{BB962C8B-B14F-4D97-AF65-F5344CB8AC3E}">
+        <p14:creationId xmlns:p14="http://schemas.microsoft.com/office/powerpoint/2010/main" val="1024086991"/>
+      </p:ext>
+    </p:extLst>
+  </p:cSld>
+  <p:clrMapOvr>
+    <a:masterClrMapping/>
+  </p:clrMapOvr>
+</p:notes>
+</file>
+
+<file path=ppt/notesSlides/notesSlide34.xml><?xml version="1.0" encoding="utf-8"?>
+<p:notes xmlns:a="http://schemas.openxmlformats.org/drawingml/2006/main" xmlns:r="http://schemas.openxmlformats.org/officeDocument/2006/relationships" xmlns:p="http://schemas.openxmlformats.org/presentationml/2006/main">
+  <p:cSld>
+    <p:spTree>
+      <p:nvGrpSpPr>
+        <p:cNvPr id="1" name=""/>
+        <p:cNvGrpSpPr/>
+        <p:nvPr/>
+      </p:nvGrpSpPr>
+      <p:grpSpPr>
+        <a:xfrm>
+          <a:off x="0" y="0"/>
+          <a:ext cx="0" cy="0"/>
+          <a:chOff x="0" y="0"/>
+          <a:chExt cx="0" cy="0"/>
+        </a:xfrm>
+      </p:grpSpPr>
+      <p:sp>
+        <p:nvSpPr>
+          <p:cNvPr id="2" name="Slide Image Placeholder 1"/>
+          <p:cNvSpPr>
+            <a:spLocks noGrp="1" noRot="1" noChangeAspect="1"/>
+          </p:cNvSpPr>
+          <p:nvPr>
+            <p:ph type="sldImg"/>
+          </p:nvPr>
+        </p:nvSpPr>
+        <p:spPr/>
+      </p:sp>
+      <p:sp>
+        <p:nvSpPr>
+          <p:cNvPr id="3" name="Notes Placeholder 2"/>
+          <p:cNvSpPr>
+            <a:spLocks noGrp="1"/>
+          </p:cNvSpPr>
+          <p:nvPr>
+            <p:ph type="body" idx="1"/>
+          </p:nvPr>
+        </p:nvSpPr>
+        <p:spPr/>
+        <p:txBody>
+          <a:bodyPr/>
+          <a:lstStyle/>
+          <a:p>
+            <a:r>
+              <a:rPr lang="en-US" dirty="0"/>
+              <a:t>ai-depth (click 1 of 6)
+~30s · one row per click, from the patient to the district
+"Most projects put AI in one box. Ours runs at five levels, and every level has a check and a measured number.
+Listen: Gemini turns Urdu speech into symptoms and syndromes. It reads twice and keeps the more urgent reading: zero missed emergencies on 110 hard cases.
+Ask and route: it plans the one question that could change priority, from a fixed bank of 45 reviewed Urdu questions. 30 of 30 real voice clips triaged right.
+Read: it reads photographed old reports and writes the doctor's brief, and any line without a real source is dropped.
+Watch: it tags syndromes for the district and writes the officer's alert, but the outbreak call itself is CDC statistics and the actions come from a fixed checklist. 93% precision.
+Survive: when the internet drops, our own model, distilled from five thousand Gemini-labelled examples, triages in 8 milliseconds in the browser.
+Seven AI components, one model we trained ourselves, five checks, four evaluation sets."
+Rulebook mapping if asked: each row is Data → AI → Output (the small line under each level), and the whole stack ends in the impact numbers on the proof slide.
+If an AI expert asks: structured output from Zod schemas, validated and retried on a fallback model; self-consistency at two temperatures; Gemini 2.5 Flash + Flash-Lite on Vertex AI; Lite is char+word n-gram logistic regression re-implemented in TypeScript.</a:t>
+            </a:r>
+            <a:endParaRPr lang="en-US" dirty="0"/>
+          </a:p>
+        </p:txBody>
+      </p:sp>
+      <p:sp>
+        <p:nvSpPr>
+          <p:cNvPr id="4" name="Slide Number Placeholder 3"/>
+          <p:cNvSpPr>
+            <a:spLocks noGrp="1"/>
+          </p:cNvSpPr>
+          <p:nvPr>
+            <p:ph type="sldNum" sz="quarter" idx="10"/>
+          </p:nvPr>
+        </p:nvSpPr>
+        <p:spPr/>
+        <p:txBody>
+          <a:bodyPr/>
+          <a:lstStyle/>
+          <a:p>
+            <a:fld id="{F7021451-1387-4CA6-816F-3879F97B5CBC}" type="slidenum">
+              <a:rPr lang="en-US"/>
+              <a:t>34</a:t>
+            </a:fld>
+            <a:endParaRPr lang="en-US"/>
+          </a:p>
+        </p:txBody>
+      </p:sp>
+    </p:spTree>
+    <p:extLst>
+      <p:ext uri="{BB962C8B-B14F-4D97-AF65-F5344CB8AC3E}">
+        <p14:creationId xmlns:p14="http://schemas.microsoft.com/office/powerpoint/2010/main" val="1024086991"/>
+      </p:ext>
+    </p:extLst>
+  </p:cSld>
+  <p:clrMapOvr>
+    <a:masterClrMapping/>
+  </p:clrMapOvr>
+</p:notes>
+</file>
+
+<file path=ppt/notesSlides/notesSlide35.xml><?xml version="1.0" encoding="utf-8"?>
+<p:notes xmlns:a="http://schemas.openxmlformats.org/drawingml/2006/main" xmlns:r="http://schemas.openxmlformats.org/officeDocument/2006/relationships" xmlns:p="http://schemas.openxmlformats.org/presentationml/2006/main">
+  <p:cSld>
+    <p:spTree>
+      <p:nvGrpSpPr>
+        <p:cNvPr id="1" name=""/>
+        <p:cNvGrpSpPr/>
+        <p:nvPr/>
+      </p:nvGrpSpPr>
+      <p:grpSpPr>
+        <a:xfrm>
+          <a:off x="0" y="0"/>
+          <a:ext cx="0" cy="0"/>
+          <a:chOff x="0" y="0"/>
+          <a:chExt cx="0" cy="0"/>
+        </a:xfrm>
+      </p:grpSpPr>
+      <p:sp>
+        <p:nvSpPr>
+          <p:cNvPr id="2" name="Slide Image Placeholder 1"/>
+          <p:cNvSpPr>
+            <a:spLocks noGrp="1" noRot="1" noChangeAspect="1"/>
+          </p:cNvSpPr>
+          <p:nvPr>
+            <p:ph type="sldImg"/>
+          </p:nvPr>
+        </p:nvSpPr>
+        <p:spPr/>
+      </p:sp>
+      <p:sp>
+        <p:nvSpPr>
+          <p:cNvPr id="3" name="Notes Placeholder 2"/>
+          <p:cNvSpPr>
+            <a:spLocks noGrp="1"/>
+          </p:cNvSpPr>
+          <p:nvPr>
+            <p:ph type="body" idx="1"/>
+          </p:nvPr>
+        </p:nvSpPr>
+        <p:spPr/>
+        <p:txBody>
+          <a:bodyPr/>
+          <a:lstStyle/>
+          <a:p>
+            <a:r>
+              <a:rPr lang="en-US" dirty="0"/>
+              <a:t>ai-depth (click 2 of 6)
+~30s · one row per click, from the patient to the district
+"Most projects put AI in one box. Ours runs at five levels, and every level has a check and a measured number.
+Listen: Gemini turns Urdu speech into symptoms and syndromes. It reads twice and keeps the more urgent reading: zero missed emergencies on 110 hard cases.
+Ask and route: it plans the one question that could change priority, from a fixed bank of 45 reviewed Urdu questions. 30 of 30 real voice clips triaged right.
+Read: it reads photographed old reports and writes the doctor's brief, and any line without a real source is dropped.
+Watch: it tags syndromes for the district and writes the officer's alert, but the outbreak call itself is CDC statistics and the actions come from a fixed checklist. 93% precision.
+Survive: when the internet drops, our own model, distilled from five thousand Gemini-labelled examples, triages in 8 milliseconds in the browser.
+Seven AI components, one model we trained ourselves, five checks, four evaluation sets."
+Rulebook mapping if asked: each row is Data → AI → Output (the small line under each level), and the whole stack ends in the impact numbers on the proof slide.
+If an AI expert asks: structured output from Zod schemas, validated and retried on a fallback model; self-consistency at two temperatures; Gemini 2.5 Flash + Flash-Lite on Vertex AI; Lite is char+word n-gram logistic regression re-implemented in TypeScript.</a:t>
+            </a:r>
+            <a:endParaRPr lang="en-US" dirty="0"/>
+          </a:p>
+        </p:txBody>
+      </p:sp>
+      <p:sp>
+        <p:nvSpPr>
+          <p:cNvPr id="4" name="Slide Number Placeholder 3"/>
+          <p:cNvSpPr>
+            <a:spLocks noGrp="1"/>
+          </p:cNvSpPr>
+          <p:nvPr>
+            <p:ph type="sldNum" sz="quarter" idx="10"/>
+          </p:nvPr>
+        </p:nvSpPr>
+        <p:spPr/>
+        <p:txBody>
+          <a:bodyPr/>
+          <a:lstStyle/>
+          <a:p>
+            <a:fld id="{F7021451-1387-4CA6-816F-3879F97B5CBC}" type="slidenum">
+              <a:rPr lang="en-US"/>
+              <a:t>35</a:t>
+            </a:fld>
+            <a:endParaRPr lang="en-US"/>
+          </a:p>
+        </p:txBody>
+      </p:sp>
+    </p:spTree>
+    <p:extLst>
+      <p:ext uri="{BB962C8B-B14F-4D97-AF65-F5344CB8AC3E}">
+        <p14:creationId xmlns:p14="http://schemas.microsoft.com/office/powerpoint/2010/main" val="1024086991"/>
+      </p:ext>
+    </p:extLst>
+  </p:cSld>
+  <p:clrMapOvr>
+    <a:masterClrMapping/>
+  </p:clrMapOvr>
+</p:notes>
+</file>
+
+<file path=ppt/notesSlides/notesSlide36.xml><?xml version="1.0" encoding="utf-8"?>
+<p:notes xmlns:a="http://schemas.openxmlformats.org/drawingml/2006/main" xmlns:r="http://schemas.openxmlformats.org/officeDocument/2006/relationships" xmlns:p="http://schemas.openxmlformats.org/presentationml/2006/main">
+  <p:cSld>
+    <p:spTree>
+      <p:nvGrpSpPr>
+        <p:cNvPr id="1" name=""/>
+        <p:cNvGrpSpPr/>
+        <p:nvPr/>
+      </p:nvGrpSpPr>
+      <p:grpSpPr>
+        <a:xfrm>
+          <a:off x="0" y="0"/>
+          <a:ext cx="0" cy="0"/>
+          <a:chOff x="0" y="0"/>
+          <a:chExt cx="0" cy="0"/>
+        </a:xfrm>
+      </p:grpSpPr>
+      <p:sp>
+        <p:nvSpPr>
+          <p:cNvPr id="2" name="Slide Image Placeholder 1"/>
+          <p:cNvSpPr>
+            <a:spLocks noGrp="1" noRot="1" noChangeAspect="1"/>
+          </p:cNvSpPr>
+          <p:nvPr>
+            <p:ph type="sldImg"/>
+          </p:nvPr>
+        </p:nvSpPr>
+        <p:spPr/>
+      </p:sp>
+      <p:sp>
+        <p:nvSpPr>
+          <p:cNvPr id="3" name="Notes Placeholder 2"/>
+          <p:cNvSpPr>
+            <a:spLocks noGrp="1"/>
+          </p:cNvSpPr>
+          <p:nvPr>
+            <p:ph type="body" idx="1"/>
+          </p:nvPr>
+        </p:nvSpPr>
+        <p:spPr/>
+        <p:txBody>
+          <a:bodyPr/>
+          <a:lstStyle/>
+          <a:p>
+            <a:r>
+              <a:rPr lang="en-US" dirty="0"/>
+              <a:t>ai-depth (click 3 of 6)
+~30s · one row per click, from the patient to the district
+"Most projects put AI in one box. Ours runs at five levels, and every level has a check and a measured number.
+Listen: Gemini turns Urdu speech into symptoms and syndromes. It reads twice and keeps the more urgent reading: zero missed emergencies on 110 hard cases.
+Ask and route: it plans the one question that could change priority, from a fixed bank of 45 reviewed Urdu questions. 30 of 30 real voice clips triaged right.
+Read: it reads photographed old reports and writes the doctor's brief, and any line without a real source is dropped.
+Watch: it tags syndromes for the district and writes the officer's alert, but the outbreak call itself is CDC statistics and the actions come from a fixed checklist. 93% precision.
+Survive: when the internet drops, our own model, distilled from five thousand Gemini-labelled examples, triages in 8 milliseconds in the browser.
+Seven AI components, one model we trained ourselves, five checks, four evaluation sets."
+Rulebook mapping if asked: each row is Data → AI → Output (the small line under each level), and the whole stack ends in the impact numbers on the proof slide.
+If an AI expert asks: structured output from Zod schemas, validated and retried on a fallback model; self-consistency at two temperatures; Gemini 2.5 Flash + Flash-Lite on Vertex AI; Lite is char+word n-gram logistic regression re-implemented in TypeScript.</a:t>
+            </a:r>
+            <a:endParaRPr lang="en-US" dirty="0"/>
+          </a:p>
+        </p:txBody>
+      </p:sp>
+      <p:sp>
+        <p:nvSpPr>
+          <p:cNvPr id="4" name="Slide Number Placeholder 3"/>
+          <p:cNvSpPr>
+            <a:spLocks noGrp="1"/>
+          </p:cNvSpPr>
+          <p:nvPr>
+            <p:ph type="sldNum" sz="quarter" idx="10"/>
+          </p:nvPr>
+        </p:nvSpPr>
+        <p:spPr/>
+        <p:txBody>
+          <a:bodyPr/>
+          <a:lstStyle/>
+          <a:p>
+            <a:fld id="{F7021451-1387-4CA6-816F-3879F97B5CBC}" type="slidenum">
+              <a:rPr lang="en-US"/>
+              <a:t>36</a:t>
+            </a:fld>
+            <a:endParaRPr lang="en-US"/>
+          </a:p>
+        </p:txBody>
+      </p:sp>
+    </p:spTree>
+    <p:extLst>
+      <p:ext uri="{BB962C8B-B14F-4D97-AF65-F5344CB8AC3E}">
+        <p14:creationId xmlns:p14="http://schemas.microsoft.com/office/powerpoint/2010/main" val="1024086991"/>
+      </p:ext>
+    </p:extLst>
+  </p:cSld>
+  <p:clrMapOvr>
+    <a:masterClrMapping/>
+  </p:clrMapOvr>
+</p:notes>
+</file>
+
+<file path=ppt/notesSlides/notesSlide37.xml><?xml version="1.0" encoding="utf-8"?>
+<p:notes xmlns:a="http://schemas.openxmlformats.org/drawingml/2006/main" xmlns:r="http://schemas.openxmlformats.org/officeDocument/2006/relationships" xmlns:p="http://schemas.openxmlformats.org/presentationml/2006/main">
+  <p:cSld>
+    <p:spTree>
+      <p:nvGrpSpPr>
+        <p:cNvPr id="1" name=""/>
+        <p:cNvGrpSpPr/>
+        <p:nvPr/>
+      </p:nvGrpSpPr>
+      <p:grpSpPr>
+        <a:xfrm>
+          <a:off x="0" y="0"/>
+          <a:ext cx="0" cy="0"/>
+          <a:chOff x="0" y="0"/>
+          <a:chExt cx="0" cy="0"/>
+        </a:xfrm>
+      </p:grpSpPr>
+      <p:sp>
+        <p:nvSpPr>
+          <p:cNvPr id="2" name="Slide Image Placeholder 1"/>
+          <p:cNvSpPr>
+            <a:spLocks noGrp="1" noRot="1" noChangeAspect="1"/>
+          </p:cNvSpPr>
+          <p:nvPr>
+            <p:ph type="sldImg"/>
+          </p:nvPr>
+        </p:nvSpPr>
+        <p:spPr/>
+      </p:sp>
+      <p:sp>
+        <p:nvSpPr>
+          <p:cNvPr id="3" name="Notes Placeholder 2"/>
+          <p:cNvSpPr>
+            <a:spLocks noGrp="1"/>
+          </p:cNvSpPr>
+          <p:nvPr>
+            <p:ph type="body" idx="1"/>
+          </p:nvPr>
+        </p:nvSpPr>
+        <p:spPr/>
+        <p:txBody>
+          <a:bodyPr/>
+          <a:lstStyle/>
+          <a:p>
+            <a:r>
+              <a:rPr lang="en-US" dirty="0"/>
+              <a:t>ai-depth (click 4 of 6)
+~30s · one row per click, from the patient to the district
+"Most projects put AI in one box. Ours runs at five levels, and every level has a check and a measured number.
+Listen: Gemini turns Urdu speech into symptoms and syndromes. It reads twice and keeps the more urgent reading: zero missed emergencies on 110 hard cases.
+Ask and route: it plans the one question that could change priority, from a fixed bank of 45 reviewed Urdu questions. 30 of 30 real voice clips triaged right.
+Read: it reads photographed old reports and writes the doctor's brief, and any line without a real source is dropped.
+Watch: it tags syndromes for the district and writes the officer's alert, but the outbreak call itself is CDC statistics and the actions come from a fixed checklist. 93% precision.
+Survive: when the internet drops, our own model, distilled from five thousand Gemini-labelled examples, triages in 8 milliseconds in the browser.
+Seven AI components, one model we trained ourselves, five checks, four evaluation sets."
+Rulebook mapping if asked: each row is Data → AI → Output (the small line under each level), and the whole stack ends in the impact numbers on the proof slide.
+If an AI expert asks: structured output from Zod schemas, validated and retried on a fallback model; self-consistency at two temperatures; Gemini 2.5 Flash + Flash-Lite on Vertex AI; Lite is char+word n-gram logistic regression re-implemented in TypeScript.</a:t>
+            </a:r>
+            <a:endParaRPr lang="en-US" dirty="0"/>
+          </a:p>
+        </p:txBody>
+      </p:sp>
+      <p:sp>
+        <p:nvSpPr>
+          <p:cNvPr id="4" name="Slide Number Placeholder 3"/>
+          <p:cNvSpPr>
+            <a:spLocks noGrp="1"/>
+          </p:cNvSpPr>
+          <p:nvPr>
+            <p:ph type="sldNum" sz="quarter" idx="10"/>
+          </p:nvPr>
+        </p:nvSpPr>
+        <p:spPr/>
+        <p:txBody>
+          <a:bodyPr/>
+          <a:lstStyle/>
+          <a:p>
+            <a:fld id="{F7021451-1387-4CA6-816F-3879F97B5CBC}" type="slidenum">
+              <a:rPr lang="en-US"/>
+              <a:t>37</a:t>
+            </a:fld>
+            <a:endParaRPr lang="en-US"/>
+          </a:p>
+        </p:txBody>
+      </p:sp>
+    </p:spTree>
+    <p:extLst>
+      <p:ext uri="{BB962C8B-B14F-4D97-AF65-F5344CB8AC3E}">
+        <p14:creationId xmlns:p14="http://schemas.microsoft.com/office/powerpoint/2010/main" val="1024086991"/>
+      </p:ext>
+    </p:extLst>
+  </p:cSld>
+  <p:clrMapOvr>
+    <a:masterClrMapping/>
+  </p:clrMapOvr>
+</p:notes>
+</file>
+
+<file path=ppt/notesSlides/notesSlide38.xml><?xml version="1.0" encoding="utf-8"?>
+<p:notes xmlns:a="http://schemas.openxmlformats.org/drawingml/2006/main" xmlns:r="http://schemas.openxmlformats.org/officeDocument/2006/relationships" xmlns:p="http://schemas.openxmlformats.org/presentationml/2006/main">
+  <p:cSld>
+    <p:spTree>
+      <p:nvGrpSpPr>
+        <p:cNvPr id="1" name=""/>
+        <p:cNvGrpSpPr/>
+        <p:nvPr/>
+      </p:nvGrpSpPr>
+      <p:grpSpPr>
+        <a:xfrm>
+          <a:off x="0" y="0"/>
+          <a:ext cx="0" cy="0"/>
+          <a:chOff x="0" y="0"/>
+          <a:chExt cx="0" cy="0"/>
+        </a:xfrm>
+      </p:grpSpPr>
+      <p:sp>
+        <p:nvSpPr>
+          <p:cNvPr id="2" name="Slide Image Placeholder 1"/>
+          <p:cNvSpPr>
+            <a:spLocks noGrp="1" noRot="1" noChangeAspect="1"/>
+          </p:cNvSpPr>
+          <p:nvPr>
+            <p:ph type="sldImg"/>
+          </p:nvPr>
+        </p:nvSpPr>
+        <p:spPr/>
+      </p:sp>
+      <p:sp>
+        <p:nvSpPr>
+          <p:cNvPr id="3" name="Notes Placeholder 2"/>
+          <p:cNvSpPr>
+            <a:spLocks noGrp="1"/>
+          </p:cNvSpPr>
+          <p:nvPr>
+            <p:ph type="body" idx="1"/>
+          </p:nvPr>
+        </p:nvSpPr>
+        <p:spPr/>
+        <p:txBody>
+          <a:bodyPr/>
+          <a:lstStyle/>
+          <a:p>
+            <a:r>
+              <a:rPr lang="en-US" dirty="0"/>
+              <a:t>ai-depth (click 5 of 6)
+~30s · one row per click, from the patient to the district
+"Most projects put AI in one box. Ours runs at five levels, and every level has a check and a measured number.
+Listen: Gemini turns Urdu speech into symptoms and syndromes. It reads twice and keeps the more urgent reading: zero missed emergencies on 110 hard cases.
+Ask and route: it plans the one question that could change priority, from a fixed bank of 45 reviewed Urdu questions. 30 of 30 real voice clips triaged right.
+Read: it reads photographed old reports and writes the doctor's brief, and any line without a real source is dropped.
+Watch: it tags syndromes for the district and writes the officer's alert, but the outbreak call itself is CDC statistics and the actions come from a fixed checklist. 93% precision.
+Survive: when the internet drops, our own model, distilled from five thousand Gemini-labelled examples, triages in 8 milliseconds in the browser.
+Seven AI components, one model we trained ourselves, five checks, four evaluation sets."
+Rulebook mapping if asked: each row is Data → AI → Output (the small line under each level), and the whole stack ends in the impact numbers on the proof slide.
+If an AI expert asks: structured output from Zod schemas, validated and retried on a fallback model; self-consistency at two temperatures; Gemini 2.5 Flash + Flash-Lite on Vertex AI; Lite is char+word n-gram logistic regression re-implemented in TypeScript.</a:t>
+            </a:r>
+            <a:endParaRPr lang="en-US" dirty="0"/>
+          </a:p>
+        </p:txBody>
+      </p:sp>
+      <p:sp>
+        <p:nvSpPr>
+          <p:cNvPr id="4" name="Slide Number Placeholder 3"/>
+          <p:cNvSpPr>
+            <a:spLocks noGrp="1"/>
+          </p:cNvSpPr>
+          <p:nvPr>
+            <p:ph type="sldNum" sz="quarter" idx="10"/>
+          </p:nvPr>
+        </p:nvSpPr>
+        <p:spPr/>
+        <p:txBody>
+          <a:bodyPr/>
+          <a:lstStyle/>
+          <a:p>
+            <a:fld id="{F7021451-1387-4CA6-816F-3879F97B5CBC}" type="slidenum">
+              <a:rPr lang="en-US"/>
+              <a:t>38</a:t>
+            </a:fld>
+            <a:endParaRPr lang="en-US"/>
+          </a:p>
+        </p:txBody>
+      </p:sp>
+    </p:spTree>
+    <p:extLst>
+      <p:ext uri="{BB962C8B-B14F-4D97-AF65-F5344CB8AC3E}">
+        <p14:creationId xmlns:p14="http://schemas.microsoft.com/office/powerpoint/2010/main" val="1024086991"/>
+      </p:ext>
+    </p:extLst>
+  </p:cSld>
+  <p:clrMapOvr>
+    <a:masterClrMapping/>
+  </p:clrMapOvr>
+</p:notes>
+</file>
+
+<file path=ppt/notesSlides/notesSlide39.xml><?xml version="1.0" encoding="utf-8"?>
+<p:notes xmlns:a="http://schemas.openxmlformats.org/drawingml/2006/main" xmlns:r="http://schemas.openxmlformats.org/officeDocument/2006/relationships" xmlns:p="http://schemas.openxmlformats.org/presentationml/2006/main">
+  <p:cSld>
+    <p:spTree>
+      <p:nvGrpSpPr>
+        <p:cNvPr id="1" name=""/>
+        <p:cNvGrpSpPr/>
+        <p:nvPr/>
+      </p:nvGrpSpPr>
+      <p:grpSpPr>
+        <a:xfrm>
+          <a:off x="0" y="0"/>
+          <a:ext cx="0" cy="0"/>
+          <a:chOff x="0" y="0"/>
+          <a:chExt cx="0" cy="0"/>
+        </a:xfrm>
+      </p:grpSpPr>
+      <p:sp>
+        <p:nvSpPr>
+          <p:cNvPr id="2" name="Slide Image Placeholder 1"/>
+          <p:cNvSpPr>
+            <a:spLocks noGrp="1" noRot="1" noChangeAspect="1"/>
+          </p:cNvSpPr>
+          <p:nvPr>
+            <p:ph type="sldImg"/>
+          </p:nvPr>
+        </p:nvSpPr>
+        <p:spPr/>
+      </p:sp>
+      <p:sp>
+        <p:nvSpPr>
+          <p:cNvPr id="3" name="Notes Placeholder 2"/>
+          <p:cNvSpPr>
+            <a:spLocks noGrp="1"/>
+          </p:cNvSpPr>
+          <p:nvPr>
+            <p:ph type="body" idx="1"/>
+          </p:nvPr>
+        </p:nvSpPr>
+        <p:spPr/>
+        <p:txBody>
+          <a:bodyPr/>
+          <a:lstStyle/>
+          <a:p>
+            <a:r>
+              <a:rPr lang="en-US" dirty="0"/>
+              <a:t>ai-depth (click 6 of 6)
+~30s · one row per click, from the patient to the district
+"Most projects put AI in one box. Ours runs at five levels, and every level has a check and a measured number.
+Listen: Gemini turns Urdu speech into symptoms and syndromes. It reads twice and keeps the more urgent reading: zero missed emergencies on 110 hard cases.
+Ask and route: it plans the one question that could change priority, from a fixed bank of 45 reviewed Urdu questions. 30 of 30 real voice clips triaged right.
+Read: it reads photographed old reports and writes the doctor's brief, and any line without a real source is dropped.
+Watch: it tags syndromes for the district and writes the officer's alert, but the outbreak call itself is CDC statistics and the actions come from a fixed checklist. 93% precision.
+Survive: when the internet drops, our own model, distilled from five thousand Gemini-labelled examples, triages in 8 milliseconds in the browser.
+Seven AI components, one model we trained ourselves, five checks, four evaluation sets."
+Rulebook mapping if asked: each row is Data → AI → Output (the small line under each level), and the whole stack ends in the impact numbers on the proof slide.
+If an AI expert asks: structured output from Zod schemas, validated and retried on a fallback model; self-consistency at two temperatures; Gemini 2.5 Flash + Flash-Lite on Vertex AI; Lite is char+word n-gram logistic regression re-implemented in TypeScript.</a:t>
+            </a:r>
+            <a:endParaRPr lang="en-US" dirty="0"/>
+          </a:p>
+        </p:txBody>
+      </p:sp>
+      <p:sp>
+        <p:nvSpPr>
+          <p:cNvPr id="4" name="Slide Number Placeholder 3"/>
+          <p:cNvSpPr>
+            <a:spLocks noGrp="1"/>
+          </p:cNvSpPr>
+          <p:nvPr>
+            <p:ph type="sldNum" sz="quarter" idx="10"/>
+          </p:nvPr>
+        </p:nvSpPr>
+        <p:spPr/>
+        <p:txBody>
+          <a:bodyPr/>
+          <a:lstStyle/>
+          <a:p>
+            <a:fld id="{F7021451-1387-4CA6-816F-3879F97B5CBC}" type="slidenum">
+              <a:rPr lang="en-US"/>
+              <a:t>39</a:t>
+            </a:fld>
+            <a:endParaRPr lang="en-US"/>
+          </a:p>
+        </p:txBody>
+      </p:sp>
+    </p:spTree>
+    <p:extLst>
+      <p:ext uri="{BB962C8B-B14F-4D97-AF65-F5344CB8AC3E}">
+        <p14:creationId xmlns:p14="http://schemas.microsoft.com/office/powerpoint/2010/main" val="1024086991"/>
+      </p:ext>
+    </p:extLst>
+  </p:cSld>
+  <p:clrMapOvr>
+    <a:masterClrMapping/>
+  </p:clrMapOvr>
+</p:notes>
+</file>
+
+<file path=ppt/notesSlides/notesSlide4.xml><?xml version="1.0" encoding="utf-8"?>
+<p:notes xmlns:a="http://schemas.openxmlformats.org/drawingml/2006/main" xmlns:r="http://schemas.openxmlformats.org/officeDocument/2006/relationships" xmlns:p="http://schemas.openxmlformats.org/presentationml/2006/main">
+  <p:cSld>
+    <p:spTree>
+      <p:nvGrpSpPr>
+        <p:cNvPr id="1" name=""/>
+        <p:cNvGrpSpPr/>
+        <p:nvPr/>
+      </p:nvGrpSpPr>
+      <p:grpSpPr>
+        <a:xfrm>
+          <a:off x="0" y="0"/>
+          <a:ext cx="0" cy="0"/>
+          <a:chOff x="0" y="0"/>
+          <a:chExt cx="0" cy="0"/>
+        </a:xfrm>
+      </p:grpSpPr>
+      <p:sp>
+        <p:nvSpPr>
+          <p:cNvPr id="2" name="Slide Image Placeholder 1"/>
+          <p:cNvSpPr>
+            <a:spLocks noGrp="1" noRot="1" noChangeAspect="1"/>
+          </p:cNvSpPr>
+          <p:nvPr>
+            <p:ph type="sldImg"/>
+          </p:nvPr>
+        </p:nvSpPr>
+        <p:spPr/>
+      </p:sp>
+      <p:sp>
+        <p:nvSpPr>
+          <p:cNvPr id="3" name="Notes Placeholder 2"/>
+          <p:cNvSpPr>
+            <a:spLocks noGrp="1"/>
+          </p:cNvSpPr>
+          <p:nvPr>
+            <p:ph type="body" idx="1"/>
+          </p:nvPr>
+        </p:nvSpPr>
+        <p:spPr/>
+        <p:txBody>
+          <a:bodyPr/>
+          <a:lstStyle/>
+          <a:p>
+            <a:r>
+              <a:rPr lang="en-US" dirty="0"/>
+              <a:t>problem-statement (click 3 of 3)
+~20s · three clicks
+"Here's the problem we chose. Pakistan finds outbreaks weeks late, because the very first signal, what patients say at the hospital front desk, is never captured and never shared between hospitals. In Sindh last year, 819 dengue cases were reported officially while hospitals saw over twelve thousand. Rawalpindi and Islamabad hospitals have no information systems at any level, and PIMS alone sees eight thousand patients a day on paper. So this isn't a queue problem or a records problem. It's a blind spot for the whole district."
+Why this matters vs other teams: triage and hospital-management systems optimise one hospital. Nobody is solving the district's view across hospitals.</a:t>
+            </a:r>
+            <a:endParaRPr lang="en-US" dirty="0"/>
+          </a:p>
+        </p:txBody>
+      </p:sp>
+      <p:sp>
+        <p:nvSpPr>
+          <p:cNvPr id="4" name="Slide Number Placeholder 3"/>
+          <p:cNvSpPr>
+            <a:spLocks noGrp="1"/>
+          </p:cNvSpPr>
+          <p:nvPr>
+            <p:ph type="sldNum" sz="quarter" idx="10"/>
+          </p:nvPr>
+        </p:nvSpPr>
+        <p:spPr/>
+        <p:txBody>
+          <a:bodyPr/>
+          <a:lstStyle/>
+          <a:p>
+            <a:fld id="{F7021451-1387-4CA6-816F-3879F97B5CBC}" type="slidenum">
+              <a:rPr lang="en-US"/>
+              <a:t>4</a:t>
+            </a:fld>
+            <a:endParaRPr lang="en-US"/>
+          </a:p>
+        </p:txBody>
+      </p:sp>
+    </p:spTree>
+    <p:extLst>
+      <p:ext uri="{BB962C8B-B14F-4D97-AF65-F5344CB8AC3E}">
+        <p14:creationId xmlns:p14="http://schemas.microsoft.com/office/powerpoint/2010/main" val="1024086991"/>
+      </p:ext>
+    </p:extLst>
+  </p:cSld>
+  <p:clrMapOvr>
+    <a:masterClrMapping/>
+  </p:clrMapOvr>
+</p:notes>
+</file>
+
+<file path=ppt/notesSlides/notesSlide40.xml><?xml version="1.0" encoding="utf-8"?>
+<p:notes xmlns:a="http://schemas.openxmlformats.org/drawingml/2006/main" xmlns:r="http://schemas.openxmlformats.org/officeDocument/2006/relationships" xmlns:p="http://schemas.openxmlformats.org/presentationml/2006/main">
+  <p:cSld>
+    <p:spTree>
+      <p:nvGrpSpPr>
+        <p:cNvPr id="1" name=""/>
+        <p:cNvGrpSpPr/>
+        <p:nvPr/>
+      </p:nvGrpSpPr>
+      <p:grpSpPr>
+        <a:xfrm>
+          <a:off x="0" y="0"/>
+          <a:ext cx="0" cy="0"/>
+          <a:chOff x="0" y="0"/>
+          <a:chExt cx="0" cy="0"/>
+        </a:xfrm>
+      </p:grpSpPr>
+      <p:sp>
+        <p:nvSpPr>
+          <p:cNvPr id="2" name="Slide Image Placeholder 1"/>
+          <p:cNvSpPr>
+            <a:spLocks noGrp="1" noRot="1" noChangeAspect="1"/>
+          </p:cNvSpPr>
+          <p:nvPr>
+            <p:ph type="sldImg"/>
+          </p:nvPr>
+        </p:nvSpPr>
+        <p:spPr/>
+      </p:sp>
+      <p:sp>
+        <p:nvSpPr>
+          <p:cNvPr id="3" name="Notes Placeholder 2"/>
+          <p:cNvSpPr>
+            <a:spLocks noGrp="1"/>
+          </p:cNvSpPr>
+          <p:nvPr>
+            <p:ph type="body" idx="1"/>
+          </p:nvPr>
+        </p:nvSpPr>
+        <p:spPr/>
+        <p:txBody>
+          <a:bodyPr/>
+          <a:lstStyle/>
+          <a:p>
+            <a:r>
+              <a:rPr lang="en-US" dirty="0"/>
+              <a:t>clinicians (click 1 of 2)
+~20s · two clicks
+"For clinicians: severity comes from the South African Triage Scale, never from the AI. The nurse records her own colour before seeing the system's, so we measure agreement every day. Every line in the doctor's brief links to the original report, and lines without a real source are dropped. Under-twelves go straight to paediatric review. In our simulated OPD morning, a RED patient waits about a minute instead of over an hour. And it keeps working offline, with no new staff."
+If a doctor asks: in a KP district hospital study, nurses using SATS under-triaged 66% of emergency vignettes (Dalwai 2014); Priora is a consistent second reader, not a replacement.</a:t>
+            </a:r>
+            <a:endParaRPr lang="en-US" dirty="0"/>
+          </a:p>
+        </p:txBody>
+      </p:sp>
+      <p:sp>
+        <p:nvSpPr>
+          <p:cNvPr id="4" name="Slide Number Placeholder 3"/>
+          <p:cNvSpPr>
+            <a:spLocks noGrp="1"/>
+          </p:cNvSpPr>
+          <p:nvPr>
+            <p:ph type="sldNum" sz="quarter" idx="10"/>
+          </p:nvPr>
+        </p:nvSpPr>
+        <p:spPr/>
+        <p:txBody>
+          <a:bodyPr/>
+          <a:lstStyle/>
+          <a:p>
+            <a:fld id="{F7021451-1387-4CA6-816F-3879F97B5CBC}" type="slidenum">
+              <a:rPr lang="en-US"/>
+              <a:t>40</a:t>
+            </a:fld>
+            <a:endParaRPr lang="en-US"/>
+          </a:p>
+        </p:txBody>
+      </p:sp>
+    </p:spTree>
+    <p:extLst>
+      <p:ext uri="{BB962C8B-B14F-4D97-AF65-F5344CB8AC3E}">
+        <p14:creationId xmlns:p14="http://schemas.microsoft.com/office/powerpoint/2010/main" val="1024086991"/>
+      </p:ext>
+    </p:extLst>
+  </p:cSld>
+  <p:clrMapOvr>
+    <a:masterClrMapping/>
+  </p:clrMapOvr>
+</p:notes>
+</file>
+
+<file path=ppt/notesSlides/notesSlide41.xml><?xml version="1.0" encoding="utf-8"?>
+<p:notes xmlns:a="http://schemas.openxmlformats.org/drawingml/2006/main" xmlns:r="http://schemas.openxmlformats.org/officeDocument/2006/relationships" xmlns:p="http://schemas.openxmlformats.org/presentationml/2006/main">
+  <p:cSld>
+    <p:spTree>
+      <p:nvGrpSpPr>
+        <p:cNvPr id="1" name=""/>
+        <p:cNvGrpSpPr/>
+        <p:nvPr/>
+      </p:nvGrpSpPr>
+      <p:grpSpPr>
+        <a:xfrm>
+          <a:off x="0" y="0"/>
+          <a:ext cx="0" cy="0"/>
+          <a:chOff x="0" y="0"/>
+          <a:chExt cx="0" cy="0"/>
+        </a:xfrm>
+      </p:grpSpPr>
+      <p:sp>
+        <p:nvSpPr>
+          <p:cNvPr id="2" name="Slide Image Placeholder 1"/>
+          <p:cNvSpPr>
+            <a:spLocks noGrp="1" noRot="1" noChangeAspect="1"/>
+          </p:cNvSpPr>
+          <p:nvPr>
+            <p:ph type="sldImg"/>
+          </p:nvPr>
+        </p:nvSpPr>
+        <p:spPr/>
+      </p:sp>
+      <p:sp>
+        <p:nvSpPr>
+          <p:cNvPr id="3" name="Notes Placeholder 2"/>
+          <p:cNvSpPr>
+            <a:spLocks noGrp="1"/>
+          </p:cNvSpPr>
+          <p:nvPr>
+            <p:ph type="body" idx="1"/>
+          </p:nvPr>
+        </p:nvSpPr>
+        <p:spPr/>
+        <p:txBody>
+          <a:bodyPr/>
+          <a:lstStyle/>
+          <a:p>
+            <a:r>
+              <a:rPr lang="en-US" dirty="0"/>
+              <a:t>clinicians (click 2 of 2)
+~20s · two clicks
+"For clinicians: severity comes from the South African Triage Scale, never from the AI. The nurse records her own colour before seeing the system's, so we measure agreement every day. Every line in the doctor's brief links to the original report, and lines without a real source are dropped. Under-twelves go straight to paediatric review. In our simulated OPD morning, a RED patient waits about a minute instead of over an hour. And it keeps working offline, with no new staff."
+If a doctor asks: in a KP district hospital study, nurses using SATS under-triaged 66% of emergency vignettes (Dalwai 2014); Priora is a consistent second reader, not a replacement.</a:t>
+            </a:r>
+            <a:endParaRPr lang="en-US" dirty="0"/>
+          </a:p>
+        </p:txBody>
+      </p:sp>
+      <p:sp>
+        <p:nvSpPr>
+          <p:cNvPr id="4" name="Slide Number Placeholder 3"/>
+          <p:cNvSpPr>
+            <a:spLocks noGrp="1"/>
+          </p:cNvSpPr>
+          <p:nvPr>
+            <p:ph type="sldNum" sz="quarter" idx="10"/>
+          </p:nvPr>
+        </p:nvSpPr>
+        <p:spPr/>
+        <p:txBody>
+          <a:bodyPr/>
+          <a:lstStyle/>
+          <a:p>
+            <a:fld id="{F7021451-1387-4CA6-816F-3879F97B5CBC}" type="slidenum">
+              <a:rPr lang="en-US"/>
+              <a:t>41</a:t>
+            </a:fld>
+            <a:endParaRPr lang="en-US"/>
+          </a:p>
+        </p:txBody>
+      </p:sp>
+    </p:spTree>
+    <p:extLst>
+      <p:ext uri="{BB962C8B-B14F-4D97-AF65-F5344CB8AC3E}">
+        <p14:creationId xmlns:p14="http://schemas.microsoft.com/office/powerpoint/2010/main" val="1024086991"/>
+      </p:ext>
+    </p:extLst>
+  </p:cSld>
+  <p:clrMapOvr>
+    <a:masterClrMapping/>
+  </p:clrMapOvr>
+</p:notes>
+</file>
+
+<file path=ppt/notesSlides/notesSlide42.xml><?xml version="1.0" encoding="utf-8"?>
+<p:notes xmlns:a="http://schemas.openxmlformats.org/drawingml/2006/main" xmlns:r="http://schemas.openxmlformats.org/officeDocument/2006/relationships" xmlns:p="http://schemas.openxmlformats.org/presentationml/2006/main">
+  <p:cSld>
+    <p:spTree>
+      <p:nvGrpSpPr>
+        <p:cNvPr id="1" name=""/>
+        <p:cNvGrpSpPr/>
+        <p:nvPr/>
+      </p:nvGrpSpPr>
+      <p:grpSpPr>
+        <a:xfrm>
+          <a:off x="0" y="0"/>
+          <a:ext cx="0" cy="0"/>
+          <a:chOff x="0" y="0"/>
+          <a:chExt cx="0" cy="0"/>
+        </a:xfrm>
+      </p:grpSpPr>
+      <p:sp>
+        <p:nvSpPr>
+          <p:cNvPr id="2" name="Slide Image Placeholder 1"/>
+          <p:cNvSpPr>
+            <a:spLocks noGrp="1" noRot="1" noChangeAspect="1"/>
+          </p:cNvSpPr>
+          <p:nvPr>
+            <p:ph type="sldImg"/>
+          </p:nvPr>
+        </p:nvSpPr>
+        <p:spPr/>
+      </p:sp>
+      <p:sp>
+        <p:nvSpPr>
+          <p:cNvPr id="3" name="Notes Placeholder 2"/>
+          <p:cNvSpPr>
+            <a:spLocks noGrp="1"/>
+          </p:cNvSpPr>
+          <p:nvPr>
+            <p:ph type="body" idx="1"/>
+          </p:nvPr>
+        </p:nvSpPr>
+        <p:spPr/>
+        <p:txBody>
+          <a:bodyPr/>
+          <a:lstStyle/>
+          <a:p>
+            <a:r>
+              <a:rPr lang="en-US" dirty="0"/>
+              <a:t>demo
+switch to the browser tabs
+1. Kiosk: code AHMED54K7Q → Find me → mic: "Seenay mein dard hai, baayen baazu tak ja raha hai, paseena aa raha hai." Answer the follow-up → Correct.
+2. Nurse: open his token → HR 130 · RR 30 · BP 95 · Temp 37 → pick ORANGE yourself → system says RED → Confirm.
+3. Doctor (/doctor/emergency): Ahmed on top → open the brief → click one citation.
+4. District: click the G-9 dengue alert → chart, hospitals, AI brief, surge plan.
+If anything fails, go straight to the next slide.</a:t>
+            </a:r>
+            <a:endParaRPr lang="en-US" dirty="0"/>
+          </a:p>
+        </p:txBody>
+      </p:sp>
+      <p:sp>
+        <p:nvSpPr>
+          <p:cNvPr id="4" name="Slide Number Placeholder 3"/>
+          <p:cNvSpPr>
+            <a:spLocks noGrp="1"/>
+          </p:cNvSpPr>
+          <p:nvPr>
+            <p:ph type="sldNum" sz="quarter" idx="10"/>
+          </p:nvPr>
+        </p:nvSpPr>
+        <p:spPr/>
+        <p:txBody>
+          <a:bodyPr/>
+          <a:lstStyle/>
+          <a:p>
+            <a:fld id="{F7021451-1387-4CA6-816F-3879F97B5CBC}" type="slidenum">
+              <a:rPr lang="en-US"/>
+              <a:t>42</a:t>
+            </a:fld>
+            <a:endParaRPr lang="en-US"/>
+          </a:p>
+        </p:txBody>
+      </p:sp>
+    </p:spTree>
+    <p:extLst>
+      <p:ext uri="{BB962C8B-B14F-4D97-AF65-F5344CB8AC3E}">
+        <p14:creationId xmlns:p14="http://schemas.microsoft.com/office/powerpoint/2010/main" val="1024086991"/>
+      </p:ext>
+    </p:extLst>
+  </p:cSld>
+  <p:clrMapOvr>
+    <a:masterClrMapping/>
+  </p:clrMapOvr>
+</p:notes>
+</file>
+
+<file path=ppt/notesSlides/notesSlide43.xml><?xml version="1.0" encoding="utf-8"?>
+<p:notes xmlns:a="http://schemas.openxmlformats.org/drawingml/2006/main" xmlns:r="http://schemas.openxmlformats.org/officeDocument/2006/relationships" xmlns:p="http://schemas.openxmlformats.org/presentationml/2006/main">
+  <p:cSld>
+    <p:spTree>
+      <p:nvGrpSpPr>
+        <p:cNvPr id="1" name=""/>
+        <p:cNvGrpSpPr/>
+        <p:nvPr/>
+      </p:nvGrpSpPr>
+      <p:grpSpPr>
+        <a:xfrm>
+          <a:off x="0" y="0"/>
+          <a:ext cx="0" cy="0"/>
+          <a:chOff x="0" y="0"/>
+          <a:chExt cx="0" cy="0"/>
+        </a:xfrm>
+      </p:grpSpPr>
+      <p:sp>
+        <p:nvSpPr>
+          <p:cNvPr id="2" name="Slide Image Placeholder 1"/>
+          <p:cNvSpPr>
+            <a:spLocks noGrp="1" noRot="1" noChangeAspect="1"/>
+          </p:cNvSpPr>
+          <p:nvPr>
+            <p:ph type="sldImg"/>
+          </p:nvPr>
+        </p:nvSpPr>
+        <p:spPr/>
+      </p:sp>
+      <p:sp>
+        <p:nvSpPr>
+          <p:cNvPr id="3" name="Notes Placeholder 2"/>
+          <p:cNvSpPr>
+            <a:spLocks noGrp="1"/>
+          </p:cNvSpPr>
+          <p:nvPr>
+            <p:ph type="body" idx="1"/>
+          </p:nvPr>
+        </p:nvSpPr>
+        <p:spPr/>
+        <p:txBody>
+          <a:bodyPr/>
+          <a:lstStyle/>
+          <a:p>
+            <a:r>
+              <a:rPr lang="en-US" dirty="0"/>
+              <a:t>proof (click 1 of 3)
+"Across a thousand simulated outbreaks, Priora warns a median seven days earlier, and catches 87% within two weeks versus 39% today. On 110 cases written to trick it, it missed zero emergencies, and it triaged 30 out of 30 real Urdu and English voice clips correctly."
+Be honest if asked: the lead time is a simulation; it needs about 40% of patients passing a kiosk. Only the 75% report figure is sourced; the rest are stated assumptions you can change at /impact.
+If an AI expert asks: single reading 93.6% accuracy with 0.9% under-triage; two readings 0% under-triage for 1.8 points more over-triage; syndrome tagging 93% precision, 87% recall; our offline model 68% on the hard set, so it's the fallback, not the primary.</a:t>
+            </a:r>
+            <a:endParaRPr lang="en-US" dirty="0"/>
+          </a:p>
+        </p:txBody>
+      </p:sp>
+      <p:sp>
+        <p:nvSpPr>
+          <p:cNvPr id="4" name="Slide Number Placeholder 3"/>
+          <p:cNvSpPr>
+            <a:spLocks noGrp="1"/>
+          </p:cNvSpPr>
+          <p:nvPr>
+            <p:ph type="sldNum" sz="quarter" idx="10"/>
+          </p:nvPr>
+        </p:nvSpPr>
+        <p:spPr/>
+        <p:txBody>
+          <a:bodyPr/>
+          <a:lstStyle/>
+          <a:p>
+            <a:fld id="{F7021451-1387-4CA6-816F-3879F97B5CBC}" type="slidenum">
+              <a:rPr lang="en-US"/>
+              <a:t>43</a:t>
+            </a:fld>
+            <a:endParaRPr lang="en-US"/>
+          </a:p>
+        </p:txBody>
+      </p:sp>
+    </p:spTree>
+    <p:extLst>
+      <p:ext uri="{BB962C8B-B14F-4D97-AF65-F5344CB8AC3E}">
+        <p14:creationId xmlns:p14="http://schemas.microsoft.com/office/powerpoint/2010/main" val="1024086991"/>
+      </p:ext>
+    </p:extLst>
+  </p:cSld>
+  <p:clrMapOvr>
+    <a:masterClrMapping/>
+  </p:clrMapOvr>
+</p:notes>
+</file>
+
+<file path=ppt/notesSlides/notesSlide44.xml><?xml version="1.0" encoding="utf-8"?>
+<p:notes xmlns:a="http://schemas.openxmlformats.org/drawingml/2006/main" xmlns:r="http://schemas.openxmlformats.org/officeDocument/2006/relationships" xmlns:p="http://schemas.openxmlformats.org/presentationml/2006/main">
+  <p:cSld>
+    <p:spTree>
+      <p:nvGrpSpPr>
+        <p:cNvPr id="1" name=""/>
+        <p:cNvGrpSpPr/>
+        <p:nvPr/>
+      </p:nvGrpSpPr>
+      <p:grpSpPr>
+        <a:xfrm>
+          <a:off x="0" y="0"/>
+          <a:ext cx="0" cy="0"/>
+          <a:chOff x="0" y="0"/>
+          <a:chExt cx="0" cy="0"/>
+        </a:xfrm>
+      </p:grpSpPr>
+      <p:sp>
+        <p:nvSpPr>
+          <p:cNvPr id="2" name="Slide Image Placeholder 1"/>
+          <p:cNvSpPr>
+            <a:spLocks noGrp="1" noRot="1" noChangeAspect="1"/>
+          </p:cNvSpPr>
+          <p:nvPr>
+            <p:ph type="sldImg"/>
+          </p:nvPr>
+        </p:nvSpPr>
+        <p:spPr/>
+      </p:sp>
+      <p:sp>
+        <p:nvSpPr>
+          <p:cNvPr id="3" name="Notes Placeholder 2"/>
+          <p:cNvSpPr>
+            <a:spLocks noGrp="1"/>
+          </p:cNvSpPr>
+          <p:nvPr>
+            <p:ph type="body" idx="1"/>
+          </p:nvPr>
+        </p:nvSpPr>
+        <p:spPr/>
+        <p:txBody>
+          <a:bodyPr/>
+          <a:lstStyle/>
+          <a:p>
+            <a:r>
+              <a:rPr lang="en-US" dirty="0"/>
+              <a:t>proof (click 2 of 3)
+"Across a thousand simulated outbreaks, Priora warns a median seven days earlier, and catches 87% within two weeks versus 39% today. On 110 cases written to trick it, it missed zero emergencies, and it triaged 30 out of 30 real Urdu and English voice clips correctly."
+Be honest if asked: the lead time is a simulation; it needs about 40% of patients passing a kiosk. Only the 75% report figure is sourced; the rest are stated assumptions you can change at /impact.
+If an AI expert asks: single reading 93.6% accuracy with 0.9% under-triage; two readings 0% under-triage for 1.8 points more over-triage; syndrome tagging 93% precision, 87% recall; our offline model 68% on the hard set, so it's the fallback, not the primary.</a:t>
+            </a:r>
+            <a:endParaRPr lang="en-US" dirty="0"/>
+          </a:p>
+        </p:txBody>
+      </p:sp>
+      <p:sp>
+        <p:nvSpPr>
+          <p:cNvPr id="4" name="Slide Number Placeholder 3"/>
+          <p:cNvSpPr>
+            <a:spLocks noGrp="1"/>
+          </p:cNvSpPr>
+          <p:nvPr>
+            <p:ph type="sldNum" sz="quarter" idx="10"/>
+          </p:nvPr>
+        </p:nvSpPr>
+        <p:spPr/>
+        <p:txBody>
+          <a:bodyPr/>
+          <a:lstStyle/>
+          <a:p>
+            <a:fld id="{F7021451-1387-4CA6-816F-3879F97B5CBC}" type="slidenum">
+              <a:rPr lang="en-US"/>
+              <a:t>44</a:t>
+            </a:fld>
+            <a:endParaRPr lang="en-US"/>
+          </a:p>
+        </p:txBody>
+      </p:sp>
+    </p:spTree>
+    <p:extLst>
+      <p:ext uri="{BB962C8B-B14F-4D97-AF65-F5344CB8AC3E}">
+        <p14:creationId xmlns:p14="http://schemas.microsoft.com/office/powerpoint/2010/main" val="1024086991"/>
+      </p:ext>
+    </p:extLst>
+  </p:cSld>
+  <p:clrMapOvr>
+    <a:masterClrMapping/>
+  </p:clrMapOvr>
+</p:notes>
+</file>
+
+<file path=ppt/notesSlides/notesSlide45.xml><?xml version="1.0" encoding="utf-8"?>
+<p:notes xmlns:a="http://schemas.openxmlformats.org/drawingml/2006/main" xmlns:r="http://schemas.openxmlformats.org/officeDocument/2006/relationships" xmlns:p="http://schemas.openxmlformats.org/presentationml/2006/main">
+  <p:cSld>
+    <p:spTree>
+      <p:nvGrpSpPr>
+        <p:cNvPr id="1" name=""/>
+        <p:cNvGrpSpPr/>
+        <p:nvPr/>
+      </p:nvGrpSpPr>
+      <p:grpSpPr>
+        <a:xfrm>
+          <a:off x="0" y="0"/>
+          <a:ext cx="0" cy="0"/>
+          <a:chOff x="0" y="0"/>
+          <a:chExt cx="0" cy="0"/>
+        </a:xfrm>
+      </p:grpSpPr>
+      <p:sp>
+        <p:nvSpPr>
+          <p:cNvPr id="2" name="Slide Image Placeholder 1"/>
+          <p:cNvSpPr>
+            <a:spLocks noGrp="1" noRot="1" noChangeAspect="1"/>
+          </p:cNvSpPr>
+          <p:nvPr>
+            <p:ph type="sldImg"/>
+          </p:nvPr>
+        </p:nvSpPr>
+        <p:spPr/>
+      </p:sp>
+      <p:sp>
+        <p:nvSpPr>
+          <p:cNvPr id="3" name="Notes Placeholder 2"/>
+          <p:cNvSpPr>
+            <a:spLocks noGrp="1"/>
+          </p:cNvSpPr>
+          <p:nvPr>
+            <p:ph type="body" idx="1"/>
+          </p:nvPr>
+        </p:nvSpPr>
+        <p:spPr/>
+        <p:txBody>
+          <a:bodyPr/>
+          <a:lstStyle/>
+          <a:p>
+            <a:r>
+              <a:rPr lang="en-US" dirty="0"/>
+              <a:t>proof (click 3 of 3)
+"Across a thousand simulated outbreaks, Priora warns a median seven days earlier, and catches 87% within two weeks versus 39% today. On 110 cases written to trick it, it missed zero emergencies, and it triaged 30 out of 30 real Urdu and English voice clips correctly."
+Be honest if asked: the lead time is a simulation; it needs about 40% of patients passing a kiosk. Only the 75% report figure is sourced; the rest are stated assumptions you can change at /impact.
+If an AI expert asks: single reading 93.6% accuracy with 0.9% under-triage; two readings 0% under-triage for 1.8 points more over-triage; syndrome tagging 93% precision, 87% recall; our offline model 68% on the hard set, so it's the fallback, not the primary.</a:t>
+            </a:r>
+            <a:endParaRPr lang="en-US" dirty="0"/>
+          </a:p>
+        </p:txBody>
+      </p:sp>
+      <p:sp>
+        <p:nvSpPr>
+          <p:cNvPr id="4" name="Slide Number Placeholder 3"/>
+          <p:cNvSpPr>
+            <a:spLocks noGrp="1"/>
+          </p:cNvSpPr>
+          <p:nvPr>
+            <p:ph type="sldNum" sz="quarter" idx="10"/>
+          </p:nvPr>
+        </p:nvSpPr>
+        <p:spPr/>
+        <p:txBody>
+          <a:bodyPr/>
+          <a:lstStyle/>
+          <a:p>
+            <a:fld id="{F7021451-1387-4CA6-816F-3879F97B5CBC}" type="slidenum">
+              <a:rPr lang="en-US"/>
+              <a:t>45</a:t>
+            </a:fld>
+            <a:endParaRPr lang="en-US"/>
+          </a:p>
+        </p:txBody>
+      </p:sp>
+    </p:spTree>
+    <p:extLst>
+      <p:ext uri="{BB962C8B-B14F-4D97-AF65-F5344CB8AC3E}">
+        <p14:creationId xmlns:p14="http://schemas.microsoft.com/office/powerpoint/2010/main" val="1024086991"/>
+      </p:ext>
+    </p:extLst>
+  </p:cSld>
+  <p:clrMapOvr>
+    <a:masterClrMapping/>
+  </p:clrMapOvr>
+</p:notes>
+</file>
+
+<file path=ppt/notesSlides/notesSlide46.xml><?xml version="1.0" encoding="utf-8"?>
+<p:notes xmlns:a="http://schemas.openxmlformats.org/drawingml/2006/main" xmlns:r="http://schemas.openxmlformats.org/officeDocument/2006/relationships" xmlns:p="http://schemas.openxmlformats.org/presentationml/2006/main">
+  <p:cSld>
+    <p:spTree>
+      <p:nvGrpSpPr>
+        <p:cNvPr id="1" name=""/>
+        <p:cNvGrpSpPr/>
+        <p:nvPr/>
+      </p:nvGrpSpPr>
+      <p:grpSpPr>
+        <a:xfrm>
+          <a:off x="0" y="0"/>
+          <a:ext cx="0" cy="0"/>
+          <a:chOff x="0" y="0"/>
+          <a:chExt cx="0" cy="0"/>
+        </a:xfrm>
+      </p:grpSpPr>
+      <p:sp>
+        <p:nvSpPr>
+          <p:cNvPr id="2" name="Slide Image Placeholder 1"/>
+          <p:cNvSpPr>
+            <a:spLocks noGrp="1" noRot="1" noChangeAspect="1"/>
+          </p:cNvSpPr>
+          <p:nvPr>
+            <p:ph type="sldImg"/>
+          </p:nvPr>
+        </p:nvSpPr>
+        <p:spPr/>
+      </p:sp>
+      <p:sp>
+        <p:nvSpPr>
+          <p:cNvPr id="3" name="Notes Placeholder 2"/>
+          <p:cNvSpPr>
+            <a:spLocks noGrp="1"/>
+          </p:cNvSpPr>
+          <p:nvPr>
+            <p:ph type="body" idx="1"/>
+          </p:nvPr>
+        </p:nvSpPr>
+        <p:spPr/>
+        <p:txBody>
+          <a:bodyPr/>
+          <a:lstStyle/>
+          <a:p>
+            <a:r>
+              <a:rPr lang="en-US" dirty="0"/>
+              <a:t>value (click 1 of 3)
+~20s · three clicks
+"At scale, this is a national early-warning network. Pakistan has about 7,700 public hospitals and basic health units. One install gives two products: hospitals adopt it for safer queues, which gets it onto the desk; districts and provinces pay for the early warning. Every hospital that joins makes every alert faster: that's the network effect and the moat. It costs a tablet and a printer, and it maps directly onto SDG target 3.d: early warning for national health risks."
+If a business judge asks who pays: district health authorities and provincial health departments, who own disease surveillance, with partners like NIH and WHO. Pilot: the 3 largest OPDs, then all 8 network hospitals, then integration with national IDSR reporting.</a:t>
+            </a:r>
+            <a:endParaRPr lang="en-US" dirty="0"/>
+          </a:p>
+        </p:txBody>
+      </p:sp>
+      <p:sp>
+        <p:nvSpPr>
+          <p:cNvPr id="4" name="Slide Number Placeholder 3"/>
+          <p:cNvSpPr>
+            <a:spLocks noGrp="1"/>
+          </p:cNvSpPr>
+          <p:nvPr>
+            <p:ph type="sldNum" sz="quarter" idx="10"/>
+          </p:nvPr>
+        </p:nvSpPr>
+        <p:spPr/>
+        <p:txBody>
+          <a:bodyPr/>
+          <a:lstStyle/>
+          <a:p>
+            <a:fld id="{F7021451-1387-4CA6-816F-3879F97B5CBC}" type="slidenum">
+              <a:rPr lang="en-US"/>
+              <a:t>46</a:t>
+            </a:fld>
+            <a:endParaRPr lang="en-US"/>
+          </a:p>
+        </p:txBody>
+      </p:sp>
+    </p:spTree>
+    <p:extLst>
+      <p:ext uri="{BB962C8B-B14F-4D97-AF65-F5344CB8AC3E}">
+        <p14:creationId xmlns:p14="http://schemas.microsoft.com/office/powerpoint/2010/main" val="1024086991"/>
+      </p:ext>
+    </p:extLst>
+  </p:cSld>
+  <p:clrMapOvr>
+    <a:masterClrMapping/>
+  </p:clrMapOvr>
+</p:notes>
+</file>
+
+<file path=ppt/notesSlides/notesSlide47.xml><?xml version="1.0" encoding="utf-8"?>
+<p:notes xmlns:a="http://schemas.openxmlformats.org/drawingml/2006/main" xmlns:r="http://schemas.openxmlformats.org/officeDocument/2006/relationships" xmlns:p="http://schemas.openxmlformats.org/presentationml/2006/main">
+  <p:cSld>
+    <p:spTree>
+      <p:nvGrpSpPr>
+        <p:cNvPr id="1" name=""/>
+        <p:cNvGrpSpPr/>
+        <p:nvPr/>
+      </p:nvGrpSpPr>
+      <p:grpSpPr>
+        <a:xfrm>
+          <a:off x="0" y="0"/>
+          <a:ext cx="0" cy="0"/>
+          <a:chOff x="0" y="0"/>
+          <a:chExt cx="0" cy="0"/>
+        </a:xfrm>
+      </p:grpSpPr>
+      <p:sp>
+        <p:nvSpPr>
+          <p:cNvPr id="2" name="Slide Image Placeholder 1"/>
+          <p:cNvSpPr>
+            <a:spLocks noGrp="1" noRot="1" noChangeAspect="1"/>
+          </p:cNvSpPr>
+          <p:nvPr>
+            <p:ph type="sldImg"/>
+          </p:nvPr>
+        </p:nvSpPr>
+        <p:spPr/>
+      </p:sp>
+      <p:sp>
+        <p:nvSpPr>
+          <p:cNvPr id="3" name="Notes Placeholder 2"/>
+          <p:cNvSpPr>
+            <a:spLocks noGrp="1"/>
+          </p:cNvSpPr>
+          <p:nvPr>
+            <p:ph type="body" idx="1"/>
+          </p:nvPr>
+        </p:nvSpPr>
+        <p:spPr/>
+        <p:txBody>
+          <a:bodyPr/>
+          <a:lstStyle/>
+          <a:p>
+            <a:r>
+              <a:rPr lang="en-US" dirty="0"/>
+              <a:t>value (click 2 of 3)
+~20s · three clicks
+"At scale, this is a national early-warning network. Pakistan has about 7,700 public hospitals and basic health units. One install gives two products: hospitals adopt it for safer queues, which gets it onto the desk; districts and provinces pay for the early warning. Every hospital that joins makes every alert faster: that's the network effect and the moat. It costs a tablet and a printer, and it maps directly onto SDG target 3.d: early warning for national health risks."
+If a business judge asks who pays: district health authorities and provincial health departments, who own disease surveillance, with partners like NIH and WHO. Pilot: the 3 largest OPDs, then all 8 network hospitals, then integration with national IDSR reporting.</a:t>
+            </a:r>
+            <a:endParaRPr lang="en-US" dirty="0"/>
+          </a:p>
+        </p:txBody>
+      </p:sp>
+      <p:sp>
+        <p:nvSpPr>
+          <p:cNvPr id="4" name="Slide Number Placeholder 3"/>
+          <p:cNvSpPr>
+            <a:spLocks noGrp="1"/>
+          </p:cNvSpPr>
+          <p:nvPr>
+            <p:ph type="sldNum" sz="quarter" idx="10"/>
+          </p:nvPr>
+        </p:nvSpPr>
+        <p:spPr/>
+        <p:txBody>
+          <a:bodyPr/>
+          <a:lstStyle/>
+          <a:p>
+            <a:fld id="{F7021451-1387-4CA6-816F-3879F97B5CBC}" type="slidenum">
+              <a:rPr lang="en-US"/>
+              <a:t>47</a:t>
+            </a:fld>
+            <a:endParaRPr lang="en-US"/>
+          </a:p>
+        </p:txBody>
+      </p:sp>
+    </p:spTree>
+    <p:extLst>
+      <p:ext uri="{BB962C8B-B14F-4D97-AF65-F5344CB8AC3E}">
+        <p14:creationId xmlns:p14="http://schemas.microsoft.com/office/powerpoint/2010/main" val="1024086991"/>
+      </p:ext>
+    </p:extLst>
+  </p:cSld>
+  <p:clrMapOvr>
+    <a:masterClrMapping/>
+  </p:clrMapOvr>
+</p:notes>
+</file>
+
+<file path=ppt/notesSlides/notesSlide48.xml><?xml version="1.0" encoding="utf-8"?>
+<p:notes xmlns:a="http://schemas.openxmlformats.org/drawingml/2006/main" xmlns:r="http://schemas.openxmlformats.org/officeDocument/2006/relationships" xmlns:p="http://schemas.openxmlformats.org/presentationml/2006/main">
+  <p:cSld>
+    <p:spTree>
+      <p:nvGrpSpPr>
+        <p:cNvPr id="1" name=""/>
+        <p:cNvGrpSpPr/>
+        <p:nvPr/>
+      </p:nvGrpSpPr>
+      <p:grpSpPr>
+        <a:xfrm>
+          <a:off x="0" y="0"/>
+          <a:ext cx="0" cy="0"/>
+          <a:chOff x="0" y="0"/>
+          <a:chExt cx="0" cy="0"/>
+        </a:xfrm>
+      </p:grpSpPr>
+      <p:sp>
+        <p:nvSpPr>
+          <p:cNvPr id="2" name="Slide Image Placeholder 1"/>
+          <p:cNvSpPr>
+            <a:spLocks noGrp="1" noRot="1" noChangeAspect="1"/>
+          </p:cNvSpPr>
+          <p:nvPr>
+            <p:ph type="sldImg"/>
+          </p:nvPr>
+        </p:nvSpPr>
+        <p:spPr/>
+      </p:sp>
+      <p:sp>
+        <p:nvSpPr>
+          <p:cNvPr id="3" name="Notes Placeholder 2"/>
+          <p:cNvSpPr>
+            <a:spLocks noGrp="1"/>
+          </p:cNvSpPr>
+          <p:nvPr>
+            <p:ph type="body" idx="1"/>
+          </p:nvPr>
+        </p:nvSpPr>
+        <p:spPr/>
+        <p:txBody>
+          <a:bodyPr/>
+          <a:lstStyle/>
+          <a:p>
+            <a:r>
+              <a:rPr lang="en-US" dirty="0"/>
+              <a:t>value (click 3 of 3)
+~20s · three clicks
+"At scale, this is a national early-warning network. Pakistan has about 7,700 public hospitals and basic health units. One install gives two products: hospitals adopt it for safer queues, which gets it onto the desk; districts and provinces pay for the early warning. Every hospital that joins makes every alert faster: that's the network effect and the moat. It costs a tablet and a printer, and it maps directly onto SDG target 3.d: early warning for national health risks."
+If a business judge asks who pays: district health authorities and provincial health departments, who own disease surveillance, with partners like NIH and WHO. Pilot: the 3 largest OPDs, then all 8 network hospitals, then integration with national IDSR reporting.</a:t>
+            </a:r>
+            <a:endParaRPr lang="en-US" dirty="0"/>
+          </a:p>
+        </p:txBody>
+      </p:sp>
+      <p:sp>
+        <p:nvSpPr>
+          <p:cNvPr id="4" name="Slide Number Placeholder 3"/>
+          <p:cNvSpPr>
+            <a:spLocks noGrp="1"/>
+          </p:cNvSpPr>
+          <p:nvPr>
+            <p:ph type="sldNum" sz="quarter" idx="10"/>
+          </p:nvPr>
+        </p:nvSpPr>
+        <p:spPr/>
+        <p:txBody>
+          <a:bodyPr/>
+          <a:lstStyle/>
+          <a:p>
+            <a:fld id="{F7021451-1387-4CA6-816F-3879F97B5CBC}" type="slidenum">
+              <a:rPr lang="en-US"/>
+              <a:t>48</a:t>
+            </a:fld>
+            <a:endParaRPr lang="en-US"/>
+          </a:p>
+        </p:txBody>
+      </p:sp>
+    </p:spTree>
+    <p:extLst>
+      <p:ext uri="{BB962C8B-B14F-4D97-AF65-F5344CB8AC3E}">
+        <p14:creationId xmlns:p14="http://schemas.microsoft.com/office/powerpoint/2010/main" val="1024086991"/>
+      </p:ext>
+    </p:extLst>
+  </p:cSld>
+  <p:clrMapOvr>
+    <a:masterClrMapping/>
+  </p:clrMapOvr>
+</p:notes>
+</file>
+
+<file path=ppt/notesSlides/notesSlide49.xml><?xml version="1.0" encoding="utf-8"?>
+<p:notes xmlns:a="http://schemas.openxmlformats.org/drawingml/2006/main" xmlns:r="http://schemas.openxmlformats.org/officeDocument/2006/relationships" xmlns:p="http://schemas.openxmlformats.org/presentationml/2006/main">
+  <p:cSld>
+    <p:spTree>
+      <p:nvGrpSpPr>
+        <p:cNvPr id="1" name=""/>
+        <p:cNvGrpSpPr/>
+        <p:nvPr/>
+      </p:nvGrpSpPr>
+      <p:grpSpPr>
+        <a:xfrm>
+          <a:off x="0" y="0"/>
+          <a:ext cx="0" cy="0"/>
+          <a:chOff x="0" y="0"/>
+          <a:chExt cx="0" cy="0"/>
+        </a:xfrm>
+      </p:grpSpPr>
+      <p:sp>
+        <p:nvSpPr>
+          <p:cNvPr id="2" name="Slide Image Placeholder 1"/>
+          <p:cNvSpPr>
+            <a:spLocks noGrp="1" noRot="1" noChangeAspect="1"/>
+          </p:cNvSpPr>
+          <p:nvPr>
+            <p:ph type="sldImg"/>
+          </p:nvPr>
+        </p:nvSpPr>
+        <p:spPr/>
+      </p:sp>
+      <p:sp>
+        <p:nvSpPr>
+          <p:cNvPr id="3" name="Notes Placeholder 2"/>
+          <p:cNvSpPr>
+            <a:spLocks noGrp="1"/>
+          </p:cNvSpPr>
+          <p:nvPr>
+            <p:ph type="body" idx="1"/>
+          </p:nvPr>
+        </p:nvSpPr>
+        <p:spPr/>
+        <p:txBody>
+          <a:bodyPr/>
+          <a:lstStyle/>
+          <a:p>
+            <a:r>
+              <a:rPr lang="en-US" dirty="0"/>
+              <a:t>questions
+"It's live today. The next step is an eight-week pilot in the three biggest OPDs: PIMS, Holy Family and Benazir Bhutto. Three teams triage a patient. Priora triages a district. Thank you. Happy to take questions."</a:t>
+            </a:r>
+            <a:endParaRPr lang="en-US" dirty="0"/>
+          </a:p>
+        </p:txBody>
+      </p:sp>
+      <p:sp>
+        <p:nvSpPr>
+          <p:cNvPr id="4" name="Slide Number Placeholder 3"/>
+          <p:cNvSpPr>
+            <a:spLocks noGrp="1"/>
+          </p:cNvSpPr>
+          <p:nvPr>
+            <p:ph type="sldNum" sz="quarter" idx="10"/>
+          </p:nvPr>
+        </p:nvSpPr>
+        <p:spPr/>
+        <p:txBody>
+          <a:bodyPr/>
+          <a:lstStyle/>
+          <a:p>
+            <a:fld id="{F7021451-1387-4CA6-816F-3879F97B5CBC}" type="slidenum">
+              <a:rPr lang="en-US"/>
+              <a:t>49</a:t>
+            </a:fld>
+            <a:endParaRPr lang="en-US"/>
+          </a:p>
+        </p:txBody>
+      </p:sp>
+    </p:spTree>
+    <p:extLst>
+      <p:ext uri="{BB962C8B-B14F-4D97-AF65-F5344CB8AC3E}">
+        <p14:creationId xmlns:p14="http://schemas.microsoft.com/office/powerpoint/2010/main" val="1024086991"/>
+      </p:ext>
+    </p:extLst>
+  </p:cSld>
+  <p:clrMapOvr>
+    <a:masterClrMapping/>
+  </p:clrMapOvr>
+</p:notes>
+</file>
+
+<file path=ppt/notesSlides/notesSlide5.xml><?xml version="1.0" encoding="utf-8"?>
+<p:notes xmlns:a="http://schemas.openxmlformats.org/drawingml/2006/main" xmlns:r="http://schemas.openxmlformats.org/officeDocument/2006/relationships" xmlns:p="http://schemas.openxmlformats.org/presentationml/2006/main">
+  <p:cSld>
+    <p:spTree>
+      <p:nvGrpSpPr>
+        <p:cNvPr id="1" name=""/>
+        <p:cNvGrpSpPr/>
+        <p:nvPr/>
+      </p:nvGrpSpPr>
+      <p:grpSpPr>
+        <a:xfrm>
+          <a:off x="0" y="0"/>
+          <a:ext cx="0" cy="0"/>
+          <a:chOff x="0" y="0"/>
+          <a:chExt cx="0" cy="0"/>
+        </a:xfrm>
+      </p:grpSpPr>
+      <p:sp>
+        <p:nvSpPr>
+          <p:cNvPr id="2" name="Slide Image Placeholder 1"/>
+          <p:cNvSpPr>
+            <a:spLocks noGrp="1" noRot="1" noChangeAspect="1"/>
+          </p:cNvSpPr>
+          <p:nvPr>
+            <p:ph type="sldImg"/>
+          </p:nvPr>
+        </p:nvSpPr>
+        <p:spPr/>
+      </p:sp>
+      <p:sp>
+        <p:nvSpPr>
+          <p:cNvPr id="3" name="Notes Placeholder 2"/>
+          <p:cNvSpPr>
+            <a:spLocks noGrp="1"/>
+          </p:cNvSpPr>
+          <p:nvPr>
+            <p:ph type="body" idx="1"/>
+          </p:nvPr>
+        </p:nvSpPr>
+        <p:spPr/>
+        <p:txBody>
+          <a:bodyPr/>
+          <a:lstStyle/>
+          <a:p>
+            <a:r>
+              <a:rPr lang="en-US" dirty="0"/>
+              <a:t>problem (click 1 of 5)
+five quick clicks
+1 "Day zero: the first patients with fever reach the OPDs."
+2 "Only about a third get a lab test, days later."
+3 "The week closes and the report is compiled about three days after that."
+4 "And only 75% of those weekly reports even arrive (NIH Pakistan, 2025)."
+5 "So the district notices around day 17 (median, in our simulation). In Sindh last year, 819 dengue cases were reported officially while hospitals and labs saw over 12,000 (Dawn)."
+If a doctor asks: you see the first fever patients on day zero; the system sees them weeks later.
+If a business judge asks: beds, kits and fogging are bought on the wrong number, too late.</a:t>
+            </a:r>
+            <a:endParaRPr lang="en-US" dirty="0"/>
+          </a:p>
+        </p:txBody>
+      </p:sp>
+      <p:sp>
+        <p:nvSpPr>
+          <p:cNvPr id="4" name="Slide Number Placeholder 3"/>
+          <p:cNvSpPr>
+            <a:spLocks noGrp="1"/>
+          </p:cNvSpPr>
+          <p:nvPr>
+            <p:ph type="sldNum" sz="quarter" idx="10"/>
+          </p:nvPr>
+        </p:nvSpPr>
+        <p:spPr/>
+        <p:txBody>
+          <a:bodyPr/>
+          <a:lstStyle/>
+          <a:p>
+            <a:fld id="{F7021451-1387-4CA6-816F-3879F97B5CBC}" type="slidenum">
+              <a:rPr lang="en-US"/>
+              <a:t>5</a:t>
+            </a:fld>
+            <a:endParaRPr lang="en-US"/>
+          </a:p>
+        </p:txBody>
+      </p:sp>
+    </p:spTree>
+    <p:extLst>
+      <p:ext uri="{BB962C8B-B14F-4D97-AF65-F5344CB8AC3E}">
+        <p14:creationId xmlns:p14="http://schemas.microsoft.com/office/powerpoint/2010/main" val="1024086991"/>
+      </p:ext>
+    </p:extLst>
+  </p:cSld>
+  <p:clrMapOvr>
+    <a:masterClrMapping/>
+  </p:clrMapOvr>
+</p:notes>
+</file>
+
+<file path=ppt/notesSlides/notesSlide6.xml><?xml version="1.0" encoding="utf-8"?>
+<p:notes xmlns:a="http://schemas.openxmlformats.org/drawingml/2006/main" xmlns:r="http://schemas.openxmlformats.org/officeDocument/2006/relationships" xmlns:p="http://schemas.openxmlformats.org/presentationml/2006/main">
+  <p:cSld>
+    <p:spTree>
+      <p:nvGrpSpPr>
+        <p:cNvPr id="1" name=""/>
+        <p:cNvGrpSpPr/>
+        <p:nvPr/>
+      </p:nvGrpSpPr>
+      <p:grpSpPr>
+        <a:xfrm>
+          <a:off x="0" y="0"/>
+          <a:ext cx="0" cy="0"/>
+          <a:chOff x="0" y="0"/>
+          <a:chExt cx="0" cy="0"/>
+        </a:xfrm>
+      </p:grpSpPr>
+      <p:sp>
+        <p:nvSpPr>
+          <p:cNvPr id="2" name="Slide Image Placeholder 1"/>
+          <p:cNvSpPr>
+            <a:spLocks noGrp="1" noRot="1" noChangeAspect="1"/>
+          </p:cNvSpPr>
+          <p:nvPr>
+            <p:ph type="sldImg"/>
+          </p:nvPr>
+        </p:nvSpPr>
+        <p:spPr/>
+      </p:sp>
+      <p:sp>
+        <p:nvSpPr>
+          <p:cNvPr id="3" name="Notes Placeholder 2"/>
+          <p:cNvSpPr>
+            <a:spLocks noGrp="1"/>
+          </p:cNvSpPr>
+          <p:nvPr>
+            <p:ph type="body" idx="1"/>
+          </p:nvPr>
+        </p:nvSpPr>
+        <p:spPr/>
+        <p:txBody>
+          <a:bodyPr/>
+          <a:lstStyle/>
+          <a:p>
+            <a:r>
+              <a:rPr lang="en-US" dirty="0"/>
+              <a:t>problem (click 2 of 5)
+five quick clicks
+1 "Day zero: the first patients with fever reach the OPDs."
+2 "Only about a third get a lab test, days later."
+3 "The week closes and the report is compiled about three days after that."
+4 "And only 75% of those weekly reports even arrive (NIH Pakistan, 2025)."
+5 "So the district notices around day 17 (median, in our simulation). In Sindh last year, 819 dengue cases were reported officially while hospitals and labs saw over 12,000 (Dawn)."
+If a doctor asks: you see the first fever patients on day zero; the system sees them weeks later.
+If a business judge asks: beds, kits and fogging are bought on the wrong number, too late.</a:t>
+            </a:r>
+            <a:endParaRPr lang="en-US" dirty="0"/>
+          </a:p>
+        </p:txBody>
+      </p:sp>
+      <p:sp>
+        <p:nvSpPr>
+          <p:cNvPr id="4" name="Slide Number Placeholder 3"/>
+          <p:cNvSpPr>
+            <a:spLocks noGrp="1"/>
+          </p:cNvSpPr>
+          <p:nvPr>
+            <p:ph type="sldNum" sz="quarter" idx="10"/>
+          </p:nvPr>
+        </p:nvSpPr>
+        <p:spPr/>
+        <p:txBody>
+          <a:bodyPr/>
+          <a:lstStyle/>
+          <a:p>
+            <a:fld id="{F7021451-1387-4CA6-816F-3879F97B5CBC}" type="slidenum">
+              <a:rPr lang="en-US"/>
+              <a:t>6</a:t>
+            </a:fld>
+            <a:endParaRPr lang="en-US"/>
+          </a:p>
+        </p:txBody>
+      </p:sp>
+    </p:spTree>
+    <p:extLst>
+      <p:ext uri="{BB962C8B-B14F-4D97-AF65-F5344CB8AC3E}">
+        <p14:creationId xmlns:p14="http://schemas.microsoft.com/office/powerpoint/2010/main" val="1024086991"/>
+      </p:ext>
+    </p:extLst>
+  </p:cSld>
+  <p:clrMapOvr>
+    <a:masterClrMapping/>
+  </p:clrMapOvr>
+</p:notes>
+</file>
+
+<file path=ppt/notesSlides/notesSlide7.xml><?xml version="1.0" encoding="utf-8"?>
+<p:notes xmlns:a="http://schemas.openxmlformats.org/drawingml/2006/main" xmlns:r="http://schemas.openxmlformats.org/officeDocument/2006/relationships" xmlns:p="http://schemas.openxmlformats.org/presentationml/2006/main">
+  <p:cSld>
+    <p:spTree>
+      <p:nvGrpSpPr>
+        <p:cNvPr id="1" name=""/>
+        <p:cNvGrpSpPr/>
+        <p:nvPr/>
+      </p:nvGrpSpPr>
+      <p:grpSpPr>
+        <a:xfrm>
+          <a:off x="0" y="0"/>
+          <a:ext cx="0" cy="0"/>
+          <a:chOff x="0" y="0"/>
+          <a:chExt cx="0" cy="0"/>
+        </a:xfrm>
+      </p:grpSpPr>
+      <p:sp>
+        <p:nvSpPr>
+          <p:cNvPr id="2" name="Slide Image Placeholder 1"/>
+          <p:cNvSpPr>
+            <a:spLocks noGrp="1" noRot="1" noChangeAspect="1"/>
+          </p:cNvSpPr>
+          <p:nvPr>
+            <p:ph type="sldImg"/>
+          </p:nvPr>
+        </p:nvSpPr>
+        <p:spPr/>
+      </p:sp>
+      <p:sp>
+        <p:nvSpPr>
+          <p:cNvPr id="3" name="Notes Placeholder 2"/>
+          <p:cNvSpPr>
+            <a:spLocks noGrp="1"/>
+          </p:cNvSpPr>
+          <p:nvPr>
+            <p:ph type="body" idx="1"/>
+          </p:nvPr>
+        </p:nvSpPr>
+        <p:spPr/>
+        <p:txBody>
+          <a:bodyPr/>
+          <a:lstStyle/>
+          <a:p>
+            <a:r>
+              <a:rPr lang="en-US" dirty="0"/>
+              <a:t>problem (click 3 of 5)
+five quick clicks
+1 "Day zero: the first patients with fever reach the OPDs."
+2 "Only about a third get a lab test, days later."
+3 "The week closes and the report is compiled about three days after that."
+4 "And only 75% of those weekly reports even arrive (NIH Pakistan, 2025)."
+5 "So the district notices around day 17 (median, in our simulation). In Sindh last year, 819 dengue cases were reported officially while hospitals and labs saw over 12,000 (Dawn)."
+If a doctor asks: you see the first fever patients on day zero; the system sees them weeks later.
+If a business judge asks: beds, kits and fogging are bought on the wrong number, too late.</a:t>
+            </a:r>
+            <a:endParaRPr lang="en-US" dirty="0"/>
+          </a:p>
+        </p:txBody>
+      </p:sp>
+      <p:sp>
+        <p:nvSpPr>
+          <p:cNvPr id="4" name="Slide Number Placeholder 3"/>
+          <p:cNvSpPr>
+            <a:spLocks noGrp="1"/>
+          </p:cNvSpPr>
+          <p:nvPr>
+            <p:ph type="sldNum" sz="quarter" idx="10"/>
+          </p:nvPr>
+        </p:nvSpPr>
+        <p:spPr/>
+        <p:txBody>
+          <a:bodyPr/>
+          <a:lstStyle/>
+          <a:p>
+            <a:fld id="{F7021451-1387-4CA6-816F-3879F97B5CBC}" type="slidenum">
+              <a:rPr lang="en-US"/>
+              <a:t>7</a:t>
+            </a:fld>
+            <a:endParaRPr lang="en-US"/>
+          </a:p>
+        </p:txBody>
+      </p:sp>
+    </p:spTree>
+    <p:extLst>
+      <p:ext uri="{BB962C8B-B14F-4D97-AF65-F5344CB8AC3E}">
+        <p14:creationId xmlns:p14="http://schemas.microsoft.com/office/powerpoint/2010/main" val="1024086991"/>
+      </p:ext>
+    </p:extLst>
+  </p:cSld>
+  <p:clrMapOvr>
+    <a:masterClrMapping/>
+  </p:clrMapOvr>
+</p:notes>
+</file>
+
+<file path=ppt/notesSlides/notesSlide8.xml><?xml version="1.0" encoding="utf-8"?>
+<p:notes xmlns:a="http://schemas.openxmlformats.org/drawingml/2006/main" xmlns:r="http://schemas.openxmlformats.org/officeDocument/2006/relationships" xmlns:p="http://schemas.openxmlformats.org/presentationml/2006/main">
+  <p:cSld>
+    <p:spTree>
+      <p:nvGrpSpPr>
+        <p:cNvPr id="1" name=""/>
+        <p:cNvGrpSpPr/>
+        <p:nvPr/>
+      </p:nvGrpSpPr>
+      <p:grpSpPr>
+        <a:xfrm>
+          <a:off x="0" y="0"/>
+          <a:ext cx="0" cy="0"/>
+          <a:chOff x="0" y="0"/>
+          <a:chExt cx="0" cy="0"/>
+        </a:xfrm>
+      </p:grpSpPr>
+      <p:sp>
+        <p:nvSpPr>
+          <p:cNvPr id="2" name="Slide Image Placeholder 1"/>
+          <p:cNvSpPr>
+            <a:spLocks noGrp="1" noRot="1" noChangeAspect="1"/>
+          </p:cNvSpPr>
+          <p:nvPr>
+            <p:ph type="sldImg"/>
+          </p:nvPr>
+        </p:nvSpPr>
+        <p:spPr/>
+      </p:sp>
+      <p:sp>
+        <p:nvSpPr>
+          <p:cNvPr id="3" name="Notes Placeholder 2"/>
+          <p:cNvSpPr>
+            <a:spLocks noGrp="1"/>
+          </p:cNvSpPr>
+          <p:nvPr>
+            <p:ph type="body" idx="1"/>
+          </p:nvPr>
+        </p:nvSpPr>
+        <p:spPr/>
+        <p:txBody>
+          <a:bodyPr/>
+          <a:lstStyle/>
+          <a:p>
+            <a:r>
+              <a:rPr lang="en-US" dirty="0"/>
+              <a:t>problem (click 4 of 5)
+five quick clicks
+1 "Day zero: the first patients with fever reach the OPDs."
+2 "Only about a third get a lab test, days later."
+3 "The week closes and the report is compiled about three days after that."
+4 "And only 75% of those weekly reports even arrive (NIH Pakistan, 2025)."
+5 "So the district notices around day 17 (median, in our simulation). In Sindh last year, 819 dengue cases were reported officially while hospitals and labs saw over 12,000 (Dawn)."
+If a doctor asks: you see the first fever patients on day zero; the system sees them weeks later.
+If a business judge asks: beds, kits and fogging are bought on the wrong number, too late.</a:t>
+            </a:r>
+            <a:endParaRPr lang="en-US" dirty="0"/>
+          </a:p>
+        </p:txBody>
+      </p:sp>
+      <p:sp>
+        <p:nvSpPr>
+          <p:cNvPr id="4" name="Slide Number Placeholder 3"/>
+          <p:cNvSpPr>
+            <a:spLocks noGrp="1"/>
+          </p:cNvSpPr>
+          <p:nvPr>
+            <p:ph type="sldNum" sz="quarter" idx="10"/>
+          </p:nvPr>
+        </p:nvSpPr>
+        <p:spPr/>
+        <p:txBody>
+          <a:bodyPr/>
+          <a:lstStyle/>
+          <a:p>
+            <a:fld id="{F7021451-1387-4CA6-816F-3879F97B5CBC}" type="slidenum">
+              <a:rPr lang="en-US"/>
+              <a:t>8</a:t>
+            </a:fld>
+            <a:endParaRPr lang="en-US"/>
+          </a:p>
+        </p:txBody>
+      </p:sp>
+    </p:spTree>
+    <p:extLst>
+      <p:ext uri="{BB962C8B-B14F-4D97-AF65-F5344CB8AC3E}">
+        <p14:creationId xmlns:p14="http://schemas.microsoft.com/office/powerpoint/2010/main" val="1024086991"/>
+      </p:ext>
+    </p:extLst>
+  </p:cSld>
+  <p:clrMapOvr>
+    <a:masterClrMapping/>
+  </p:clrMapOvr>
+</p:notes>
+</file>
+
+<file path=ppt/notesSlides/notesSlide9.xml><?xml version="1.0" encoding="utf-8"?>
+<p:notes xmlns:a="http://schemas.openxmlformats.org/drawingml/2006/main" xmlns:r="http://schemas.openxmlformats.org/officeDocument/2006/relationships" xmlns:p="http://schemas.openxmlformats.org/presentationml/2006/main">
+  <p:cSld>
+    <p:spTree>
+      <p:nvGrpSpPr>
+        <p:cNvPr id="1" name=""/>
+        <p:cNvGrpSpPr/>
+        <p:nvPr/>
+      </p:nvGrpSpPr>
+      <p:grpSpPr>
+        <a:xfrm>
+          <a:off x="0" y="0"/>
+          <a:ext cx="0" cy="0"/>
+          <a:chOff x="0" y="0"/>
+          <a:chExt cx="0" cy="0"/>
+        </a:xfrm>
+      </p:grpSpPr>
+      <p:sp>
+        <p:nvSpPr>
+          <p:cNvPr id="2" name="Slide Image Placeholder 1"/>
+          <p:cNvSpPr>
+            <a:spLocks noGrp="1" noRot="1" noChangeAspect="1"/>
+          </p:cNvSpPr>
+          <p:nvPr>
+            <p:ph type="sldImg"/>
+          </p:nvPr>
+        </p:nvSpPr>
+        <p:spPr/>
+      </p:sp>
+      <p:sp>
+        <p:nvSpPr>
+          <p:cNvPr id="3" name="Notes Placeholder 2"/>
+          <p:cNvSpPr>
+            <a:spLocks noGrp="1"/>
+          </p:cNvSpPr>
+          <p:nvPr>
+            <p:ph type="body" idx="1"/>
+          </p:nvPr>
+        </p:nvSpPr>
+        <p:spPr/>
+        <p:txBody>
+          <a:bodyPr/>
+          <a:lstStyle/>
+          <a:p>
+            <a:r>
+              <a:rPr lang="en-US" dirty="0"/>
+              <a:t>problem (click 5 of 5)
+five quick clicks
+1 "Day zero: the first patients with fever reach the OPDs."
+2 "Only about a third get a lab test, days later."
+3 "The week closes and the report is compiled about three days after that."
+4 "And only 75% of those weekly reports even arrive (NIH Pakistan, 2025)."
+5 "So the district notices around day 17 (median, in our simulation). In Sindh last year, 819 dengue cases were reported officially while hospitals and labs saw over 12,000 (Dawn)."
+If a doctor asks: you see the first fever patients on day zero; the system sees them weeks later.
+If a business judge asks: beds, kits and fogging are bought on the wrong number, too late.</a:t>
             </a:r>
             <a:endParaRPr lang="en-US" dirty="0"/>
           </a:p>
@@ -3554,6 +5619,419 @@
       </p:grpSpPr>
       <p:pic>
         <p:nvPicPr>
+          <p:cNvPr id="2" name="Image 0" descr="Priora deck: solution, step 1">    </p:cNvPr>
+          <p:cNvPicPr>
+            <a:picLocks noChangeAspect="1"/>
+          </p:cNvPicPr>
+          <p:nvPr/>
+        </p:nvPicPr>
+        <p:blipFill>
+          <a:blip r:embed="rId1"/>
+          <a:stretch>
+            <a:fillRect/>
+          </a:stretch>
+        </p:blipFill>
+        <p:spPr>
+          <a:xfrm>
+            <a:off x="0" y="0"/>
+            <a:ext cx="9144000" cy="5143500"/>
+          </a:xfrm>
+          <a:prstGeom prst="rect">
+            <a:avLst/>
+          </a:prstGeom>
+        </p:spPr>
+      </p:pic>
+    </p:spTree>
+  </p:cSld>
+  <p:clrMapOvr>
+    <a:masterClrMapping/>
+  </p:clrMapOvr>
+  <p:transition spd="fast">
+    <p:fade/>
+  </p:transition>
+</p:sld>
+</file>
+
+<file path=ppt/slides/slide11.xml><?xml version="1.0" encoding="utf-8"?>
+<p:sld xmlns:a="http://schemas.openxmlformats.org/drawingml/2006/main" xmlns:r="http://schemas.openxmlformats.org/officeDocument/2006/relationships" xmlns:p="http://schemas.openxmlformats.org/presentationml/2006/main">
+  <p:cSld name="Slide 11">
+    <p:bg>
+      <p:bgPr>
+        <a:solidFill>
+          <a:srgbClr val="0B0B0B"/>
+        </a:solidFill>
+      </p:bgPr>
+    </p:bg>
+    <p:spTree>
+      <p:nvGrpSpPr>
+        <p:cNvPr id="1" name=""/>
+        <p:cNvGrpSpPr/>
+        <p:nvPr/>
+      </p:nvGrpSpPr>
+      <p:grpSpPr>
+        <a:xfrm>
+          <a:off x="0" y="0"/>
+          <a:ext cx="0" cy="0"/>
+          <a:chOff x="0" y="0"/>
+          <a:chExt cx="0" cy="0"/>
+        </a:xfrm>
+      </p:grpSpPr>
+      <p:pic>
+        <p:nvPicPr>
+          <p:cNvPr id="2" name="Image 0" descr="Priora deck: solution, step 2">    </p:cNvPr>
+          <p:cNvPicPr>
+            <a:picLocks noChangeAspect="1"/>
+          </p:cNvPicPr>
+          <p:nvPr/>
+        </p:nvPicPr>
+        <p:blipFill>
+          <a:blip r:embed="rId1"/>
+          <a:stretch>
+            <a:fillRect/>
+          </a:stretch>
+        </p:blipFill>
+        <p:spPr>
+          <a:xfrm>
+            <a:off x="0" y="0"/>
+            <a:ext cx="9144000" cy="5143500"/>
+          </a:xfrm>
+          <a:prstGeom prst="rect">
+            <a:avLst/>
+          </a:prstGeom>
+        </p:spPr>
+      </p:pic>
+    </p:spTree>
+  </p:cSld>
+  <p:clrMapOvr>
+    <a:masterClrMapping/>
+  </p:clrMapOvr>
+  <p:transition spd="fast">
+    <p:fade/>
+  </p:transition>
+</p:sld>
+</file>
+
+<file path=ppt/slides/slide12.xml><?xml version="1.0" encoding="utf-8"?>
+<p:sld xmlns:a="http://schemas.openxmlformats.org/drawingml/2006/main" xmlns:r="http://schemas.openxmlformats.org/officeDocument/2006/relationships" xmlns:p="http://schemas.openxmlformats.org/presentationml/2006/main">
+  <p:cSld name="Slide 12">
+    <p:bg>
+      <p:bgPr>
+        <a:solidFill>
+          <a:srgbClr val="0B0B0B"/>
+        </a:solidFill>
+      </p:bgPr>
+    </p:bg>
+    <p:spTree>
+      <p:nvGrpSpPr>
+        <p:cNvPr id="1" name=""/>
+        <p:cNvGrpSpPr/>
+        <p:nvPr/>
+      </p:nvGrpSpPr>
+      <p:grpSpPr>
+        <a:xfrm>
+          <a:off x="0" y="0"/>
+          <a:ext cx="0" cy="0"/>
+          <a:chOff x="0" y="0"/>
+          <a:chExt cx="0" cy="0"/>
+        </a:xfrm>
+      </p:grpSpPr>
+      <p:pic>
+        <p:nvPicPr>
+          <p:cNvPr id="2" name="Image 0" descr="Priora deck: mvp, step 1">    </p:cNvPr>
+          <p:cNvPicPr>
+            <a:picLocks noChangeAspect="1"/>
+          </p:cNvPicPr>
+          <p:nvPr/>
+        </p:nvPicPr>
+        <p:blipFill>
+          <a:blip r:embed="rId1"/>
+          <a:stretch>
+            <a:fillRect/>
+          </a:stretch>
+        </p:blipFill>
+        <p:spPr>
+          <a:xfrm>
+            <a:off x="0" y="0"/>
+            <a:ext cx="9144000" cy="5143500"/>
+          </a:xfrm>
+          <a:prstGeom prst="rect">
+            <a:avLst/>
+          </a:prstGeom>
+        </p:spPr>
+      </p:pic>
+    </p:spTree>
+  </p:cSld>
+  <p:clrMapOvr>
+    <a:masterClrMapping/>
+  </p:clrMapOvr>
+  <p:transition spd="fast">
+    <p:fade/>
+  </p:transition>
+</p:sld>
+</file>
+
+<file path=ppt/slides/slide13.xml><?xml version="1.0" encoding="utf-8"?>
+<p:sld xmlns:a="http://schemas.openxmlformats.org/drawingml/2006/main" xmlns:r="http://schemas.openxmlformats.org/officeDocument/2006/relationships" xmlns:p="http://schemas.openxmlformats.org/presentationml/2006/main">
+  <p:cSld name="Slide 13">
+    <p:bg>
+      <p:bgPr>
+        <a:solidFill>
+          <a:srgbClr val="0B0B0B"/>
+        </a:solidFill>
+      </p:bgPr>
+    </p:bg>
+    <p:spTree>
+      <p:nvGrpSpPr>
+        <p:cNvPr id="1" name=""/>
+        <p:cNvGrpSpPr/>
+        <p:nvPr/>
+      </p:nvGrpSpPr>
+      <p:grpSpPr>
+        <a:xfrm>
+          <a:off x="0" y="0"/>
+          <a:ext cx="0" cy="0"/>
+          <a:chOff x="0" y="0"/>
+          <a:chExt cx="0" cy="0"/>
+        </a:xfrm>
+      </p:grpSpPr>
+      <p:pic>
+        <p:nvPicPr>
+          <p:cNvPr id="2" name="Image 0" descr="Priora deck: mvp, step 2">    </p:cNvPr>
+          <p:cNvPicPr>
+            <a:picLocks noChangeAspect="1"/>
+          </p:cNvPicPr>
+          <p:nvPr/>
+        </p:nvPicPr>
+        <p:blipFill>
+          <a:blip r:embed="rId1"/>
+          <a:stretch>
+            <a:fillRect/>
+          </a:stretch>
+        </p:blipFill>
+        <p:spPr>
+          <a:xfrm>
+            <a:off x="0" y="0"/>
+            <a:ext cx="9144000" cy="5143500"/>
+          </a:xfrm>
+          <a:prstGeom prst="rect">
+            <a:avLst/>
+          </a:prstGeom>
+        </p:spPr>
+      </p:pic>
+    </p:spTree>
+  </p:cSld>
+  <p:clrMapOvr>
+    <a:masterClrMapping/>
+  </p:clrMapOvr>
+  <p:transition spd="fast">
+    <p:fade/>
+  </p:transition>
+</p:sld>
+</file>
+
+<file path=ppt/slides/slide14.xml><?xml version="1.0" encoding="utf-8"?>
+<p:sld xmlns:a="http://schemas.openxmlformats.org/drawingml/2006/main" xmlns:r="http://schemas.openxmlformats.org/officeDocument/2006/relationships" xmlns:p="http://schemas.openxmlformats.org/presentationml/2006/main">
+  <p:cSld name="Slide 14">
+    <p:bg>
+      <p:bgPr>
+        <a:solidFill>
+          <a:srgbClr val="0B0B0B"/>
+        </a:solidFill>
+      </p:bgPr>
+    </p:bg>
+    <p:spTree>
+      <p:nvGrpSpPr>
+        <p:cNvPr id="1" name=""/>
+        <p:cNvGrpSpPr/>
+        <p:nvPr/>
+      </p:nvGrpSpPr>
+      <p:grpSpPr>
+        <a:xfrm>
+          <a:off x="0" y="0"/>
+          <a:ext cx="0" cy="0"/>
+          <a:chOff x="0" y="0"/>
+          <a:chExt cx="0" cy="0"/>
+        </a:xfrm>
+      </p:grpSpPr>
+      <p:pic>
+        <p:nvPicPr>
+          <p:cNvPr id="2" name="Image 0" descr="Priora deck: mvp, step 3">    </p:cNvPr>
+          <p:cNvPicPr>
+            <a:picLocks noChangeAspect="1"/>
+          </p:cNvPicPr>
+          <p:nvPr/>
+        </p:nvPicPr>
+        <p:blipFill>
+          <a:blip r:embed="rId1"/>
+          <a:stretch>
+            <a:fillRect/>
+          </a:stretch>
+        </p:blipFill>
+        <p:spPr>
+          <a:xfrm>
+            <a:off x="0" y="0"/>
+            <a:ext cx="9144000" cy="5143500"/>
+          </a:xfrm>
+          <a:prstGeom prst="rect">
+            <a:avLst/>
+          </a:prstGeom>
+        </p:spPr>
+      </p:pic>
+    </p:spTree>
+  </p:cSld>
+  <p:clrMapOvr>
+    <a:masterClrMapping/>
+  </p:clrMapOvr>
+  <p:transition spd="fast">
+    <p:fade/>
+  </p:transition>
+</p:sld>
+</file>
+
+<file path=ppt/slides/slide15.xml><?xml version="1.0" encoding="utf-8"?>
+<p:sld xmlns:a="http://schemas.openxmlformats.org/drawingml/2006/main" xmlns:r="http://schemas.openxmlformats.org/officeDocument/2006/relationships" xmlns:p="http://schemas.openxmlformats.org/presentationml/2006/main">
+  <p:cSld name="Slide 15">
+    <p:bg>
+      <p:bgPr>
+        <a:solidFill>
+          <a:srgbClr val="0B0B0B"/>
+        </a:solidFill>
+      </p:bgPr>
+    </p:bg>
+    <p:spTree>
+      <p:nvGrpSpPr>
+        <p:cNvPr id="1" name=""/>
+        <p:cNvGrpSpPr/>
+        <p:nvPr/>
+      </p:nvGrpSpPr>
+      <p:grpSpPr>
+        <a:xfrm>
+          <a:off x="0" y="0"/>
+          <a:ext cx="0" cy="0"/>
+          <a:chOff x="0" y="0"/>
+          <a:chExt cx="0" cy="0"/>
+        </a:xfrm>
+      </p:grpSpPr>
+      <p:pic>
+        <p:nvPicPr>
+          <p:cNvPr id="2" name="Image 0" descr="Priora deck: mvp, step 4">    </p:cNvPr>
+          <p:cNvPicPr>
+            <a:picLocks noChangeAspect="1"/>
+          </p:cNvPicPr>
+          <p:nvPr/>
+        </p:nvPicPr>
+        <p:blipFill>
+          <a:blip r:embed="rId1"/>
+          <a:stretch>
+            <a:fillRect/>
+          </a:stretch>
+        </p:blipFill>
+        <p:spPr>
+          <a:xfrm>
+            <a:off x="0" y="0"/>
+            <a:ext cx="9144000" cy="5143500"/>
+          </a:xfrm>
+          <a:prstGeom prst="rect">
+            <a:avLst/>
+          </a:prstGeom>
+        </p:spPr>
+      </p:pic>
+    </p:spTree>
+  </p:cSld>
+  <p:clrMapOvr>
+    <a:masterClrMapping/>
+  </p:clrMapOvr>
+  <p:transition spd="fast">
+    <p:fade/>
+  </p:transition>
+</p:sld>
+</file>
+
+<file path=ppt/slides/slide16.xml><?xml version="1.0" encoding="utf-8"?>
+<p:sld xmlns:a="http://schemas.openxmlformats.org/drawingml/2006/main" xmlns:r="http://schemas.openxmlformats.org/officeDocument/2006/relationships" xmlns:p="http://schemas.openxmlformats.org/presentationml/2006/main">
+  <p:cSld name="Slide 16">
+    <p:bg>
+      <p:bgPr>
+        <a:solidFill>
+          <a:srgbClr val="0B0B0B"/>
+        </a:solidFill>
+      </p:bgPr>
+    </p:bg>
+    <p:spTree>
+      <p:nvGrpSpPr>
+        <p:cNvPr id="1" name=""/>
+        <p:cNvGrpSpPr/>
+        <p:nvPr/>
+      </p:nvGrpSpPr>
+      <p:grpSpPr>
+        <a:xfrm>
+          <a:off x="0" y="0"/>
+          <a:ext cx="0" cy="0"/>
+          <a:chOff x="0" y="0"/>
+          <a:chExt cx="0" cy="0"/>
+        </a:xfrm>
+      </p:grpSpPr>
+      <p:pic>
+        <p:nvPicPr>
+          <p:cNvPr id="2" name="Image 0" descr="Priora deck: pipeline, step 1">    </p:cNvPr>
+          <p:cNvPicPr>
+            <a:picLocks noChangeAspect="1"/>
+          </p:cNvPicPr>
+          <p:nvPr/>
+        </p:nvPicPr>
+        <p:blipFill>
+          <a:blip r:embed="rId1"/>
+          <a:stretch>
+            <a:fillRect/>
+          </a:stretch>
+        </p:blipFill>
+        <p:spPr>
+          <a:xfrm>
+            <a:off x="0" y="0"/>
+            <a:ext cx="9144000" cy="5143500"/>
+          </a:xfrm>
+          <a:prstGeom prst="rect">
+            <a:avLst/>
+          </a:prstGeom>
+        </p:spPr>
+      </p:pic>
+    </p:spTree>
+  </p:cSld>
+  <p:clrMapOvr>
+    <a:masterClrMapping/>
+  </p:clrMapOvr>
+  <p:transition spd="fast">
+    <p:fade/>
+  </p:transition>
+</p:sld>
+</file>
+
+<file path=ppt/slides/slide17.xml><?xml version="1.0" encoding="utf-8"?>
+<p:sld xmlns:a="http://schemas.openxmlformats.org/drawingml/2006/main" xmlns:r="http://schemas.openxmlformats.org/officeDocument/2006/relationships" xmlns:p="http://schemas.openxmlformats.org/presentationml/2006/main">
+  <p:cSld name="Slide 17">
+    <p:bg>
+      <p:bgPr>
+        <a:solidFill>
+          <a:srgbClr val="0B0B0B"/>
+        </a:solidFill>
+      </p:bgPr>
+    </p:bg>
+    <p:spTree>
+      <p:nvGrpSpPr>
+        <p:cNvPr id="1" name=""/>
+        <p:cNvGrpSpPr/>
+        <p:nvPr/>
+      </p:nvGrpSpPr>
+      <p:grpSpPr>
+        <a:xfrm>
+          <a:off x="0" y="0"/>
+          <a:ext cx="0" cy="0"/>
+          <a:chOff x="0" y="0"/>
+          <a:chExt cx="0" cy="0"/>
+        </a:xfrm>
+      </p:grpSpPr>
+      <p:pic>
+        <p:nvPicPr>
           <p:cNvPr id="2" name="Image 0" descr="Priora deck: pipeline, step 2">    </p:cNvPr>
           <p:cNvPicPr>
             <a:picLocks noChangeAspect="1"/>
@@ -3587,9 +6065,9 @@
 </p:sld>
 </file>
 
-<file path=ppt/slides/slide11.xml><?xml version="1.0" encoding="utf-8"?>
+<file path=ppt/slides/slide18.xml><?xml version="1.0" encoding="utf-8"?>
 <p:sld xmlns:a="http://schemas.openxmlformats.org/drawingml/2006/main" xmlns:r="http://schemas.openxmlformats.org/officeDocument/2006/relationships" xmlns:p="http://schemas.openxmlformats.org/presentationml/2006/main">
-  <p:cSld name="Slide 11">
+  <p:cSld name="Slide 18">
     <p:bg>
       <p:bgPr>
         <a:solidFill>
@@ -3646,9 +6124,9 @@
 </p:sld>
 </file>
 
-<file path=ppt/slides/slide12.xml><?xml version="1.0" encoding="utf-8"?>
+<file path=ppt/slides/slide19.xml><?xml version="1.0" encoding="utf-8"?>
 <p:sld xmlns:a="http://schemas.openxmlformats.org/drawingml/2006/main" xmlns:r="http://schemas.openxmlformats.org/officeDocument/2006/relationships" xmlns:p="http://schemas.openxmlformats.org/presentationml/2006/main">
-  <p:cSld name="Slide 12">
+  <p:cSld name="Slide 19">
     <p:bg>
       <p:bgPr>
         <a:solidFill>
@@ -3705,9 +6183,68 @@
 </p:sld>
 </file>
 
-<file path=ppt/slides/slide13.xml><?xml version="1.0" encoding="utf-8"?>
+<file path=ppt/slides/slide2.xml><?xml version="1.0" encoding="utf-8"?>
 <p:sld xmlns:a="http://schemas.openxmlformats.org/drawingml/2006/main" xmlns:r="http://schemas.openxmlformats.org/officeDocument/2006/relationships" xmlns:p="http://schemas.openxmlformats.org/presentationml/2006/main">
-  <p:cSld name="Slide 13">
+  <p:cSld name="Slide 2">
+    <p:bg>
+      <p:bgPr>
+        <a:solidFill>
+          <a:srgbClr val="0B0B0B"/>
+        </a:solidFill>
+      </p:bgPr>
+    </p:bg>
+    <p:spTree>
+      <p:nvGrpSpPr>
+        <p:cNvPr id="1" name=""/>
+        <p:cNvGrpSpPr/>
+        <p:nvPr/>
+      </p:nvGrpSpPr>
+      <p:grpSpPr>
+        <a:xfrm>
+          <a:off x="0" y="0"/>
+          <a:ext cx="0" cy="0"/>
+          <a:chOff x="0" y="0"/>
+          <a:chExt cx="0" cy="0"/>
+        </a:xfrm>
+      </p:grpSpPr>
+      <p:pic>
+        <p:nvPicPr>
+          <p:cNvPr id="2" name="Image 0" descr="Priora deck: problem-statement, step 1">    </p:cNvPr>
+          <p:cNvPicPr>
+            <a:picLocks noChangeAspect="1"/>
+          </p:cNvPicPr>
+          <p:nvPr/>
+        </p:nvPicPr>
+        <p:blipFill>
+          <a:blip r:embed="rId1"/>
+          <a:stretch>
+            <a:fillRect/>
+          </a:stretch>
+        </p:blipFill>
+        <p:spPr>
+          <a:xfrm>
+            <a:off x="0" y="0"/>
+            <a:ext cx="9144000" cy="5143500"/>
+          </a:xfrm>
+          <a:prstGeom prst="rect">
+            <a:avLst/>
+          </a:prstGeom>
+        </p:spPr>
+      </p:pic>
+    </p:spTree>
+  </p:cSld>
+  <p:clrMapOvr>
+    <a:masterClrMapping/>
+  </p:clrMapOvr>
+  <p:transition spd="fast">
+    <p:fade/>
+  </p:transition>
+</p:sld>
+</file>
+
+<file path=ppt/slides/slide20.xml><?xml version="1.0" encoding="utf-8"?>
+<p:sld xmlns:a="http://schemas.openxmlformats.org/drawingml/2006/main" xmlns:r="http://schemas.openxmlformats.org/officeDocument/2006/relationships" xmlns:p="http://schemas.openxmlformats.org/presentationml/2006/main">
+  <p:cSld name="Slide 20">
     <p:bg>
       <p:bgPr>
         <a:solidFill>
@@ -3764,9 +6301,9 @@
 </p:sld>
 </file>
 
-<file path=ppt/slides/slide14.xml><?xml version="1.0" encoding="utf-8"?>
+<file path=ppt/slides/slide21.xml><?xml version="1.0" encoding="utf-8"?>
 <p:sld xmlns:a="http://schemas.openxmlformats.org/drawingml/2006/main" xmlns:r="http://schemas.openxmlformats.org/officeDocument/2006/relationships" xmlns:p="http://schemas.openxmlformats.org/presentationml/2006/main">
-  <p:cSld name="Slide 14">
+  <p:cSld name="Slide 21">
     <p:bg>
       <p:bgPr>
         <a:solidFill>
@@ -3823,9 +6360,9 @@
 </p:sld>
 </file>
 
-<file path=ppt/slides/slide15.xml><?xml version="1.0" encoding="utf-8"?>
+<file path=ppt/slides/slide22.xml><?xml version="1.0" encoding="utf-8"?>
 <p:sld xmlns:a="http://schemas.openxmlformats.org/drawingml/2006/main" xmlns:r="http://schemas.openxmlformats.org/officeDocument/2006/relationships" xmlns:p="http://schemas.openxmlformats.org/presentationml/2006/main">
-  <p:cSld name="Slide 15">
+  <p:cSld name="Slide 22">
     <p:bg>
       <p:bgPr>
         <a:solidFill>
@@ -3882,9 +6419,9 @@
 </p:sld>
 </file>
 
-<file path=ppt/slides/slide16.xml><?xml version="1.0" encoding="utf-8"?>
+<file path=ppt/slides/slide23.xml><?xml version="1.0" encoding="utf-8"?>
 <p:sld xmlns:a="http://schemas.openxmlformats.org/drawingml/2006/main" xmlns:r="http://schemas.openxmlformats.org/officeDocument/2006/relationships" xmlns:p="http://schemas.openxmlformats.org/presentationml/2006/main">
-  <p:cSld name="Slide 16">
+  <p:cSld name="Slide 23">
     <p:bg>
       <p:bgPr>
         <a:solidFill>
@@ -3941,9 +6478,9 @@
 </p:sld>
 </file>
 
-<file path=ppt/slides/slide17.xml><?xml version="1.0" encoding="utf-8"?>
+<file path=ppt/slides/slide24.xml><?xml version="1.0" encoding="utf-8"?>
 <p:sld xmlns:a="http://schemas.openxmlformats.org/drawingml/2006/main" xmlns:r="http://schemas.openxmlformats.org/officeDocument/2006/relationships" xmlns:p="http://schemas.openxmlformats.org/presentationml/2006/main">
-  <p:cSld name="Slide 17">
+  <p:cSld name="Slide 24">
     <p:bg>
       <p:bgPr>
         <a:solidFill>
@@ -4000,9 +6537,9 @@
 </p:sld>
 </file>
 
-<file path=ppt/slides/slide18.xml><?xml version="1.0" encoding="utf-8"?>
+<file path=ppt/slides/slide25.xml><?xml version="1.0" encoding="utf-8"?>
 <p:sld xmlns:a="http://schemas.openxmlformats.org/drawingml/2006/main" xmlns:r="http://schemas.openxmlformats.org/officeDocument/2006/relationships" xmlns:p="http://schemas.openxmlformats.org/presentationml/2006/main">
-  <p:cSld name="Slide 18">
+  <p:cSld name="Slide 25">
     <p:bg>
       <p:bgPr>
         <a:solidFill>
@@ -4059,9 +6596,9 @@
 </p:sld>
 </file>
 
-<file path=ppt/slides/slide19.xml><?xml version="1.0" encoding="utf-8"?>
+<file path=ppt/slides/slide26.xml><?xml version="1.0" encoding="utf-8"?>
 <p:sld xmlns:a="http://schemas.openxmlformats.org/drawingml/2006/main" xmlns:r="http://schemas.openxmlformats.org/officeDocument/2006/relationships" xmlns:p="http://schemas.openxmlformats.org/presentationml/2006/main">
-  <p:cSld name="Slide 19">
+  <p:cSld name="Slide 26">
     <p:bg>
       <p:bgPr>
         <a:solidFill>
@@ -4118,9 +6655,1484 @@
 </p:sld>
 </file>
 
-<file path=ppt/slides/slide2.xml><?xml version="1.0" encoding="utf-8"?>
+<file path=ppt/slides/slide27.xml><?xml version="1.0" encoding="utf-8"?>
 <p:sld xmlns:a="http://schemas.openxmlformats.org/drawingml/2006/main" xmlns:r="http://schemas.openxmlformats.org/officeDocument/2006/relationships" xmlns:p="http://schemas.openxmlformats.org/presentationml/2006/main">
-  <p:cSld name="Slide 2">
+  <p:cSld name="Slide 27">
+    <p:bg>
+      <p:bgPr>
+        <a:solidFill>
+          <a:srgbClr val="0B0B0B"/>
+        </a:solidFill>
+      </p:bgPr>
+    </p:bg>
+    <p:spTree>
+      <p:nvGrpSpPr>
+        <p:cNvPr id="1" name=""/>
+        <p:cNvGrpSpPr/>
+        <p:nvPr/>
+      </p:nvGrpSpPr>
+      <p:grpSpPr>
+        <a:xfrm>
+          <a:off x="0" y="0"/>
+          <a:ext cx="0" cy="0"/>
+          <a:chOff x="0" y="0"/>
+          <a:chExt cx="0" cy="0"/>
+        </a:xfrm>
+      </p:grpSpPr>
+      <p:pic>
+        <p:nvPicPr>
+          <p:cNvPr id="2" name="Image 0" descr="Priora deck: pipeline, step 12">    </p:cNvPr>
+          <p:cNvPicPr>
+            <a:picLocks noChangeAspect="1"/>
+          </p:cNvPicPr>
+          <p:nvPr/>
+        </p:nvPicPr>
+        <p:blipFill>
+          <a:blip r:embed="rId1"/>
+          <a:stretch>
+            <a:fillRect/>
+          </a:stretch>
+        </p:blipFill>
+        <p:spPr>
+          <a:xfrm>
+            <a:off x="0" y="0"/>
+            <a:ext cx="9144000" cy="5143500"/>
+          </a:xfrm>
+          <a:prstGeom prst="rect">
+            <a:avLst/>
+          </a:prstGeom>
+        </p:spPr>
+      </p:pic>
+    </p:spTree>
+  </p:cSld>
+  <p:clrMapOvr>
+    <a:masterClrMapping/>
+  </p:clrMapOvr>
+  <p:transition spd="fast">
+    <p:fade/>
+  </p:transition>
+</p:sld>
+</file>
+
+<file path=ppt/slides/slide28.xml><?xml version="1.0" encoding="utf-8"?>
+<p:sld xmlns:a="http://schemas.openxmlformats.org/drawingml/2006/main" xmlns:r="http://schemas.openxmlformats.org/officeDocument/2006/relationships" xmlns:p="http://schemas.openxmlformats.org/presentationml/2006/main">
+  <p:cSld name="Slide 28">
+    <p:bg>
+      <p:bgPr>
+        <a:solidFill>
+          <a:srgbClr val="0B0B0B"/>
+        </a:solidFill>
+      </p:bgPr>
+    </p:bg>
+    <p:spTree>
+      <p:nvGrpSpPr>
+        <p:cNvPr id="1" name=""/>
+        <p:cNvGrpSpPr/>
+        <p:nvPr/>
+      </p:nvGrpSpPr>
+      <p:grpSpPr>
+        <a:xfrm>
+          <a:off x="0" y="0"/>
+          <a:ext cx="0" cy="0"/>
+          <a:chOff x="0" y="0"/>
+          <a:chExt cx="0" cy="0"/>
+        </a:xfrm>
+      </p:grpSpPr>
+      <p:pic>
+        <p:nvPicPr>
+          <p:cNvPr id="2" name="Image 0" descr="Priora deck: pipeline, step 13">    </p:cNvPr>
+          <p:cNvPicPr>
+            <a:picLocks noChangeAspect="1"/>
+          </p:cNvPicPr>
+          <p:nvPr/>
+        </p:nvPicPr>
+        <p:blipFill>
+          <a:blip r:embed="rId1"/>
+          <a:stretch>
+            <a:fillRect/>
+          </a:stretch>
+        </p:blipFill>
+        <p:spPr>
+          <a:xfrm>
+            <a:off x="0" y="0"/>
+            <a:ext cx="9144000" cy="5143500"/>
+          </a:xfrm>
+          <a:prstGeom prst="rect">
+            <a:avLst/>
+          </a:prstGeom>
+        </p:spPr>
+      </p:pic>
+    </p:spTree>
+  </p:cSld>
+  <p:clrMapOvr>
+    <a:masterClrMapping/>
+  </p:clrMapOvr>
+  <p:transition spd="fast">
+    <p:fade/>
+  </p:transition>
+</p:sld>
+</file>
+
+<file path=ppt/slides/slide29.xml><?xml version="1.0" encoding="utf-8"?>
+<p:sld xmlns:a="http://schemas.openxmlformats.org/drawingml/2006/main" xmlns:r="http://schemas.openxmlformats.org/officeDocument/2006/relationships" xmlns:p="http://schemas.openxmlformats.org/presentationml/2006/main">
+  <p:cSld name="Slide 29">
+    <p:bg>
+      <p:bgPr>
+        <a:solidFill>
+          <a:srgbClr val="0B0B0B"/>
+        </a:solidFill>
+      </p:bgPr>
+    </p:bg>
+    <p:spTree>
+      <p:nvGrpSpPr>
+        <p:cNvPr id="1" name=""/>
+        <p:cNvGrpSpPr/>
+        <p:nvPr/>
+      </p:nvGrpSpPr>
+      <p:grpSpPr>
+        <a:xfrm>
+          <a:off x="0" y="0"/>
+          <a:ext cx="0" cy="0"/>
+          <a:chOff x="0" y="0"/>
+          <a:chExt cx="0" cy="0"/>
+        </a:xfrm>
+      </p:grpSpPr>
+      <p:pic>
+        <p:nvPicPr>
+          <p:cNvPr id="2" name="Image 0" descr="Priora deck: pipeline, step 14">    </p:cNvPr>
+          <p:cNvPicPr>
+            <a:picLocks noChangeAspect="1"/>
+          </p:cNvPicPr>
+          <p:nvPr/>
+        </p:nvPicPr>
+        <p:blipFill>
+          <a:blip r:embed="rId1"/>
+          <a:stretch>
+            <a:fillRect/>
+          </a:stretch>
+        </p:blipFill>
+        <p:spPr>
+          <a:xfrm>
+            <a:off x="0" y="0"/>
+            <a:ext cx="9144000" cy="5143500"/>
+          </a:xfrm>
+          <a:prstGeom prst="rect">
+            <a:avLst/>
+          </a:prstGeom>
+        </p:spPr>
+      </p:pic>
+    </p:spTree>
+  </p:cSld>
+  <p:clrMapOvr>
+    <a:masterClrMapping/>
+  </p:clrMapOvr>
+  <p:transition spd="fast">
+    <p:fade/>
+  </p:transition>
+</p:sld>
+</file>
+
+<file path=ppt/slides/slide3.xml><?xml version="1.0" encoding="utf-8"?>
+<p:sld xmlns:a="http://schemas.openxmlformats.org/drawingml/2006/main" xmlns:r="http://schemas.openxmlformats.org/officeDocument/2006/relationships" xmlns:p="http://schemas.openxmlformats.org/presentationml/2006/main">
+  <p:cSld name="Slide 3">
+    <p:bg>
+      <p:bgPr>
+        <a:solidFill>
+          <a:srgbClr val="0B0B0B"/>
+        </a:solidFill>
+      </p:bgPr>
+    </p:bg>
+    <p:spTree>
+      <p:nvGrpSpPr>
+        <p:cNvPr id="1" name=""/>
+        <p:cNvGrpSpPr/>
+        <p:nvPr/>
+      </p:nvGrpSpPr>
+      <p:grpSpPr>
+        <a:xfrm>
+          <a:off x="0" y="0"/>
+          <a:ext cx="0" cy="0"/>
+          <a:chOff x="0" y="0"/>
+          <a:chExt cx="0" cy="0"/>
+        </a:xfrm>
+      </p:grpSpPr>
+      <p:pic>
+        <p:nvPicPr>
+          <p:cNvPr id="2" name="Image 0" descr="Priora deck: problem-statement, step 2">    </p:cNvPr>
+          <p:cNvPicPr>
+            <a:picLocks noChangeAspect="1"/>
+          </p:cNvPicPr>
+          <p:nvPr/>
+        </p:nvPicPr>
+        <p:blipFill>
+          <a:blip r:embed="rId1"/>
+          <a:stretch>
+            <a:fillRect/>
+          </a:stretch>
+        </p:blipFill>
+        <p:spPr>
+          <a:xfrm>
+            <a:off x="0" y="0"/>
+            <a:ext cx="9144000" cy="5143500"/>
+          </a:xfrm>
+          <a:prstGeom prst="rect">
+            <a:avLst/>
+          </a:prstGeom>
+        </p:spPr>
+      </p:pic>
+    </p:spTree>
+  </p:cSld>
+  <p:clrMapOvr>
+    <a:masterClrMapping/>
+  </p:clrMapOvr>
+  <p:transition spd="fast">
+    <p:fade/>
+  </p:transition>
+</p:sld>
+</file>
+
+<file path=ppt/slides/slide30.xml><?xml version="1.0" encoding="utf-8"?>
+<p:sld xmlns:a="http://schemas.openxmlformats.org/drawingml/2006/main" xmlns:r="http://schemas.openxmlformats.org/officeDocument/2006/relationships" xmlns:p="http://schemas.openxmlformats.org/presentationml/2006/main">
+  <p:cSld name="Slide 30">
+    <p:bg>
+      <p:bgPr>
+        <a:solidFill>
+          <a:srgbClr val="0B0B0B"/>
+        </a:solidFill>
+      </p:bgPr>
+    </p:bg>
+    <p:spTree>
+      <p:nvGrpSpPr>
+        <p:cNvPr id="1" name=""/>
+        <p:cNvGrpSpPr/>
+        <p:nvPr/>
+      </p:nvGrpSpPr>
+      <p:grpSpPr>
+        <a:xfrm>
+          <a:off x="0" y="0"/>
+          <a:ext cx="0" cy="0"/>
+          <a:chOff x="0" y="0"/>
+          <a:chExt cx="0" cy="0"/>
+        </a:xfrm>
+      </p:grpSpPr>
+      <p:pic>
+        <p:nvPicPr>
+          <p:cNvPr id="2" name="Image 0" descr="Priora deck: architecture, step 1">    </p:cNvPr>
+          <p:cNvPicPr>
+            <a:picLocks noChangeAspect="1"/>
+          </p:cNvPicPr>
+          <p:nvPr/>
+        </p:nvPicPr>
+        <p:blipFill>
+          <a:blip r:embed="rId1"/>
+          <a:stretch>
+            <a:fillRect/>
+          </a:stretch>
+        </p:blipFill>
+        <p:spPr>
+          <a:xfrm>
+            <a:off x="0" y="0"/>
+            <a:ext cx="9144000" cy="5143500"/>
+          </a:xfrm>
+          <a:prstGeom prst="rect">
+            <a:avLst/>
+          </a:prstGeom>
+        </p:spPr>
+      </p:pic>
+    </p:spTree>
+  </p:cSld>
+  <p:clrMapOvr>
+    <a:masterClrMapping/>
+  </p:clrMapOvr>
+  <p:transition spd="fast">
+    <p:fade/>
+  </p:transition>
+</p:sld>
+</file>
+
+<file path=ppt/slides/slide31.xml><?xml version="1.0" encoding="utf-8"?>
+<p:sld xmlns:a="http://schemas.openxmlformats.org/drawingml/2006/main" xmlns:r="http://schemas.openxmlformats.org/officeDocument/2006/relationships" xmlns:p="http://schemas.openxmlformats.org/presentationml/2006/main">
+  <p:cSld name="Slide 31">
+    <p:bg>
+      <p:bgPr>
+        <a:solidFill>
+          <a:srgbClr val="0B0B0B"/>
+        </a:solidFill>
+      </p:bgPr>
+    </p:bg>
+    <p:spTree>
+      <p:nvGrpSpPr>
+        <p:cNvPr id="1" name=""/>
+        <p:cNvGrpSpPr/>
+        <p:nvPr/>
+      </p:nvGrpSpPr>
+      <p:grpSpPr>
+        <a:xfrm>
+          <a:off x="0" y="0"/>
+          <a:ext cx="0" cy="0"/>
+          <a:chOff x="0" y="0"/>
+          <a:chExt cx="0" cy="0"/>
+        </a:xfrm>
+      </p:grpSpPr>
+      <p:pic>
+        <p:nvPicPr>
+          <p:cNvPr id="2" name="Image 0" descr="Priora deck: architecture, step 2">    </p:cNvPr>
+          <p:cNvPicPr>
+            <a:picLocks noChangeAspect="1"/>
+          </p:cNvPicPr>
+          <p:nvPr/>
+        </p:nvPicPr>
+        <p:blipFill>
+          <a:blip r:embed="rId1"/>
+          <a:stretch>
+            <a:fillRect/>
+          </a:stretch>
+        </p:blipFill>
+        <p:spPr>
+          <a:xfrm>
+            <a:off x="0" y="0"/>
+            <a:ext cx="9144000" cy="5143500"/>
+          </a:xfrm>
+          <a:prstGeom prst="rect">
+            <a:avLst/>
+          </a:prstGeom>
+        </p:spPr>
+      </p:pic>
+    </p:spTree>
+  </p:cSld>
+  <p:clrMapOvr>
+    <a:masterClrMapping/>
+  </p:clrMapOvr>
+  <p:transition spd="fast">
+    <p:fade/>
+  </p:transition>
+</p:sld>
+</file>
+
+<file path=ppt/slides/slide32.xml><?xml version="1.0" encoding="utf-8"?>
+<p:sld xmlns:a="http://schemas.openxmlformats.org/drawingml/2006/main" xmlns:r="http://schemas.openxmlformats.org/officeDocument/2006/relationships" xmlns:p="http://schemas.openxmlformats.org/presentationml/2006/main">
+  <p:cSld name="Slide 32">
+    <p:bg>
+      <p:bgPr>
+        <a:solidFill>
+          <a:srgbClr val="0B0B0B"/>
+        </a:solidFill>
+      </p:bgPr>
+    </p:bg>
+    <p:spTree>
+      <p:nvGrpSpPr>
+        <p:cNvPr id="1" name=""/>
+        <p:cNvGrpSpPr/>
+        <p:nvPr/>
+      </p:nvGrpSpPr>
+      <p:grpSpPr>
+        <a:xfrm>
+          <a:off x="0" y="0"/>
+          <a:ext cx="0" cy="0"/>
+          <a:chOff x="0" y="0"/>
+          <a:chExt cx="0" cy="0"/>
+        </a:xfrm>
+      </p:grpSpPr>
+      <p:pic>
+        <p:nvPicPr>
+          <p:cNvPr id="2" name="Image 0" descr="Priora deck: architecture, step 3">    </p:cNvPr>
+          <p:cNvPicPr>
+            <a:picLocks noChangeAspect="1"/>
+          </p:cNvPicPr>
+          <p:nvPr/>
+        </p:nvPicPr>
+        <p:blipFill>
+          <a:blip r:embed="rId1"/>
+          <a:stretch>
+            <a:fillRect/>
+          </a:stretch>
+        </p:blipFill>
+        <p:spPr>
+          <a:xfrm>
+            <a:off x="0" y="0"/>
+            <a:ext cx="9144000" cy="5143500"/>
+          </a:xfrm>
+          <a:prstGeom prst="rect">
+            <a:avLst/>
+          </a:prstGeom>
+        </p:spPr>
+      </p:pic>
+    </p:spTree>
+  </p:cSld>
+  <p:clrMapOvr>
+    <a:masterClrMapping/>
+  </p:clrMapOvr>
+  <p:transition spd="fast">
+    <p:fade/>
+  </p:transition>
+</p:sld>
+</file>
+
+<file path=ppt/slides/slide33.xml><?xml version="1.0" encoding="utf-8"?>
+<p:sld xmlns:a="http://schemas.openxmlformats.org/drawingml/2006/main" xmlns:r="http://schemas.openxmlformats.org/officeDocument/2006/relationships" xmlns:p="http://schemas.openxmlformats.org/presentationml/2006/main">
+  <p:cSld name="Slide 33">
+    <p:bg>
+      <p:bgPr>
+        <a:solidFill>
+          <a:srgbClr val="0B0B0B"/>
+        </a:solidFill>
+      </p:bgPr>
+    </p:bg>
+    <p:spTree>
+      <p:nvGrpSpPr>
+        <p:cNvPr id="1" name=""/>
+        <p:cNvGrpSpPr/>
+        <p:nvPr/>
+      </p:nvGrpSpPr>
+      <p:grpSpPr>
+        <a:xfrm>
+          <a:off x="0" y="0"/>
+          <a:ext cx="0" cy="0"/>
+          <a:chOff x="0" y="0"/>
+          <a:chExt cx="0" cy="0"/>
+        </a:xfrm>
+      </p:grpSpPr>
+      <p:pic>
+        <p:nvPicPr>
+          <p:cNvPr id="2" name="Image 0" descr="Priora deck: architecture, step 4">    </p:cNvPr>
+          <p:cNvPicPr>
+            <a:picLocks noChangeAspect="1"/>
+          </p:cNvPicPr>
+          <p:nvPr/>
+        </p:nvPicPr>
+        <p:blipFill>
+          <a:blip r:embed="rId1"/>
+          <a:stretch>
+            <a:fillRect/>
+          </a:stretch>
+        </p:blipFill>
+        <p:spPr>
+          <a:xfrm>
+            <a:off x="0" y="0"/>
+            <a:ext cx="9144000" cy="5143500"/>
+          </a:xfrm>
+          <a:prstGeom prst="rect">
+            <a:avLst/>
+          </a:prstGeom>
+        </p:spPr>
+      </p:pic>
+    </p:spTree>
+  </p:cSld>
+  <p:clrMapOvr>
+    <a:masterClrMapping/>
+  </p:clrMapOvr>
+  <p:transition spd="fast">
+    <p:fade/>
+  </p:transition>
+</p:sld>
+</file>
+
+<file path=ppt/slides/slide34.xml><?xml version="1.0" encoding="utf-8"?>
+<p:sld xmlns:a="http://schemas.openxmlformats.org/drawingml/2006/main" xmlns:r="http://schemas.openxmlformats.org/officeDocument/2006/relationships" xmlns:p="http://schemas.openxmlformats.org/presentationml/2006/main">
+  <p:cSld name="Slide 34">
+    <p:bg>
+      <p:bgPr>
+        <a:solidFill>
+          <a:srgbClr val="0B0B0B"/>
+        </a:solidFill>
+      </p:bgPr>
+    </p:bg>
+    <p:spTree>
+      <p:nvGrpSpPr>
+        <p:cNvPr id="1" name=""/>
+        <p:cNvGrpSpPr/>
+        <p:nvPr/>
+      </p:nvGrpSpPr>
+      <p:grpSpPr>
+        <a:xfrm>
+          <a:off x="0" y="0"/>
+          <a:ext cx="0" cy="0"/>
+          <a:chOff x="0" y="0"/>
+          <a:chExt cx="0" cy="0"/>
+        </a:xfrm>
+      </p:grpSpPr>
+      <p:pic>
+        <p:nvPicPr>
+          <p:cNvPr id="2" name="Image 0" descr="Priora deck: ai-depth, step 1">    </p:cNvPr>
+          <p:cNvPicPr>
+            <a:picLocks noChangeAspect="1"/>
+          </p:cNvPicPr>
+          <p:nvPr/>
+        </p:nvPicPr>
+        <p:blipFill>
+          <a:blip r:embed="rId1"/>
+          <a:stretch>
+            <a:fillRect/>
+          </a:stretch>
+        </p:blipFill>
+        <p:spPr>
+          <a:xfrm>
+            <a:off x="0" y="0"/>
+            <a:ext cx="9144000" cy="5143500"/>
+          </a:xfrm>
+          <a:prstGeom prst="rect">
+            <a:avLst/>
+          </a:prstGeom>
+        </p:spPr>
+      </p:pic>
+    </p:spTree>
+  </p:cSld>
+  <p:clrMapOvr>
+    <a:masterClrMapping/>
+  </p:clrMapOvr>
+  <p:transition spd="fast">
+    <p:fade/>
+  </p:transition>
+</p:sld>
+</file>
+
+<file path=ppt/slides/slide35.xml><?xml version="1.0" encoding="utf-8"?>
+<p:sld xmlns:a="http://schemas.openxmlformats.org/drawingml/2006/main" xmlns:r="http://schemas.openxmlformats.org/officeDocument/2006/relationships" xmlns:p="http://schemas.openxmlformats.org/presentationml/2006/main">
+  <p:cSld name="Slide 35">
+    <p:bg>
+      <p:bgPr>
+        <a:solidFill>
+          <a:srgbClr val="0B0B0B"/>
+        </a:solidFill>
+      </p:bgPr>
+    </p:bg>
+    <p:spTree>
+      <p:nvGrpSpPr>
+        <p:cNvPr id="1" name=""/>
+        <p:cNvGrpSpPr/>
+        <p:nvPr/>
+      </p:nvGrpSpPr>
+      <p:grpSpPr>
+        <a:xfrm>
+          <a:off x="0" y="0"/>
+          <a:ext cx="0" cy="0"/>
+          <a:chOff x="0" y="0"/>
+          <a:chExt cx="0" cy="0"/>
+        </a:xfrm>
+      </p:grpSpPr>
+      <p:pic>
+        <p:nvPicPr>
+          <p:cNvPr id="2" name="Image 0" descr="Priora deck: ai-depth, step 2">    </p:cNvPr>
+          <p:cNvPicPr>
+            <a:picLocks noChangeAspect="1"/>
+          </p:cNvPicPr>
+          <p:nvPr/>
+        </p:nvPicPr>
+        <p:blipFill>
+          <a:blip r:embed="rId1"/>
+          <a:stretch>
+            <a:fillRect/>
+          </a:stretch>
+        </p:blipFill>
+        <p:spPr>
+          <a:xfrm>
+            <a:off x="0" y="0"/>
+            <a:ext cx="9144000" cy="5143500"/>
+          </a:xfrm>
+          <a:prstGeom prst="rect">
+            <a:avLst/>
+          </a:prstGeom>
+        </p:spPr>
+      </p:pic>
+    </p:spTree>
+  </p:cSld>
+  <p:clrMapOvr>
+    <a:masterClrMapping/>
+  </p:clrMapOvr>
+  <p:transition spd="fast">
+    <p:fade/>
+  </p:transition>
+</p:sld>
+</file>
+
+<file path=ppt/slides/slide36.xml><?xml version="1.0" encoding="utf-8"?>
+<p:sld xmlns:a="http://schemas.openxmlformats.org/drawingml/2006/main" xmlns:r="http://schemas.openxmlformats.org/officeDocument/2006/relationships" xmlns:p="http://schemas.openxmlformats.org/presentationml/2006/main">
+  <p:cSld name="Slide 36">
+    <p:bg>
+      <p:bgPr>
+        <a:solidFill>
+          <a:srgbClr val="0B0B0B"/>
+        </a:solidFill>
+      </p:bgPr>
+    </p:bg>
+    <p:spTree>
+      <p:nvGrpSpPr>
+        <p:cNvPr id="1" name=""/>
+        <p:cNvGrpSpPr/>
+        <p:nvPr/>
+      </p:nvGrpSpPr>
+      <p:grpSpPr>
+        <a:xfrm>
+          <a:off x="0" y="0"/>
+          <a:ext cx="0" cy="0"/>
+          <a:chOff x="0" y="0"/>
+          <a:chExt cx="0" cy="0"/>
+        </a:xfrm>
+      </p:grpSpPr>
+      <p:pic>
+        <p:nvPicPr>
+          <p:cNvPr id="2" name="Image 0" descr="Priora deck: ai-depth, step 3">    </p:cNvPr>
+          <p:cNvPicPr>
+            <a:picLocks noChangeAspect="1"/>
+          </p:cNvPicPr>
+          <p:nvPr/>
+        </p:nvPicPr>
+        <p:blipFill>
+          <a:blip r:embed="rId1"/>
+          <a:stretch>
+            <a:fillRect/>
+          </a:stretch>
+        </p:blipFill>
+        <p:spPr>
+          <a:xfrm>
+            <a:off x="0" y="0"/>
+            <a:ext cx="9144000" cy="5143500"/>
+          </a:xfrm>
+          <a:prstGeom prst="rect">
+            <a:avLst/>
+          </a:prstGeom>
+        </p:spPr>
+      </p:pic>
+    </p:spTree>
+  </p:cSld>
+  <p:clrMapOvr>
+    <a:masterClrMapping/>
+  </p:clrMapOvr>
+  <p:transition spd="fast">
+    <p:fade/>
+  </p:transition>
+</p:sld>
+</file>
+
+<file path=ppt/slides/slide37.xml><?xml version="1.0" encoding="utf-8"?>
+<p:sld xmlns:a="http://schemas.openxmlformats.org/drawingml/2006/main" xmlns:r="http://schemas.openxmlformats.org/officeDocument/2006/relationships" xmlns:p="http://schemas.openxmlformats.org/presentationml/2006/main">
+  <p:cSld name="Slide 37">
+    <p:bg>
+      <p:bgPr>
+        <a:solidFill>
+          <a:srgbClr val="0B0B0B"/>
+        </a:solidFill>
+      </p:bgPr>
+    </p:bg>
+    <p:spTree>
+      <p:nvGrpSpPr>
+        <p:cNvPr id="1" name=""/>
+        <p:cNvGrpSpPr/>
+        <p:nvPr/>
+      </p:nvGrpSpPr>
+      <p:grpSpPr>
+        <a:xfrm>
+          <a:off x="0" y="0"/>
+          <a:ext cx="0" cy="0"/>
+          <a:chOff x="0" y="0"/>
+          <a:chExt cx="0" cy="0"/>
+        </a:xfrm>
+      </p:grpSpPr>
+      <p:pic>
+        <p:nvPicPr>
+          <p:cNvPr id="2" name="Image 0" descr="Priora deck: ai-depth, step 4">    </p:cNvPr>
+          <p:cNvPicPr>
+            <a:picLocks noChangeAspect="1"/>
+          </p:cNvPicPr>
+          <p:nvPr/>
+        </p:nvPicPr>
+        <p:blipFill>
+          <a:blip r:embed="rId1"/>
+          <a:stretch>
+            <a:fillRect/>
+          </a:stretch>
+        </p:blipFill>
+        <p:spPr>
+          <a:xfrm>
+            <a:off x="0" y="0"/>
+            <a:ext cx="9144000" cy="5143500"/>
+          </a:xfrm>
+          <a:prstGeom prst="rect">
+            <a:avLst/>
+          </a:prstGeom>
+        </p:spPr>
+      </p:pic>
+    </p:spTree>
+  </p:cSld>
+  <p:clrMapOvr>
+    <a:masterClrMapping/>
+  </p:clrMapOvr>
+  <p:transition spd="fast">
+    <p:fade/>
+  </p:transition>
+</p:sld>
+</file>
+
+<file path=ppt/slides/slide38.xml><?xml version="1.0" encoding="utf-8"?>
+<p:sld xmlns:a="http://schemas.openxmlformats.org/drawingml/2006/main" xmlns:r="http://schemas.openxmlformats.org/officeDocument/2006/relationships" xmlns:p="http://schemas.openxmlformats.org/presentationml/2006/main">
+  <p:cSld name="Slide 38">
+    <p:bg>
+      <p:bgPr>
+        <a:solidFill>
+          <a:srgbClr val="0B0B0B"/>
+        </a:solidFill>
+      </p:bgPr>
+    </p:bg>
+    <p:spTree>
+      <p:nvGrpSpPr>
+        <p:cNvPr id="1" name=""/>
+        <p:cNvGrpSpPr/>
+        <p:nvPr/>
+      </p:nvGrpSpPr>
+      <p:grpSpPr>
+        <a:xfrm>
+          <a:off x="0" y="0"/>
+          <a:ext cx="0" cy="0"/>
+          <a:chOff x="0" y="0"/>
+          <a:chExt cx="0" cy="0"/>
+        </a:xfrm>
+      </p:grpSpPr>
+      <p:pic>
+        <p:nvPicPr>
+          <p:cNvPr id="2" name="Image 0" descr="Priora deck: ai-depth, step 5">    </p:cNvPr>
+          <p:cNvPicPr>
+            <a:picLocks noChangeAspect="1"/>
+          </p:cNvPicPr>
+          <p:nvPr/>
+        </p:nvPicPr>
+        <p:blipFill>
+          <a:blip r:embed="rId1"/>
+          <a:stretch>
+            <a:fillRect/>
+          </a:stretch>
+        </p:blipFill>
+        <p:spPr>
+          <a:xfrm>
+            <a:off x="0" y="0"/>
+            <a:ext cx="9144000" cy="5143500"/>
+          </a:xfrm>
+          <a:prstGeom prst="rect">
+            <a:avLst/>
+          </a:prstGeom>
+        </p:spPr>
+      </p:pic>
+    </p:spTree>
+  </p:cSld>
+  <p:clrMapOvr>
+    <a:masterClrMapping/>
+  </p:clrMapOvr>
+  <p:transition spd="fast">
+    <p:fade/>
+  </p:transition>
+</p:sld>
+</file>
+
+<file path=ppt/slides/slide39.xml><?xml version="1.0" encoding="utf-8"?>
+<p:sld xmlns:a="http://schemas.openxmlformats.org/drawingml/2006/main" xmlns:r="http://schemas.openxmlformats.org/officeDocument/2006/relationships" xmlns:p="http://schemas.openxmlformats.org/presentationml/2006/main">
+  <p:cSld name="Slide 39">
+    <p:bg>
+      <p:bgPr>
+        <a:solidFill>
+          <a:srgbClr val="0B0B0B"/>
+        </a:solidFill>
+      </p:bgPr>
+    </p:bg>
+    <p:spTree>
+      <p:nvGrpSpPr>
+        <p:cNvPr id="1" name=""/>
+        <p:cNvGrpSpPr/>
+        <p:nvPr/>
+      </p:nvGrpSpPr>
+      <p:grpSpPr>
+        <a:xfrm>
+          <a:off x="0" y="0"/>
+          <a:ext cx="0" cy="0"/>
+          <a:chOff x="0" y="0"/>
+          <a:chExt cx="0" cy="0"/>
+        </a:xfrm>
+      </p:grpSpPr>
+      <p:pic>
+        <p:nvPicPr>
+          <p:cNvPr id="2" name="Image 0" descr="Priora deck: ai-depth, step 6">    </p:cNvPr>
+          <p:cNvPicPr>
+            <a:picLocks noChangeAspect="1"/>
+          </p:cNvPicPr>
+          <p:nvPr/>
+        </p:nvPicPr>
+        <p:blipFill>
+          <a:blip r:embed="rId1"/>
+          <a:stretch>
+            <a:fillRect/>
+          </a:stretch>
+        </p:blipFill>
+        <p:spPr>
+          <a:xfrm>
+            <a:off x="0" y="0"/>
+            <a:ext cx="9144000" cy="5143500"/>
+          </a:xfrm>
+          <a:prstGeom prst="rect">
+            <a:avLst/>
+          </a:prstGeom>
+        </p:spPr>
+      </p:pic>
+    </p:spTree>
+  </p:cSld>
+  <p:clrMapOvr>
+    <a:masterClrMapping/>
+  </p:clrMapOvr>
+  <p:transition spd="fast">
+    <p:fade/>
+  </p:transition>
+</p:sld>
+</file>
+
+<file path=ppt/slides/slide4.xml><?xml version="1.0" encoding="utf-8"?>
+<p:sld xmlns:a="http://schemas.openxmlformats.org/drawingml/2006/main" xmlns:r="http://schemas.openxmlformats.org/officeDocument/2006/relationships" xmlns:p="http://schemas.openxmlformats.org/presentationml/2006/main">
+  <p:cSld name="Slide 4">
+    <p:bg>
+      <p:bgPr>
+        <a:solidFill>
+          <a:srgbClr val="0B0B0B"/>
+        </a:solidFill>
+      </p:bgPr>
+    </p:bg>
+    <p:spTree>
+      <p:nvGrpSpPr>
+        <p:cNvPr id="1" name=""/>
+        <p:cNvGrpSpPr/>
+        <p:nvPr/>
+      </p:nvGrpSpPr>
+      <p:grpSpPr>
+        <a:xfrm>
+          <a:off x="0" y="0"/>
+          <a:ext cx="0" cy="0"/>
+          <a:chOff x="0" y="0"/>
+          <a:chExt cx="0" cy="0"/>
+        </a:xfrm>
+      </p:grpSpPr>
+      <p:pic>
+        <p:nvPicPr>
+          <p:cNvPr id="2" name="Image 0" descr="Priora deck: problem-statement, step 3">    </p:cNvPr>
+          <p:cNvPicPr>
+            <a:picLocks noChangeAspect="1"/>
+          </p:cNvPicPr>
+          <p:nvPr/>
+        </p:nvPicPr>
+        <p:blipFill>
+          <a:blip r:embed="rId1"/>
+          <a:stretch>
+            <a:fillRect/>
+          </a:stretch>
+        </p:blipFill>
+        <p:spPr>
+          <a:xfrm>
+            <a:off x="0" y="0"/>
+            <a:ext cx="9144000" cy="5143500"/>
+          </a:xfrm>
+          <a:prstGeom prst="rect">
+            <a:avLst/>
+          </a:prstGeom>
+        </p:spPr>
+      </p:pic>
+    </p:spTree>
+  </p:cSld>
+  <p:clrMapOvr>
+    <a:masterClrMapping/>
+  </p:clrMapOvr>
+  <p:transition spd="fast">
+    <p:fade/>
+  </p:transition>
+</p:sld>
+</file>
+
+<file path=ppt/slides/slide40.xml><?xml version="1.0" encoding="utf-8"?>
+<p:sld xmlns:a="http://schemas.openxmlformats.org/drawingml/2006/main" xmlns:r="http://schemas.openxmlformats.org/officeDocument/2006/relationships" xmlns:p="http://schemas.openxmlformats.org/presentationml/2006/main">
+  <p:cSld name="Slide 40">
+    <p:bg>
+      <p:bgPr>
+        <a:solidFill>
+          <a:srgbClr val="0B0B0B"/>
+        </a:solidFill>
+      </p:bgPr>
+    </p:bg>
+    <p:spTree>
+      <p:nvGrpSpPr>
+        <p:cNvPr id="1" name=""/>
+        <p:cNvGrpSpPr/>
+        <p:nvPr/>
+      </p:nvGrpSpPr>
+      <p:grpSpPr>
+        <a:xfrm>
+          <a:off x="0" y="0"/>
+          <a:ext cx="0" cy="0"/>
+          <a:chOff x="0" y="0"/>
+          <a:chExt cx="0" cy="0"/>
+        </a:xfrm>
+      </p:grpSpPr>
+      <p:pic>
+        <p:nvPicPr>
+          <p:cNvPr id="2" name="Image 0" descr="Priora deck: clinicians, step 1">    </p:cNvPr>
+          <p:cNvPicPr>
+            <a:picLocks noChangeAspect="1"/>
+          </p:cNvPicPr>
+          <p:nvPr/>
+        </p:nvPicPr>
+        <p:blipFill>
+          <a:blip r:embed="rId1"/>
+          <a:stretch>
+            <a:fillRect/>
+          </a:stretch>
+        </p:blipFill>
+        <p:spPr>
+          <a:xfrm>
+            <a:off x="0" y="0"/>
+            <a:ext cx="9144000" cy="5143500"/>
+          </a:xfrm>
+          <a:prstGeom prst="rect">
+            <a:avLst/>
+          </a:prstGeom>
+        </p:spPr>
+      </p:pic>
+    </p:spTree>
+  </p:cSld>
+  <p:clrMapOvr>
+    <a:masterClrMapping/>
+  </p:clrMapOvr>
+  <p:transition spd="fast">
+    <p:fade/>
+  </p:transition>
+</p:sld>
+</file>
+
+<file path=ppt/slides/slide41.xml><?xml version="1.0" encoding="utf-8"?>
+<p:sld xmlns:a="http://schemas.openxmlformats.org/drawingml/2006/main" xmlns:r="http://schemas.openxmlformats.org/officeDocument/2006/relationships" xmlns:p="http://schemas.openxmlformats.org/presentationml/2006/main">
+  <p:cSld name="Slide 41">
+    <p:bg>
+      <p:bgPr>
+        <a:solidFill>
+          <a:srgbClr val="0B0B0B"/>
+        </a:solidFill>
+      </p:bgPr>
+    </p:bg>
+    <p:spTree>
+      <p:nvGrpSpPr>
+        <p:cNvPr id="1" name=""/>
+        <p:cNvGrpSpPr/>
+        <p:nvPr/>
+      </p:nvGrpSpPr>
+      <p:grpSpPr>
+        <a:xfrm>
+          <a:off x="0" y="0"/>
+          <a:ext cx="0" cy="0"/>
+          <a:chOff x="0" y="0"/>
+          <a:chExt cx="0" cy="0"/>
+        </a:xfrm>
+      </p:grpSpPr>
+      <p:pic>
+        <p:nvPicPr>
+          <p:cNvPr id="2" name="Image 0" descr="Priora deck: clinicians, step 2">    </p:cNvPr>
+          <p:cNvPicPr>
+            <a:picLocks noChangeAspect="1"/>
+          </p:cNvPicPr>
+          <p:nvPr/>
+        </p:nvPicPr>
+        <p:blipFill>
+          <a:blip r:embed="rId1"/>
+          <a:stretch>
+            <a:fillRect/>
+          </a:stretch>
+        </p:blipFill>
+        <p:spPr>
+          <a:xfrm>
+            <a:off x="0" y="0"/>
+            <a:ext cx="9144000" cy="5143500"/>
+          </a:xfrm>
+          <a:prstGeom prst="rect">
+            <a:avLst/>
+          </a:prstGeom>
+        </p:spPr>
+      </p:pic>
+    </p:spTree>
+  </p:cSld>
+  <p:clrMapOvr>
+    <a:masterClrMapping/>
+  </p:clrMapOvr>
+  <p:transition spd="fast">
+    <p:fade/>
+  </p:transition>
+</p:sld>
+</file>
+
+<file path=ppt/slides/slide42.xml><?xml version="1.0" encoding="utf-8"?>
+<p:sld xmlns:a="http://schemas.openxmlformats.org/drawingml/2006/main" xmlns:r="http://schemas.openxmlformats.org/officeDocument/2006/relationships" xmlns:p="http://schemas.openxmlformats.org/presentationml/2006/main">
+  <p:cSld name="Slide 42">
+    <p:bg>
+      <p:bgPr>
+        <a:solidFill>
+          <a:srgbClr val="0B0B0B"/>
+        </a:solidFill>
+      </p:bgPr>
+    </p:bg>
+    <p:spTree>
+      <p:nvGrpSpPr>
+        <p:cNvPr id="1" name=""/>
+        <p:cNvGrpSpPr/>
+        <p:nvPr/>
+      </p:nvGrpSpPr>
+      <p:grpSpPr>
+        <a:xfrm>
+          <a:off x="0" y="0"/>
+          <a:ext cx="0" cy="0"/>
+          <a:chOff x="0" y="0"/>
+          <a:chExt cx="0" cy="0"/>
+        </a:xfrm>
+      </p:grpSpPr>
+      <p:pic>
+        <p:nvPicPr>
+          <p:cNvPr id="2" name="Image 0" descr="Priora deck: demo, step 1">    </p:cNvPr>
+          <p:cNvPicPr>
+            <a:picLocks noChangeAspect="1"/>
+          </p:cNvPicPr>
+          <p:nvPr/>
+        </p:nvPicPr>
+        <p:blipFill>
+          <a:blip r:embed="rId1"/>
+          <a:stretch>
+            <a:fillRect/>
+          </a:stretch>
+        </p:blipFill>
+        <p:spPr>
+          <a:xfrm>
+            <a:off x="0" y="0"/>
+            <a:ext cx="9144000" cy="5143500"/>
+          </a:xfrm>
+          <a:prstGeom prst="rect">
+            <a:avLst/>
+          </a:prstGeom>
+        </p:spPr>
+      </p:pic>
+    </p:spTree>
+  </p:cSld>
+  <p:clrMapOvr>
+    <a:masterClrMapping/>
+  </p:clrMapOvr>
+  <p:transition spd="fast">
+    <p:fade/>
+  </p:transition>
+</p:sld>
+</file>
+
+<file path=ppt/slides/slide43.xml><?xml version="1.0" encoding="utf-8"?>
+<p:sld xmlns:a="http://schemas.openxmlformats.org/drawingml/2006/main" xmlns:r="http://schemas.openxmlformats.org/officeDocument/2006/relationships" xmlns:p="http://schemas.openxmlformats.org/presentationml/2006/main">
+  <p:cSld name="Slide 43">
+    <p:bg>
+      <p:bgPr>
+        <a:solidFill>
+          <a:srgbClr val="0B0B0B"/>
+        </a:solidFill>
+      </p:bgPr>
+    </p:bg>
+    <p:spTree>
+      <p:nvGrpSpPr>
+        <p:cNvPr id="1" name=""/>
+        <p:cNvGrpSpPr/>
+        <p:nvPr/>
+      </p:nvGrpSpPr>
+      <p:grpSpPr>
+        <a:xfrm>
+          <a:off x="0" y="0"/>
+          <a:ext cx="0" cy="0"/>
+          <a:chOff x="0" y="0"/>
+          <a:chExt cx="0" cy="0"/>
+        </a:xfrm>
+      </p:grpSpPr>
+      <p:pic>
+        <p:nvPicPr>
+          <p:cNvPr id="2" name="Image 0" descr="Priora deck: proof, step 1">    </p:cNvPr>
+          <p:cNvPicPr>
+            <a:picLocks noChangeAspect="1"/>
+          </p:cNvPicPr>
+          <p:nvPr/>
+        </p:nvPicPr>
+        <p:blipFill>
+          <a:blip r:embed="rId1"/>
+          <a:stretch>
+            <a:fillRect/>
+          </a:stretch>
+        </p:blipFill>
+        <p:spPr>
+          <a:xfrm>
+            <a:off x="0" y="0"/>
+            <a:ext cx="9144000" cy="5143500"/>
+          </a:xfrm>
+          <a:prstGeom prst="rect">
+            <a:avLst/>
+          </a:prstGeom>
+        </p:spPr>
+      </p:pic>
+    </p:spTree>
+  </p:cSld>
+  <p:clrMapOvr>
+    <a:masterClrMapping/>
+  </p:clrMapOvr>
+  <p:transition spd="fast">
+    <p:fade/>
+  </p:transition>
+</p:sld>
+</file>
+
+<file path=ppt/slides/slide44.xml><?xml version="1.0" encoding="utf-8"?>
+<p:sld xmlns:a="http://schemas.openxmlformats.org/drawingml/2006/main" xmlns:r="http://schemas.openxmlformats.org/officeDocument/2006/relationships" xmlns:p="http://schemas.openxmlformats.org/presentationml/2006/main">
+  <p:cSld name="Slide 44">
+    <p:bg>
+      <p:bgPr>
+        <a:solidFill>
+          <a:srgbClr val="0B0B0B"/>
+        </a:solidFill>
+      </p:bgPr>
+    </p:bg>
+    <p:spTree>
+      <p:nvGrpSpPr>
+        <p:cNvPr id="1" name=""/>
+        <p:cNvGrpSpPr/>
+        <p:nvPr/>
+      </p:nvGrpSpPr>
+      <p:grpSpPr>
+        <a:xfrm>
+          <a:off x="0" y="0"/>
+          <a:ext cx="0" cy="0"/>
+          <a:chOff x="0" y="0"/>
+          <a:chExt cx="0" cy="0"/>
+        </a:xfrm>
+      </p:grpSpPr>
+      <p:pic>
+        <p:nvPicPr>
+          <p:cNvPr id="2" name="Image 0" descr="Priora deck: proof, step 2">    </p:cNvPr>
+          <p:cNvPicPr>
+            <a:picLocks noChangeAspect="1"/>
+          </p:cNvPicPr>
+          <p:nvPr/>
+        </p:nvPicPr>
+        <p:blipFill>
+          <a:blip r:embed="rId1"/>
+          <a:stretch>
+            <a:fillRect/>
+          </a:stretch>
+        </p:blipFill>
+        <p:spPr>
+          <a:xfrm>
+            <a:off x="0" y="0"/>
+            <a:ext cx="9144000" cy="5143500"/>
+          </a:xfrm>
+          <a:prstGeom prst="rect">
+            <a:avLst/>
+          </a:prstGeom>
+        </p:spPr>
+      </p:pic>
+    </p:spTree>
+  </p:cSld>
+  <p:clrMapOvr>
+    <a:masterClrMapping/>
+  </p:clrMapOvr>
+  <p:transition spd="fast">
+    <p:fade/>
+  </p:transition>
+</p:sld>
+</file>
+
+<file path=ppt/slides/slide45.xml><?xml version="1.0" encoding="utf-8"?>
+<p:sld xmlns:a="http://schemas.openxmlformats.org/drawingml/2006/main" xmlns:r="http://schemas.openxmlformats.org/officeDocument/2006/relationships" xmlns:p="http://schemas.openxmlformats.org/presentationml/2006/main">
+  <p:cSld name="Slide 45">
+    <p:bg>
+      <p:bgPr>
+        <a:solidFill>
+          <a:srgbClr val="0B0B0B"/>
+        </a:solidFill>
+      </p:bgPr>
+    </p:bg>
+    <p:spTree>
+      <p:nvGrpSpPr>
+        <p:cNvPr id="1" name=""/>
+        <p:cNvGrpSpPr/>
+        <p:nvPr/>
+      </p:nvGrpSpPr>
+      <p:grpSpPr>
+        <a:xfrm>
+          <a:off x="0" y="0"/>
+          <a:ext cx="0" cy="0"/>
+          <a:chOff x="0" y="0"/>
+          <a:chExt cx="0" cy="0"/>
+        </a:xfrm>
+      </p:grpSpPr>
+      <p:pic>
+        <p:nvPicPr>
+          <p:cNvPr id="2" name="Image 0" descr="Priora deck: proof, step 3">    </p:cNvPr>
+          <p:cNvPicPr>
+            <a:picLocks noChangeAspect="1"/>
+          </p:cNvPicPr>
+          <p:nvPr/>
+        </p:nvPicPr>
+        <p:blipFill>
+          <a:blip r:embed="rId1"/>
+          <a:stretch>
+            <a:fillRect/>
+          </a:stretch>
+        </p:blipFill>
+        <p:spPr>
+          <a:xfrm>
+            <a:off x="0" y="0"/>
+            <a:ext cx="9144000" cy="5143500"/>
+          </a:xfrm>
+          <a:prstGeom prst="rect">
+            <a:avLst/>
+          </a:prstGeom>
+        </p:spPr>
+      </p:pic>
+    </p:spTree>
+  </p:cSld>
+  <p:clrMapOvr>
+    <a:masterClrMapping/>
+  </p:clrMapOvr>
+  <p:transition spd="fast">
+    <p:fade/>
+  </p:transition>
+</p:sld>
+</file>
+
+<file path=ppt/slides/slide46.xml><?xml version="1.0" encoding="utf-8"?>
+<p:sld xmlns:a="http://schemas.openxmlformats.org/drawingml/2006/main" xmlns:r="http://schemas.openxmlformats.org/officeDocument/2006/relationships" xmlns:p="http://schemas.openxmlformats.org/presentationml/2006/main">
+  <p:cSld name="Slide 46">
+    <p:bg>
+      <p:bgPr>
+        <a:solidFill>
+          <a:srgbClr val="0B0B0B"/>
+        </a:solidFill>
+      </p:bgPr>
+    </p:bg>
+    <p:spTree>
+      <p:nvGrpSpPr>
+        <p:cNvPr id="1" name=""/>
+        <p:cNvGrpSpPr/>
+        <p:nvPr/>
+      </p:nvGrpSpPr>
+      <p:grpSpPr>
+        <a:xfrm>
+          <a:off x="0" y="0"/>
+          <a:ext cx="0" cy="0"/>
+          <a:chOff x="0" y="0"/>
+          <a:chExt cx="0" cy="0"/>
+        </a:xfrm>
+      </p:grpSpPr>
+      <p:pic>
+        <p:nvPicPr>
+          <p:cNvPr id="2" name="Image 0" descr="Priora deck: value, step 1">    </p:cNvPr>
+          <p:cNvPicPr>
+            <a:picLocks noChangeAspect="1"/>
+          </p:cNvPicPr>
+          <p:nvPr/>
+        </p:nvPicPr>
+        <p:blipFill>
+          <a:blip r:embed="rId1"/>
+          <a:stretch>
+            <a:fillRect/>
+          </a:stretch>
+        </p:blipFill>
+        <p:spPr>
+          <a:xfrm>
+            <a:off x="0" y="0"/>
+            <a:ext cx="9144000" cy="5143500"/>
+          </a:xfrm>
+          <a:prstGeom prst="rect">
+            <a:avLst/>
+          </a:prstGeom>
+        </p:spPr>
+      </p:pic>
+    </p:spTree>
+  </p:cSld>
+  <p:clrMapOvr>
+    <a:masterClrMapping/>
+  </p:clrMapOvr>
+  <p:transition spd="fast">
+    <p:fade/>
+  </p:transition>
+</p:sld>
+</file>
+
+<file path=ppt/slides/slide47.xml><?xml version="1.0" encoding="utf-8"?>
+<p:sld xmlns:a="http://schemas.openxmlformats.org/drawingml/2006/main" xmlns:r="http://schemas.openxmlformats.org/officeDocument/2006/relationships" xmlns:p="http://schemas.openxmlformats.org/presentationml/2006/main">
+  <p:cSld name="Slide 47">
+    <p:bg>
+      <p:bgPr>
+        <a:solidFill>
+          <a:srgbClr val="0B0B0B"/>
+        </a:solidFill>
+      </p:bgPr>
+    </p:bg>
+    <p:spTree>
+      <p:nvGrpSpPr>
+        <p:cNvPr id="1" name=""/>
+        <p:cNvGrpSpPr/>
+        <p:nvPr/>
+      </p:nvGrpSpPr>
+      <p:grpSpPr>
+        <a:xfrm>
+          <a:off x="0" y="0"/>
+          <a:ext cx="0" cy="0"/>
+          <a:chOff x="0" y="0"/>
+          <a:chExt cx="0" cy="0"/>
+        </a:xfrm>
+      </p:grpSpPr>
+      <p:pic>
+        <p:nvPicPr>
+          <p:cNvPr id="2" name="Image 0" descr="Priora deck: value, step 2">    </p:cNvPr>
+          <p:cNvPicPr>
+            <a:picLocks noChangeAspect="1"/>
+          </p:cNvPicPr>
+          <p:nvPr/>
+        </p:nvPicPr>
+        <p:blipFill>
+          <a:blip r:embed="rId1"/>
+          <a:stretch>
+            <a:fillRect/>
+          </a:stretch>
+        </p:blipFill>
+        <p:spPr>
+          <a:xfrm>
+            <a:off x="0" y="0"/>
+            <a:ext cx="9144000" cy="5143500"/>
+          </a:xfrm>
+          <a:prstGeom prst="rect">
+            <a:avLst/>
+          </a:prstGeom>
+        </p:spPr>
+      </p:pic>
+    </p:spTree>
+  </p:cSld>
+  <p:clrMapOvr>
+    <a:masterClrMapping/>
+  </p:clrMapOvr>
+  <p:transition spd="fast">
+    <p:fade/>
+  </p:transition>
+</p:sld>
+</file>
+
+<file path=ppt/slides/slide48.xml><?xml version="1.0" encoding="utf-8"?>
+<p:sld xmlns:a="http://schemas.openxmlformats.org/drawingml/2006/main" xmlns:r="http://schemas.openxmlformats.org/officeDocument/2006/relationships" xmlns:p="http://schemas.openxmlformats.org/presentationml/2006/main">
+  <p:cSld name="Slide 48">
+    <p:bg>
+      <p:bgPr>
+        <a:solidFill>
+          <a:srgbClr val="0B0B0B"/>
+        </a:solidFill>
+      </p:bgPr>
+    </p:bg>
+    <p:spTree>
+      <p:nvGrpSpPr>
+        <p:cNvPr id="1" name=""/>
+        <p:cNvGrpSpPr/>
+        <p:nvPr/>
+      </p:nvGrpSpPr>
+      <p:grpSpPr>
+        <a:xfrm>
+          <a:off x="0" y="0"/>
+          <a:ext cx="0" cy="0"/>
+          <a:chOff x="0" y="0"/>
+          <a:chExt cx="0" cy="0"/>
+        </a:xfrm>
+      </p:grpSpPr>
+      <p:pic>
+        <p:nvPicPr>
+          <p:cNvPr id="2" name="Image 0" descr="Priora deck: value, step 3">    </p:cNvPr>
+          <p:cNvPicPr>
+            <a:picLocks noChangeAspect="1"/>
+          </p:cNvPicPr>
+          <p:nvPr/>
+        </p:nvPicPr>
+        <p:blipFill>
+          <a:blip r:embed="rId1"/>
+          <a:stretch>
+            <a:fillRect/>
+          </a:stretch>
+        </p:blipFill>
+        <p:spPr>
+          <a:xfrm>
+            <a:off x="0" y="0"/>
+            <a:ext cx="9144000" cy="5143500"/>
+          </a:xfrm>
+          <a:prstGeom prst="rect">
+            <a:avLst/>
+          </a:prstGeom>
+        </p:spPr>
+      </p:pic>
+    </p:spTree>
+  </p:cSld>
+  <p:clrMapOvr>
+    <a:masterClrMapping/>
+  </p:clrMapOvr>
+  <p:transition spd="fast">
+    <p:fade/>
+  </p:transition>
+</p:sld>
+</file>
+
+<file path=ppt/slides/slide49.xml><?xml version="1.0" encoding="utf-8"?>
+<p:sld xmlns:a="http://schemas.openxmlformats.org/drawingml/2006/main" xmlns:r="http://schemas.openxmlformats.org/officeDocument/2006/relationships" xmlns:p="http://schemas.openxmlformats.org/presentationml/2006/main">
+  <p:cSld name="Slide 49">
+    <p:bg>
+      <p:bgPr>
+        <a:solidFill>
+          <a:srgbClr val="0B0B0B"/>
+        </a:solidFill>
+      </p:bgPr>
+    </p:bg>
+    <p:spTree>
+      <p:nvGrpSpPr>
+        <p:cNvPr id="1" name=""/>
+        <p:cNvGrpSpPr/>
+        <p:nvPr/>
+      </p:nvGrpSpPr>
+      <p:grpSpPr>
+        <a:xfrm>
+          <a:off x="0" y="0"/>
+          <a:ext cx="0" cy="0"/>
+          <a:chOff x="0" y="0"/>
+          <a:chExt cx="0" cy="0"/>
+        </a:xfrm>
+      </p:grpSpPr>
+      <p:pic>
+        <p:nvPicPr>
+          <p:cNvPr id="2" name="Image 0" descr="Priora deck: questions, step 1">    </p:cNvPr>
+          <p:cNvPicPr>
+            <a:picLocks noChangeAspect="1"/>
+          </p:cNvPicPr>
+          <p:nvPr/>
+        </p:nvPicPr>
+        <p:blipFill>
+          <a:blip r:embed="rId1"/>
+          <a:stretch>
+            <a:fillRect/>
+          </a:stretch>
+        </p:blipFill>
+        <p:spPr>
+          <a:xfrm>
+            <a:off x="0" y="0"/>
+            <a:ext cx="9144000" cy="5143500"/>
+          </a:xfrm>
+          <a:prstGeom prst="rect">
+            <a:avLst/>
+          </a:prstGeom>
+        </p:spPr>
+      </p:pic>
+    </p:spTree>
+  </p:cSld>
+  <p:clrMapOvr>
+    <a:masterClrMapping/>
+  </p:clrMapOvr>
+  <p:transition spd="fast">
+    <p:fade/>
+  </p:transition>
+</p:sld>
+</file>
+
+<file path=ppt/slides/slide5.xml><?xml version="1.0" encoding="utf-8"?>
+<p:sld xmlns:a="http://schemas.openxmlformats.org/drawingml/2006/main" xmlns:r="http://schemas.openxmlformats.org/officeDocument/2006/relationships" xmlns:p="http://schemas.openxmlformats.org/presentationml/2006/main">
+  <p:cSld name="Slide 5">
     <p:bg>
       <p:bgPr>
         <a:solidFill>
@@ -4177,481 +8189,9 @@
 </p:sld>
 </file>
 
-<file path=ppt/slides/slide20.xml><?xml version="1.0" encoding="utf-8"?>
+<file path=ppt/slides/slide6.xml><?xml version="1.0" encoding="utf-8"?>
 <p:sld xmlns:a="http://schemas.openxmlformats.org/drawingml/2006/main" xmlns:r="http://schemas.openxmlformats.org/officeDocument/2006/relationships" xmlns:p="http://schemas.openxmlformats.org/presentationml/2006/main">
-  <p:cSld name="Slide 20">
-    <p:bg>
-      <p:bgPr>
-        <a:solidFill>
-          <a:srgbClr val="0B0B0B"/>
-        </a:solidFill>
-      </p:bgPr>
-    </p:bg>
-    <p:spTree>
-      <p:nvGrpSpPr>
-        <p:cNvPr id="1" name=""/>
-        <p:cNvGrpSpPr/>
-        <p:nvPr/>
-      </p:nvGrpSpPr>
-      <p:grpSpPr>
-        <a:xfrm>
-          <a:off x="0" y="0"/>
-          <a:ext cx="0" cy="0"/>
-          <a:chOff x="0" y="0"/>
-          <a:chExt cx="0" cy="0"/>
-        </a:xfrm>
-      </p:grpSpPr>
-      <p:pic>
-        <p:nvPicPr>
-          <p:cNvPr id="2" name="Image 0" descr="Priora deck: pipeline, step 12">    </p:cNvPr>
-          <p:cNvPicPr>
-            <a:picLocks noChangeAspect="1"/>
-          </p:cNvPicPr>
-          <p:nvPr/>
-        </p:nvPicPr>
-        <p:blipFill>
-          <a:blip r:embed="rId1"/>
-          <a:stretch>
-            <a:fillRect/>
-          </a:stretch>
-        </p:blipFill>
-        <p:spPr>
-          <a:xfrm>
-            <a:off x="0" y="0"/>
-            <a:ext cx="9144000" cy="5143500"/>
-          </a:xfrm>
-          <a:prstGeom prst="rect">
-            <a:avLst/>
-          </a:prstGeom>
-        </p:spPr>
-      </p:pic>
-    </p:spTree>
-  </p:cSld>
-  <p:clrMapOvr>
-    <a:masterClrMapping/>
-  </p:clrMapOvr>
-  <p:transition spd="fast">
-    <p:fade/>
-  </p:transition>
-</p:sld>
-</file>
-
-<file path=ppt/slides/slide21.xml><?xml version="1.0" encoding="utf-8"?>
-<p:sld xmlns:a="http://schemas.openxmlformats.org/drawingml/2006/main" xmlns:r="http://schemas.openxmlformats.org/officeDocument/2006/relationships" xmlns:p="http://schemas.openxmlformats.org/presentationml/2006/main">
-  <p:cSld name="Slide 21">
-    <p:bg>
-      <p:bgPr>
-        <a:solidFill>
-          <a:srgbClr val="0B0B0B"/>
-        </a:solidFill>
-      </p:bgPr>
-    </p:bg>
-    <p:spTree>
-      <p:nvGrpSpPr>
-        <p:cNvPr id="1" name=""/>
-        <p:cNvGrpSpPr/>
-        <p:nvPr/>
-      </p:nvGrpSpPr>
-      <p:grpSpPr>
-        <a:xfrm>
-          <a:off x="0" y="0"/>
-          <a:ext cx="0" cy="0"/>
-          <a:chOff x="0" y="0"/>
-          <a:chExt cx="0" cy="0"/>
-        </a:xfrm>
-      </p:grpSpPr>
-      <p:pic>
-        <p:nvPicPr>
-          <p:cNvPr id="2" name="Image 0" descr="Priora deck: pipeline, step 13">    </p:cNvPr>
-          <p:cNvPicPr>
-            <a:picLocks noChangeAspect="1"/>
-          </p:cNvPicPr>
-          <p:nvPr/>
-        </p:nvPicPr>
-        <p:blipFill>
-          <a:blip r:embed="rId1"/>
-          <a:stretch>
-            <a:fillRect/>
-          </a:stretch>
-        </p:blipFill>
-        <p:spPr>
-          <a:xfrm>
-            <a:off x="0" y="0"/>
-            <a:ext cx="9144000" cy="5143500"/>
-          </a:xfrm>
-          <a:prstGeom prst="rect">
-            <a:avLst/>
-          </a:prstGeom>
-        </p:spPr>
-      </p:pic>
-    </p:spTree>
-  </p:cSld>
-  <p:clrMapOvr>
-    <a:masterClrMapping/>
-  </p:clrMapOvr>
-  <p:transition spd="fast">
-    <p:fade/>
-  </p:transition>
-</p:sld>
-</file>
-
-<file path=ppt/slides/slide22.xml><?xml version="1.0" encoding="utf-8"?>
-<p:sld xmlns:a="http://schemas.openxmlformats.org/drawingml/2006/main" xmlns:r="http://schemas.openxmlformats.org/officeDocument/2006/relationships" xmlns:p="http://schemas.openxmlformats.org/presentationml/2006/main">
-  <p:cSld name="Slide 22">
-    <p:bg>
-      <p:bgPr>
-        <a:solidFill>
-          <a:srgbClr val="0B0B0B"/>
-        </a:solidFill>
-      </p:bgPr>
-    </p:bg>
-    <p:spTree>
-      <p:nvGrpSpPr>
-        <p:cNvPr id="1" name=""/>
-        <p:cNvGrpSpPr/>
-        <p:nvPr/>
-      </p:nvGrpSpPr>
-      <p:grpSpPr>
-        <a:xfrm>
-          <a:off x="0" y="0"/>
-          <a:ext cx="0" cy="0"/>
-          <a:chOff x="0" y="0"/>
-          <a:chExt cx="0" cy="0"/>
-        </a:xfrm>
-      </p:grpSpPr>
-      <p:pic>
-        <p:nvPicPr>
-          <p:cNvPr id="2" name="Image 0" descr="Priora deck: pipeline, step 14">    </p:cNvPr>
-          <p:cNvPicPr>
-            <a:picLocks noChangeAspect="1"/>
-          </p:cNvPicPr>
-          <p:nvPr/>
-        </p:nvPicPr>
-        <p:blipFill>
-          <a:blip r:embed="rId1"/>
-          <a:stretch>
-            <a:fillRect/>
-          </a:stretch>
-        </p:blipFill>
-        <p:spPr>
-          <a:xfrm>
-            <a:off x="0" y="0"/>
-            <a:ext cx="9144000" cy="5143500"/>
-          </a:xfrm>
-          <a:prstGeom prst="rect">
-            <a:avLst/>
-          </a:prstGeom>
-        </p:spPr>
-      </p:pic>
-    </p:spTree>
-  </p:cSld>
-  <p:clrMapOvr>
-    <a:masterClrMapping/>
-  </p:clrMapOvr>
-  <p:transition spd="fast">
-    <p:fade/>
-  </p:transition>
-</p:sld>
-</file>
-
-<file path=ppt/slides/slide23.xml><?xml version="1.0" encoding="utf-8"?>
-<p:sld xmlns:a="http://schemas.openxmlformats.org/drawingml/2006/main" xmlns:r="http://schemas.openxmlformats.org/officeDocument/2006/relationships" xmlns:p="http://schemas.openxmlformats.org/presentationml/2006/main">
-  <p:cSld name="Slide 23">
-    <p:bg>
-      <p:bgPr>
-        <a:solidFill>
-          <a:srgbClr val="0B0B0B"/>
-        </a:solidFill>
-      </p:bgPr>
-    </p:bg>
-    <p:spTree>
-      <p:nvGrpSpPr>
-        <p:cNvPr id="1" name=""/>
-        <p:cNvGrpSpPr/>
-        <p:nvPr/>
-      </p:nvGrpSpPr>
-      <p:grpSpPr>
-        <a:xfrm>
-          <a:off x="0" y="0"/>
-          <a:ext cx="0" cy="0"/>
-          <a:chOff x="0" y="0"/>
-          <a:chExt cx="0" cy="0"/>
-        </a:xfrm>
-      </p:grpSpPr>
-      <p:pic>
-        <p:nvPicPr>
-          <p:cNvPr id="2" name="Image 0" descr="Priora deck: demo, step 1">    </p:cNvPr>
-          <p:cNvPicPr>
-            <a:picLocks noChangeAspect="1"/>
-          </p:cNvPicPr>
-          <p:nvPr/>
-        </p:nvPicPr>
-        <p:blipFill>
-          <a:blip r:embed="rId1"/>
-          <a:stretch>
-            <a:fillRect/>
-          </a:stretch>
-        </p:blipFill>
-        <p:spPr>
-          <a:xfrm>
-            <a:off x="0" y="0"/>
-            <a:ext cx="9144000" cy="5143500"/>
-          </a:xfrm>
-          <a:prstGeom prst="rect">
-            <a:avLst/>
-          </a:prstGeom>
-        </p:spPr>
-      </p:pic>
-    </p:spTree>
-  </p:cSld>
-  <p:clrMapOvr>
-    <a:masterClrMapping/>
-  </p:clrMapOvr>
-  <p:transition spd="fast">
-    <p:fade/>
-  </p:transition>
-</p:sld>
-</file>
-
-<file path=ppt/slides/slide24.xml><?xml version="1.0" encoding="utf-8"?>
-<p:sld xmlns:a="http://schemas.openxmlformats.org/drawingml/2006/main" xmlns:r="http://schemas.openxmlformats.org/officeDocument/2006/relationships" xmlns:p="http://schemas.openxmlformats.org/presentationml/2006/main">
-  <p:cSld name="Slide 24">
-    <p:bg>
-      <p:bgPr>
-        <a:solidFill>
-          <a:srgbClr val="0B0B0B"/>
-        </a:solidFill>
-      </p:bgPr>
-    </p:bg>
-    <p:spTree>
-      <p:nvGrpSpPr>
-        <p:cNvPr id="1" name=""/>
-        <p:cNvGrpSpPr/>
-        <p:nvPr/>
-      </p:nvGrpSpPr>
-      <p:grpSpPr>
-        <a:xfrm>
-          <a:off x="0" y="0"/>
-          <a:ext cx="0" cy="0"/>
-          <a:chOff x="0" y="0"/>
-          <a:chExt cx="0" cy="0"/>
-        </a:xfrm>
-      </p:grpSpPr>
-      <p:pic>
-        <p:nvPicPr>
-          <p:cNvPr id="2" name="Image 0" descr="Priora deck: proof, step 1">    </p:cNvPr>
-          <p:cNvPicPr>
-            <a:picLocks noChangeAspect="1"/>
-          </p:cNvPicPr>
-          <p:nvPr/>
-        </p:nvPicPr>
-        <p:blipFill>
-          <a:blip r:embed="rId1"/>
-          <a:stretch>
-            <a:fillRect/>
-          </a:stretch>
-        </p:blipFill>
-        <p:spPr>
-          <a:xfrm>
-            <a:off x="0" y="0"/>
-            <a:ext cx="9144000" cy="5143500"/>
-          </a:xfrm>
-          <a:prstGeom prst="rect">
-            <a:avLst/>
-          </a:prstGeom>
-        </p:spPr>
-      </p:pic>
-    </p:spTree>
-  </p:cSld>
-  <p:clrMapOvr>
-    <a:masterClrMapping/>
-  </p:clrMapOvr>
-  <p:transition spd="fast">
-    <p:fade/>
-  </p:transition>
-</p:sld>
-</file>
-
-<file path=ppt/slides/slide25.xml><?xml version="1.0" encoding="utf-8"?>
-<p:sld xmlns:a="http://schemas.openxmlformats.org/drawingml/2006/main" xmlns:r="http://schemas.openxmlformats.org/officeDocument/2006/relationships" xmlns:p="http://schemas.openxmlformats.org/presentationml/2006/main">
-  <p:cSld name="Slide 25">
-    <p:bg>
-      <p:bgPr>
-        <a:solidFill>
-          <a:srgbClr val="0B0B0B"/>
-        </a:solidFill>
-      </p:bgPr>
-    </p:bg>
-    <p:spTree>
-      <p:nvGrpSpPr>
-        <p:cNvPr id="1" name=""/>
-        <p:cNvGrpSpPr/>
-        <p:nvPr/>
-      </p:nvGrpSpPr>
-      <p:grpSpPr>
-        <a:xfrm>
-          <a:off x="0" y="0"/>
-          <a:ext cx="0" cy="0"/>
-          <a:chOff x="0" y="0"/>
-          <a:chExt cx="0" cy="0"/>
-        </a:xfrm>
-      </p:grpSpPr>
-      <p:pic>
-        <p:nvPicPr>
-          <p:cNvPr id="2" name="Image 0" descr="Priora deck: proof, step 2">    </p:cNvPr>
-          <p:cNvPicPr>
-            <a:picLocks noChangeAspect="1"/>
-          </p:cNvPicPr>
-          <p:nvPr/>
-        </p:nvPicPr>
-        <p:blipFill>
-          <a:blip r:embed="rId1"/>
-          <a:stretch>
-            <a:fillRect/>
-          </a:stretch>
-        </p:blipFill>
-        <p:spPr>
-          <a:xfrm>
-            <a:off x="0" y="0"/>
-            <a:ext cx="9144000" cy="5143500"/>
-          </a:xfrm>
-          <a:prstGeom prst="rect">
-            <a:avLst/>
-          </a:prstGeom>
-        </p:spPr>
-      </p:pic>
-    </p:spTree>
-  </p:cSld>
-  <p:clrMapOvr>
-    <a:masterClrMapping/>
-  </p:clrMapOvr>
-  <p:transition spd="fast">
-    <p:fade/>
-  </p:transition>
-</p:sld>
-</file>
-
-<file path=ppt/slides/slide26.xml><?xml version="1.0" encoding="utf-8"?>
-<p:sld xmlns:a="http://schemas.openxmlformats.org/drawingml/2006/main" xmlns:r="http://schemas.openxmlformats.org/officeDocument/2006/relationships" xmlns:p="http://schemas.openxmlformats.org/presentationml/2006/main">
-  <p:cSld name="Slide 26">
-    <p:bg>
-      <p:bgPr>
-        <a:solidFill>
-          <a:srgbClr val="0B0B0B"/>
-        </a:solidFill>
-      </p:bgPr>
-    </p:bg>
-    <p:spTree>
-      <p:nvGrpSpPr>
-        <p:cNvPr id="1" name=""/>
-        <p:cNvGrpSpPr/>
-        <p:nvPr/>
-      </p:nvGrpSpPr>
-      <p:grpSpPr>
-        <a:xfrm>
-          <a:off x="0" y="0"/>
-          <a:ext cx="0" cy="0"/>
-          <a:chOff x="0" y="0"/>
-          <a:chExt cx="0" cy="0"/>
-        </a:xfrm>
-      </p:grpSpPr>
-      <p:pic>
-        <p:nvPicPr>
-          <p:cNvPr id="2" name="Image 0" descr="Priora deck: proof, step 3">    </p:cNvPr>
-          <p:cNvPicPr>
-            <a:picLocks noChangeAspect="1"/>
-          </p:cNvPicPr>
-          <p:nvPr/>
-        </p:nvPicPr>
-        <p:blipFill>
-          <a:blip r:embed="rId1"/>
-          <a:stretch>
-            <a:fillRect/>
-          </a:stretch>
-        </p:blipFill>
-        <p:spPr>
-          <a:xfrm>
-            <a:off x="0" y="0"/>
-            <a:ext cx="9144000" cy="5143500"/>
-          </a:xfrm>
-          <a:prstGeom prst="rect">
-            <a:avLst/>
-          </a:prstGeom>
-        </p:spPr>
-      </p:pic>
-    </p:spTree>
-  </p:cSld>
-  <p:clrMapOvr>
-    <a:masterClrMapping/>
-  </p:clrMapOvr>
-  <p:transition spd="fast">
-    <p:fade/>
-  </p:transition>
-</p:sld>
-</file>
-
-<file path=ppt/slides/slide27.xml><?xml version="1.0" encoding="utf-8"?>
-<p:sld xmlns:a="http://schemas.openxmlformats.org/drawingml/2006/main" xmlns:r="http://schemas.openxmlformats.org/officeDocument/2006/relationships" xmlns:p="http://schemas.openxmlformats.org/presentationml/2006/main">
-  <p:cSld name="Slide 27">
-    <p:bg>
-      <p:bgPr>
-        <a:solidFill>
-          <a:srgbClr val="0B0B0B"/>
-        </a:solidFill>
-      </p:bgPr>
-    </p:bg>
-    <p:spTree>
-      <p:nvGrpSpPr>
-        <p:cNvPr id="1" name=""/>
-        <p:cNvGrpSpPr/>
-        <p:nvPr/>
-      </p:nvGrpSpPr>
-      <p:grpSpPr>
-        <a:xfrm>
-          <a:off x="0" y="0"/>
-          <a:ext cx="0" cy="0"/>
-          <a:chOff x="0" y="0"/>
-          <a:chExt cx="0" cy="0"/>
-        </a:xfrm>
-      </p:grpSpPr>
-      <p:pic>
-        <p:nvPicPr>
-          <p:cNvPr id="2" name="Image 0" descr="Priora deck: questions, step 1">    </p:cNvPr>
-          <p:cNvPicPr>
-            <a:picLocks noChangeAspect="1"/>
-          </p:cNvPicPr>
-          <p:nvPr/>
-        </p:nvPicPr>
-        <p:blipFill>
-          <a:blip r:embed="rId1"/>
-          <a:stretch>
-            <a:fillRect/>
-          </a:stretch>
-        </p:blipFill>
-        <p:spPr>
-          <a:xfrm>
-            <a:off x="0" y="0"/>
-            <a:ext cx="9144000" cy="5143500"/>
-          </a:xfrm>
-          <a:prstGeom prst="rect">
-            <a:avLst/>
-          </a:prstGeom>
-        </p:spPr>
-      </p:pic>
-    </p:spTree>
-  </p:cSld>
-  <p:clrMapOvr>
-    <a:masterClrMapping/>
-  </p:clrMapOvr>
-  <p:transition spd="fast">
-    <p:fade/>
-  </p:transition>
-</p:sld>
-</file>
-
-<file path=ppt/slides/slide3.xml><?xml version="1.0" encoding="utf-8"?>
-<p:sld xmlns:a="http://schemas.openxmlformats.org/drawingml/2006/main" xmlns:r="http://schemas.openxmlformats.org/officeDocument/2006/relationships" xmlns:p="http://schemas.openxmlformats.org/presentationml/2006/main">
-  <p:cSld name="Slide 3">
+  <p:cSld name="Slide 6">
     <p:bg>
       <p:bgPr>
         <a:solidFill>
@@ -4708,9 +8248,9 @@
 </p:sld>
 </file>
 
-<file path=ppt/slides/slide4.xml><?xml version="1.0" encoding="utf-8"?>
+<file path=ppt/slides/slide7.xml><?xml version="1.0" encoding="utf-8"?>
 <p:sld xmlns:a="http://schemas.openxmlformats.org/drawingml/2006/main" xmlns:r="http://schemas.openxmlformats.org/officeDocument/2006/relationships" xmlns:p="http://schemas.openxmlformats.org/presentationml/2006/main">
-  <p:cSld name="Slide 4">
+  <p:cSld name="Slide 7">
     <p:bg>
       <p:bgPr>
         <a:solidFill>
@@ -4767,9 +8307,9 @@
 </p:sld>
 </file>
 
-<file path=ppt/slides/slide5.xml><?xml version="1.0" encoding="utf-8"?>
+<file path=ppt/slides/slide8.xml><?xml version="1.0" encoding="utf-8"?>
 <p:sld xmlns:a="http://schemas.openxmlformats.org/drawingml/2006/main" xmlns:r="http://schemas.openxmlformats.org/officeDocument/2006/relationships" xmlns:p="http://schemas.openxmlformats.org/presentationml/2006/main">
-  <p:cSld name="Slide 5">
+  <p:cSld name="Slide 8">
     <p:bg>
       <p:bgPr>
         <a:solidFill>
@@ -4826,183 +8366,6 @@
 </p:sld>
 </file>
 
-<file path=ppt/slides/slide6.xml><?xml version="1.0" encoding="utf-8"?>
-<p:sld xmlns:a="http://schemas.openxmlformats.org/drawingml/2006/main" xmlns:r="http://schemas.openxmlformats.org/officeDocument/2006/relationships" xmlns:p="http://schemas.openxmlformats.org/presentationml/2006/main">
-  <p:cSld name="Slide 6">
-    <p:bg>
-      <p:bgPr>
-        <a:solidFill>
-          <a:srgbClr val="0B0B0B"/>
-        </a:solidFill>
-      </p:bgPr>
-    </p:bg>
-    <p:spTree>
-      <p:nvGrpSpPr>
-        <p:cNvPr id="1" name=""/>
-        <p:cNvGrpSpPr/>
-        <p:nvPr/>
-      </p:nvGrpSpPr>
-      <p:grpSpPr>
-        <a:xfrm>
-          <a:off x="0" y="0"/>
-          <a:ext cx="0" cy="0"/>
-          <a:chOff x="0" y="0"/>
-          <a:chExt cx="0" cy="0"/>
-        </a:xfrm>
-      </p:grpSpPr>
-      <p:pic>
-        <p:nvPicPr>
-          <p:cNvPr id="2" name="Image 0" descr="Priora deck: problem, step 5">    </p:cNvPr>
-          <p:cNvPicPr>
-            <a:picLocks noChangeAspect="1"/>
-          </p:cNvPicPr>
-          <p:nvPr/>
-        </p:nvPicPr>
-        <p:blipFill>
-          <a:blip r:embed="rId1"/>
-          <a:stretch>
-            <a:fillRect/>
-          </a:stretch>
-        </p:blipFill>
-        <p:spPr>
-          <a:xfrm>
-            <a:off x="0" y="0"/>
-            <a:ext cx="9144000" cy="5143500"/>
-          </a:xfrm>
-          <a:prstGeom prst="rect">
-            <a:avLst/>
-          </a:prstGeom>
-        </p:spPr>
-      </p:pic>
-    </p:spTree>
-  </p:cSld>
-  <p:clrMapOvr>
-    <a:masterClrMapping/>
-  </p:clrMapOvr>
-  <p:transition spd="fast">
-    <p:fade/>
-  </p:transition>
-</p:sld>
-</file>
-
-<file path=ppt/slides/slide7.xml><?xml version="1.0" encoding="utf-8"?>
-<p:sld xmlns:a="http://schemas.openxmlformats.org/drawingml/2006/main" xmlns:r="http://schemas.openxmlformats.org/officeDocument/2006/relationships" xmlns:p="http://schemas.openxmlformats.org/presentationml/2006/main">
-  <p:cSld name="Slide 7">
-    <p:bg>
-      <p:bgPr>
-        <a:solidFill>
-          <a:srgbClr val="0B0B0B"/>
-        </a:solidFill>
-      </p:bgPr>
-    </p:bg>
-    <p:spTree>
-      <p:nvGrpSpPr>
-        <p:cNvPr id="1" name=""/>
-        <p:cNvGrpSpPr/>
-        <p:nvPr/>
-      </p:nvGrpSpPr>
-      <p:grpSpPr>
-        <a:xfrm>
-          <a:off x="0" y="0"/>
-          <a:ext cx="0" cy="0"/>
-          <a:chOff x="0" y="0"/>
-          <a:chExt cx="0" cy="0"/>
-        </a:xfrm>
-      </p:grpSpPr>
-      <p:pic>
-        <p:nvPicPr>
-          <p:cNvPr id="2" name="Image 0" descr="Priora deck: insight, step 1">    </p:cNvPr>
-          <p:cNvPicPr>
-            <a:picLocks noChangeAspect="1"/>
-          </p:cNvPicPr>
-          <p:nvPr/>
-        </p:nvPicPr>
-        <p:blipFill>
-          <a:blip r:embed="rId1"/>
-          <a:stretch>
-            <a:fillRect/>
-          </a:stretch>
-        </p:blipFill>
-        <p:spPr>
-          <a:xfrm>
-            <a:off x="0" y="0"/>
-            <a:ext cx="9144000" cy="5143500"/>
-          </a:xfrm>
-          <a:prstGeom prst="rect">
-            <a:avLst/>
-          </a:prstGeom>
-        </p:spPr>
-      </p:pic>
-    </p:spTree>
-  </p:cSld>
-  <p:clrMapOvr>
-    <a:masterClrMapping/>
-  </p:clrMapOvr>
-  <p:transition spd="fast">
-    <p:fade/>
-  </p:transition>
-</p:sld>
-</file>
-
-<file path=ppt/slides/slide8.xml><?xml version="1.0" encoding="utf-8"?>
-<p:sld xmlns:a="http://schemas.openxmlformats.org/drawingml/2006/main" xmlns:r="http://schemas.openxmlformats.org/officeDocument/2006/relationships" xmlns:p="http://schemas.openxmlformats.org/presentationml/2006/main">
-  <p:cSld name="Slide 8">
-    <p:bg>
-      <p:bgPr>
-        <a:solidFill>
-          <a:srgbClr val="0B0B0B"/>
-        </a:solidFill>
-      </p:bgPr>
-    </p:bg>
-    <p:spTree>
-      <p:nvGrpSpPr>
-        <p:cNvPr id="1" name=""/>
-        <p:cNvGrpSpPr/>
-        <p:nvPr/>
-      </p:nvGrpSpPr>
-      <p:grpSpPr>
-        <a:xfrm>
-          <a:off x="0" y="0"/>
-          <a:ext cx="0" cy="0"/>
-          <a:chOff x="0" y="0"/>
-          <a:chExt cx="0" cy="0"/>
-        </a:xfrm>
-      </p:grpSpPr>
-      <p:pic>
-        <p:nvPicPr>
-          <p:cNvPr id="2" name="Image 0" descr="Priora deck: insight, step 2">    </p:cNvPr>
-          <p:cNvPicPr>
-            <a:picLocks noChangeAspect="1"/>
-          </p:cNvPicPr>
-          <p:nvPr/>
-        </p:nvPicPr>
-        <p:blipFill>
-          <a:blip r:embed="rId1"/>
-          <a:stretch>
-            <a:fillRect/>
-          </a:stretch>
-        </p:blipFill>
-        <p:spPr>
-          <a:xfrm>
-            <a:off x="0" y="0"/>
-            <a:ext cx="9144000" cy="5143500"/>
-          </a:xfrm>
-          <a:prstGeom prst="rect">
-            <a:avLst/>
-          </a:prstGeom>
-        </p:spPr>
-      </p:pic>
-    </p:spTree>
-  </p:cSld>
-  <p:clrMapOvr>
-    <a:masterClrMapping/>
-  </p:clrMapOvr>
-  <p:transition spd="fast">
-    <p:fade/>
-  </p:transition>
-</p:sld>
-</file>
-
 <file path=ppt/slides/slide9.xml><?xml version="1.0" encoding="utf-8"?>
 <p:sld xmlns:a="http://schemas.openxmlformats.org/drawingml/2006/main" xmlns:r="http://schemas.openxmlformats.org/officeDocument/2006/relationships" xmlns:p="http://schemas.openxmlformats.org/presentationml/2006/main">
   <p:cSld name="Slide 9">
@@ -5029,7 +8392,7 @@
       </p:grpSpPr>
       <p:pic>
         <p:nvPicPr>
-          <p:cNvPr id="2" name="Image 0" descr="Priora deck: pipeline, step 1">    </p:cNvPr>
+          <p:cNvPr id="2" name="Image 0" descr="Priora deck: problem, step 5">    </p:cNvPr>
           <p:cNvPicPr>
             <a:picLocks noChangeAspect="1"/>
           </p:cNvPicPr>
